--- a/DATAS/202303 GI Travel EDA - Sharing with GI team.pptx
+++ b/DATAS/202303 GI Travel EDA - Sharing with GI team.pptx
@@ -162,7 +162,7 @@
       </p:ext>
     </p:extLst>
   </p:cmAuthor>
-  <p:cmAuthor id="2" name="AU Kelvin" initials="AK" lastIdx="2" clrIdx="1">
+  <p:cmAuthor id="2" name="AU Kelvin" initials="AK" lastIdx="14" clrIdx="1">
     <p:extLst>
       <p:ext uri="{19B8F6BF-5375-455C-9EA6-DF929625EA0E}">
         <p15:presenceInfo xmlns:p15="http://schemas.microsoft.com/office/powerpoint/2012/main" userId="S::kelvin.au@axa.com.hk::416e5d84-3133-4774-aa1a-290e1bef47d6" providerId="AD"/>
@@ -182,10 +182,10 @@
 <file path=ppt/revisionInfo.xml><?xml version="1.0" encoding="utf-8"?>
 <p1510:revInfo xmlns:a="http://schemas.openxmlformats.org/drawingml/2006/main" xmlns:r="http://schemas.openxmlformats.org/officeDocument/2006/relationships" xmlns:p1510="http://schemas.microsoft.com/office/powerpoint/2015/10/main">
   <p1510:revLst>
-    <p1510:client id="{0E7D56F6-7F0E-4E33-94F3-B4A6600CE76B}" v="358" dt="2023-03-30T10:02:59.002"/>
-    <p1510:client id="{5B8966E4-3FDC-47B2-843B-7F15A992AB94}" v="3878" dt="2023-03-30T09:26:43.468"/>
+    <p1510:client id="{0E7D56F6-7F0E-4E33-94F3-B4A6600CE76B}" v="694" dt="2023-03-31T09:00:35.503"/>
+    <p1510:client id="{5B8966E4-3FDC-47B2-843B-7F15A992AB94}" v="3952" dt="2023-03-31T09:12:27.723"/>
     <p1510:client id="{5C4B6D26-C297-9DAB-3EC8-275D984D86E7}" v="3223" dt="2023-03-30T09:22:16.452"/>
-    <p1510:client id="{C718A815-F846-4AC5-2704-22853916D594}" v="956" dt="2023-03-29T11:53:04.533"/>
+    <p1510:client id="{B9F4ABDA-BC0D-6F70-AD93-3B6E30898091}" v="12" dt="2023-03-31T08:12:24.767"/>
   </p1510:revLst>
 </p1510:revInfo>
 </file>
@@ -407,6 +407,195 @@
             <ac:picMk id="8" creationId="{85CA934B-FFDE-FB0D-882F-DDCDCF00FDFD}"/>
           </ac:picMkLst>
         </pc:picChg>
+      </pc:sldChg>
+    </pc:docChg>
+  </pc:docChgLst>
+  <pc:docChgLst>
+    <pc:chgData name="LEUNG Jacky" userId="S::jacky.leung@axa.com.hk::b9445fa1-303b-45da-98a2-a95317d67951" providerId="AD" clId="Web-{B9F4ABDA-BC0D-6F70-AD93-3B6E30898091}"/>
+    <pc:docChg chg="modSld">
+      <pc:chgData name="LEUNG Jacky" userId="S::jacky.leung@axa.com.hk::b9445fa1-303b-45da-98a2-a95317d67951" providerId="AD" clId="Web-{B9F4ABDA-BC0D-6F70-AD93-3B6E30898091}" dt="2023-03-31T08:12:24.767" v="11"/>
+      <pc:docMkLst>
+        <pc:docMk/>
+      </pc:docMkLst>
+      <pc:sldChg chg="addSp">
+        <pc:chgData name="LEUNG Jacky" userId="S::jacky.leung@axa.com.hk::b9445fa1-303b-45da-98a2-a95317d67951" providerId="AD" clId="Web-{B9F4ABDA-BC0D-6F70-AD93-3B6E30898091}" dt="2023-03-31T08:12:24.767" v="11"/>
+        <pc:sldMkLst>
+          <pc:docMk/>
+          <pc:sldMk cId="2584197120" sldId="268"/>
+        </pc:sldMkLst>
+        <pc:spChg chg="add">
+          <ac:chgData name="LEUNG Jacky" userId="S::jacky.leung@axa.com.hk::b9445fa1-303b-45da-98a2-a95317d67951" providerId="AD" clId="Web-{B9F4ABDA-BC0D-6F70-AD93-3B6E30898091}" dt="2023-03-31T08:12:24.767" v="11"/>
+          <ac:spMkLst>
+            <pc:docMk/>
+            <pc:sldMk cId="2584197120" sldId="268"/>
+            <ac:spMk id="9" creationId="{FD530B00-889A-93D4-2464-59BC6A78E2EB}"/>
+          </ac:spMkLst>
+        </pc:spChg>
+      </pc:sldChg>
+      <pc:sldChg chg="addSp">
+        <pc:chgData name="LEUNG Jacky" userId="S::jacky.leung@axa.com.hk::b9445fa1-303b-45da-98a2-a95317d67951" providerId="AD" clId="Web-{B9F4ABDA-BC0D-6F70-AD93-3B6E30898091}" dt="2023-03-31T08:10:27.604" v="2"/>
+        <pc:sldMkLst>
+          <pc:docMk/>
+          <pc:sldMk cId="3360548296" sldId="269"/>
+        </pc:sldMkLst>
+        <pc:spChg chg="add">
+          <ac:chgData name="LEUNG Jacky" userId="S::jacky.leung@axa.com.hk::b9445fa1-303b-45da-98a2-a95317d67951" providerId="AD" clId="Web-{B9F4ABDA-BC0D-6F70-AD93-3B6E30898091}" dt="2023-03-31T08:10:27.604" v="2"/>
+          <ac:spMkLst>
+            <pc:docMk/>
+            <pc:sldMk cId="3360548296" sldId="269"/>
+            <ac:spMk id="9" creationId="{ADD48F6F-B779-1C47-AA35-E5C649FB8148}"/>
+          </ac:spMkLst>
+        </pc:spChg>
+      </pc:sldChg>
+      <pc:sldChg chg="addSp">
+        <pc:chgData name="LEUNG Jacky" userId="S::jacky.leung@axa.com.hk::b9445fa1-303b-45da-98a2-a95317d67951" providerId="AD" clId="Web-{B9F4ABDA-BC0D-6F70-AD93-3B6E30898091}" dt="2023-03-31T08:10:21.666" v="0"/>
+        <pc:sldMkLst>
+          <pc:docMk/>
+          <pc:sldMk cId="4137991421" sldId="271"/>
+        </pc:sldMkLst>
+        <pc:spChg chg="add">
+          <ac:chgData name="LEUNG Jacky" userId="S::jacky.leung@axa.com.hk::b9445fa1-303b-45da-98a2-a95317d67951" providerId="AD" clId="Web-{B9F4ABDA-BC0D-6F70-AD93-3B6E30898091}" dt="2023-03-31T08:10:21.666" v="0"/>
+          <ac:spMkLst>
+            <pc:docMk/>
+            <pc:sldMk cId="4137991421" sldId="271"/>
+            <ac:spMk id="10" creationId="{89DCDA58-591B-7425-0D8A-B916F8F7A938}"/>
+          </ac:spMkLst>
+        </pc:spChg>
+      </pc:sldChg>
+      <pc:sldChg chg="addSp">
+        <pc:chgData name="LEUNG Jacky" userId="S::jacky.leung@axa.com.hk::b9445fa1-303b-45da-98a2-a95317d67951" providerId="AD" clId="Web-{B9F4ABDA-BC0D-6F70-AD93-3B6E30898091}" dt="2023-03-31T08:10:31.072" v="3"/>
+        <pc:sldMkLst>
+          <pc:docMk/>
+          <pc:sldMk cId="314809675" sldId="336"/>
+        </pc:sldMkLst>
+        <pc:spChg chg="add">
+          <ac:chgData name="LEUNG Jacky" userId="S::jacky.leung@axa.com.hk::b9445fa1-303b-45da-98a2-a95317d67951" providerId="AD" clId="Web-{B9F4ABDA-BC0D-6F70-AD93-3B6E30898091}" dt="2023-03-31T08:10:31.072" v="3"/>
+          <ac:spMkLst>
+            <pc:docMk/>
+            <pc:sldMk cId="314809675" sldId="336"/>
+            <ac:spMk id="8" creationId="{0B3EEA5D-2AA7-26DC-3F13-4D4B62A97B48}"/>
+          </ac:spMkLst>
+        </pc:spChg>
+      </pc:sldChg>
+      <pc:sldChg chg="addSp">
+        <pc:chgData name="LEUNG Jacky" userId="S::jacky.leung@axa.com.hk::b9445fa1-303b-45da-98a2-a95317d67951" providerId="AD" clId="Web-{B9F4ABDA-BC0D-6F70-AD93-3B6E30898091}" dt="2023-03-31T08:10:35.385" v="4"/>
+        <pc:sldMkLst>
+          <pc:docMk/>
+          <pc:sldMk cId="4182086309" sldId="338"/>
+        </pc:sldMkLst>
+        <pc:spChg chg="add">
+          <ac:chgData name="LEUNG Jacky" userId="S::jacky.leung@axa.com.hk::b9445fa1-303b-45da-98a2-a95317d67951" providerId="AD" clId="Web-{B9F4ABDA-BC0D-6F70-AD93-3B6E30898091}" dt="2023-03-31T08:10:35.385" v="4"/>
+          <ac:spMkLst>
+            <pc:docMk/>
+            <pc:sldMk cId="4182086309" sldId="338"/>
+            <ac:spMk id="9" creationId="{6AC29E29-2FBE-5E04-CCFC-C01730158FE2}"/>
+          </ac:spMkLst>
+        </pc:spChg>
+      </pc:sldChg>
+      <pc:sldChg chg="addSp">
+        <pc:chgData name="LEUNG Jacky" userId="S::jacky.leung@axa.com.hk::b9445fa1-303b-45da-98a2-a95317d67951" providerId="AD" clId="Web-{B9F4ABDA-BC0D-6F70-AD93-3B6E30898091}" dt="2023-03-31T08:10:39.792" v="5"/>
+        <pc:sldMkLst>
+          <pc:docMk/>
+          <pc:sldMk cId="1204536253" sldId="339"/>
+        </pc:sldMkLst>
+        <pc:spChg chg="add">
+          <ac:chgData name="LEUNG Jacky" userId="S::jacky.leung@axa.com.hk::b9445fa1-303b-45da-98a2-a95317d67951" providerId="AD" clId="Web-{B9F4ABDA-BC0D-6F70-AD93-3B6E30898091}" dt="2023-03-31T08:10:39.792" v="5"/>
+          <ac:spMkLst>
+            <pc:docMk/>
+            <pc:sldMk cId="1204536253" sldId="339"/>
+            <ac:spMk id="8" creationId="{E035E6BC-48A1-6837-AD96-94C8B23F8521}"/>
+          </ac:spMkLst>
+        </pc:spChg>
+      </pc:sldChg>
+      <pc:sldChg chg="addSp">
+        <pc:chgData name="LEUNG Jacky" userId="S::jacky.leung@axa.com.hk::b9445fa1-303b-45da-98a2-a95317d67951" providerId="AD" clId="Web-{B9F4ABDA-BC0D-6F70-AD93-3B6E30898091}" dt="2023-03-31T08:10:43.229" v="6"/>
+        <pc:sldMkLst>
+          <pc:docMk/>
+          <pc:sldMk cId="2940668355" sldId="342"/>
+        </pc:sldMkLst>
+        <pc:spChg chg="add">
+          <ac:chgData name="LEUNG Jacky" userId="S::jacky.leung@axa.com.hk::b9445fa1-303b-45da-98a2-a95317d67951" providerId="AD" clId="Web-{B9F4ABDA-BC0D-6F70-AD93-3B6E30898091}" dt="2023-03-31T08:10:43.229" v="6"/>
+          <ac:spMkLst>
+            <pc:docMk/>
+            <pc:sldMk cId="2940668355" sldId="342"/>
+            <ac:spMk id="9" creationId="{A94B71C8-57FE-CBC2-20D3-32095618A156}"/>
+          </ac:spMkLst>
+        </pc:spChg>
+      </pc:sldChg>
+      <pc:sldChg chg="addSp">
+        <pc:chgData name="LEUNG Jacky" userId="S::jacky.leung@axa.com.hk::b9445fa1-303b-45da-98a2-a95317d67951" providerId="AD" clId="Web-{B9F4ABDA-BC0D-6F70-AD93-3B6E30898091}" dt="2023-03-31T08:10:48.292" v="7"/>
+        <pc:sldMkLst>
+          <pc:docMk/>
+          <pc:sldMk cId="1463477700" sldId="343"/>
+        </pc:sldMkLst>
+        <pc:spChg chg="add">
+          <ac:chgData name="LEUNG Jacky" userId="S::jacky.leung@axa.com.hk::b9445fa1-303b-45da-98a2-a95317d67951" providerId="AD" clId="Web-{B9F4ABDA-BC0D-6F70-AD93-3B6E30898091}" dt="2023-03-31T08:10:48.292" v="7"/>
+          <ac:spMkLst>
+            <pc:docMk/>
+            <pc:sldMk cId="1463477700" sldId="343"/>
+            <ac:spMk id="7" creationId="{3C633241-0A2E-F92D-4E70-F45EB97B3BBE}"/>
+          </ac:spMkLst>
+        </pc:spChg>
+      </pc:sldChg>
+      <pc:sldChg chg="addSp">
+        <pc:chgData name="LEUNG Jacky" userId="S::jacky.leung@axa.com.hk::b9445fa1-303b-45da-98a2-a95317d67951" providerId="AD" clId="Web-{B9F4ABDA-BC0D-6F70-AD93-3B6E30898091}" dt="2023-03-31T08:10:24.791" v="1"/>
+        <pc:sldMkLst>
+          <pc:docMk/>
+          <pc:sldMk cId="1404593162" sldId="353"/>
+        </pc:sldMkLst>
+        <pc:spChg chg="add">
+          <ac:chgData name="LEUNG Jacky" userId="S::jacky.leung@axa.com.hk::b9445fa1-303b-45da-98a2-a95317d67951" providerId="AD" clId="Web-{B9F4ABDA-BC0D-6F70-AD93-3B6E30898091}" dt="2023-03-31T08:10:24.791" v="1"/>
+          <ac:spMkLst>
+            <pc:docMk/>
+            <pc:sldMk cId="1404593162" sldId="353"/>
+            <ac:spMk id="4" creationId="{3F6D7D96-FC7A-DB0C-FA30-3100439D3ABF}"/>
+          </ac:spMkLst>
+        </pc:spChg>
+      </pc:sldChg>
+      <pc:sldChg chg="addSp">
+        <pc:chgData name="LEUNG Jacky" userId="S::jacky.leung@axa.com.hk::b9445fa1-303b-45da-98a2-a95317d67951" providerId="AD" clId="Web-{B9F4ABDA-BC0D-6F70-AD93-3B6E30898091}" dt="2023-03-31T08:11:18.716" v="8"/>
+        <pc:sldMkLst>
+          <pc:docMk/>
+          <pc:sldMk cId="1293753078" sldId="358"/>
+        </pc:sldMkLst>
+        <pc:spChg chg="add">
+          <ac:chgData name="LEUNG Jacky" userId="S::jacky.leung@axa.com.hk::b9445fa1-303b-45da-98a2-a95317d67951" providerId="AD" clId="Web-{B9F4ABDA-BC0D-6F70-AD93-3B6E30898091}" dt="2023-03-31T08:11:18.716" v="8"/>
+          <ac:spMkLst>
+            <pc:docMk/>
+            <pc:sldMk cId="1293753078" sldId="358"/>
+            <ac:spMk id="12" creationId="{400F5993-950E-CF8D-EA25-EFF090228AC9}"/>
+          </ac:spMkLst>
+        </pc:spChg>
+      </pc:sldChg>
+      <pc:sldChg chg="addSp">
+        <pc:chgData name="LEUNG Jacky" userId="S::jacky.leung@axa.com.hk::b9445fa1-303b-45da-98a2-a95317d67951" providerId="AD" clId="Web-{B9F4ABDA-BC0D-6F70-AD93-3B6E30898091}" dt="2023-03-31T08:11:24.372" v="9"/>
+        <pc:sldMkLst>
+          <pc:docMk/>
+          <pc:sldMk cId="1781395779" sldId="359"/>
+        </pc:sldMkLst>
+        <pc:spChg chg="add">
+          <ac:chgData name="LEUNG Jacky" userId="S::jacky.leung@axa.com.hk::b9445fa1-303b-45da-98a2-a95317d67951" providerId="AD" clId="Web-{B9F4ABDA-BC0D-6F70-AD93-3B6E30898091}" dt="2023-03-31T08:11:24.372" v="9"/>
+          <ac:spMkLst>
+            <pc:docMk/>
+            <pc:sldMk cId="1781395779" sldId="359"/>
+            <ac:spMk id="9" creationId="{2D8337EC-CB32-2290-9381-DFF61296C1D6}"/>
+          </ac:spMkLst>
+        </pc:spChg>
+      </pc:sldChg>
+      <pc:sldChg chg="addSp">
+        <pc:chgData name="LEUNG Jacky" userId="S::jacky.leung@axa.com.hk::b9445fa1-303b-45da-98a2-a95317d67951" providerId="AD" clId="Web-{B9F4ABDA-BC0D-6F70-AD93-3B6E30898091}" dt="2023-03-31T08:11:59.500" v="10"/>
+        <pc:sldMkLst>
+          <pc:docMk/>
+          <pc:sldMk cId="374779195" sldId="360"/>
+        </pc:sldMkLst>
+        <pc:spChg chg="add">
+          <ac:chgData name="LEUNG Jacky" userId="S::jacky.leung@axa.com.hk::b9445fa1-303b-45da-98a2-a95317d67951" providerId="AD" clId="Web-{B9F4ABDA-BC0D-6F70-AD93-3B6E30898091}" dt="2023-03-31T08:11:59.500" v="10"/>
+          <ac:spMkLst>
+            <pc:docMk/>
+            <pc:sldMk cId="374779195" sldId="360"/>
+            <ac:spMk id="9" creationId="{AB7AB938-25E2-1F46-0F29-9A4FD0A8982D}"/>
+          </ac:spMkLst>
+        </pc:spChg>
       </pc:sldChg>
     </pc:docChg>
   </pc:docChgLst>
@@ -1283,20 +1472,530 @@
     </pc:docChg>
   </pc:docChgLst>
   <pc:docChgLst>
-    <pc:chgData name="TSE Kin" userId="0225f25b-d90a-49aa-8f8a-7a0034099826" providerId="ADAL" clId="{0E7D56F6-7F0E-4E33-94F3-B4A6600CE76B}"/>
-    <pc:docChg chg="undo custSel addSld delSld modSld sldOrd">
-      <pc:chgData name="TSE Kin" userId="0225f25b-d90a-49aa-8f8a-7a0034099826" providerId="ADAL" clId="{0E7D56F6-7F0E-4E33-94F3-B4A6600CE76B}" dt="2023-03-30T10:02:59.002" v="2996" actId="14100"/>
+    <pc:chgData name="LEUNG Jacky" userId="S::jacky.leung@axa.com.hk::b9445fa1-303b-45da-98a2-a95317d67951" providerId="AD" clId="Web-{E5AD0A55-7EF5-F281-302B-BBF103462F04}"/>
+    <pc:docChg chg="addSld delSld modSld sldOrd">
+      <pc:chgData name="LEUNG Jacky" userId="S::jacky.leung@axa.com.hk::b9445fa1-303b-45da-98a2-a95317d67951" providerId="AD" clId="Web-{E5AD0A55-7EF5-F281-302B-BBF103462F04}" dt="2023-03-27T09:56:57.150" v="2362" actId="20577"/>
       <pc:docMkLst>
         <pc:docMk/>
       </pc:docMkLst>
+      <pc:sldChg chg="addSp delSp modSp">
+        <pc:chgData name="LEUNG Jacky" userId="S::jacky.leung@axa.com.hk::b9445fa1-303b-45da-98a2-a95317d67951" providerId="AD" clId="Web-{E5AD0A55-7EF5-F281-302B-BBF103462F04}" dt="2023-03-27T08:32:15.641" v="1147" actId="20577"/>
+        <pc:sldMkLst>
+          <pc:docMk/>
+          <pc:sldMk cId="3360548296" sldId="269"/>
+        </pc:sldMkLst>
+        <pc:spChg chg="mod">
+          <ac:chgData name="LEUNG Jacky" userId="S::jacky.leung@axa.com.hk::b9445fa1-303b-45da-98a2-a95317d67951" providerId="AD" clId="Web-{E5AD0A55-7EF5-F281-302B-BBF103462F04}" dt="2023-03-27T08:32:15.641" v="1147" actId="20577"/>
+          <ac:spMkLst>
+            <pc:docMk/>
+            <pc:sldMk cId="3360548296" sldId="269"/>
+            <ac:spMk id="2" creationId="{1FAE7B19-B532-47E4-AD36-E223BAA71D49}"/>
+          </ac:spMkLst>
+        </pc:spChg>
+        <pc:spChg chg="add mod">
+          <ac:chgData name="LEUNG Jacky" userId="S::jacky.leung@axa.com.hk::b9445fa1-303b-45da-98a2-a95317d67951" providerId="AD" clId="Web-{E5AD0A55-7EF5-F281-302B-BBF103462F04}" dt="2023-03-27T08:31:50.343" v="1136" actId="20577"/>
+          <ac:spMkLst>
+            <pc:docMk/>
+            <pc:sldMk cId="3360548296" sldId="269"/>
+            <ac:spMk id="15" creationId="{C80D9B7C-24E7-89AB-9E73-1EB550EE736B}"/>
+          </ac:spMkLst>
+        </pc:spChg>
+        <pc:graphicFrameChg chg="add mod modGraphic">
+          <ac:chgData name="LEUNG Jacky" userId="S::jacky.leung@axa.com.hk::b9445fa1-303b-45da-98a2-a95317d67951" providerId="AD" clId="Web-{E5AD0A55-7EF5-F281-302B-BBF103462F04}" dt="2023-03-27T08:30:46.372" v="1054"/>
+          <ac:graphicFrameMkLst>
+            <pc:docMk/>
+            <pc:sldMk cId="3360548296" sldId="269"/>
+            <ac:graphicFrameMk id="13" creationId="{B5570027-FB01-E4C0-BB1F-D9F31CFB3461}"/>
+          </ac:graphicFrameMkLst>
+        </pc:graphicFrameChg>
+        <pc:picChg chg="add del mod">
+          <ac:chgData name="LEUNG Jacky" userId="S::jacky.leung@axa.com.hk::b9445fa1-303b-45da-98a2-a95317d67951" providerId="AD" clId="Web-{E5AD0A55-7EF5-F281-302B-BBF103462F04}" dt="2023-03-27T07:51:27.131" v="435"/>
+          <ac:picMkLst>
+            <pc:docMk/>
+            <pc:sldMk cId="3360548296" sldId="269"/>
+            <ac:picMk id="7" creationId="{BA0407BC-0808-FBCE-5B5B-F14E23C4AC32}"/>
+          </ac:picMkLst>
+        </pc:picChg>
+        <pc:picChg chg="add del mod">
+          <ac:chgData name="LEUNG Jacky" userId="S::jacky.leung@axa.com.hk::b9445fa1-303b-45da-98a2-a95317d67951" providerId="AD" clId="Web-{E5AD0A55-7EF5-F281-302B-BBF103462F04}" dt="2023-03-27T07:51:45.178" v="439"/>
+          <ac:picMkLst>
+            <pc:docMk/>
+            <pc:sldMk cId="3360548296" sldId="269"/>
+            <ac:picMk id="8" creationId="{26B76824-26DE-381C-3BBA-5004FFCAB07B}"/>
+          </ac:picMkLst>
+        </pc:picChg>
+        <pc:picChg chg="add del mod">
+          <ac:chgData name="LEUNG Jacky" userId="S::jacky.leung@axa.com.hk::b9445fa1-303b-45da-98a2-a95317d67951" providerId="AD" clId="Web-{E5AD0A55-7EF5-F281-302B-BBF103462F04}" dt="2023-03-27T07:51:49.772" v="442"/>
+          <ac:picMkLst>
+            <pc:docMk/>
+            <pc:sldMk cId="3360548296" sldId="269"/>
+            <ac:picMk id="9" creationId="{5619F231-F5EB-4284-897B-CAEDD6C5F671}"/>
+          </ac:picMkLst>
+        </pc:picChg>
+        <pc:picChg chg="add del mod">
+          <ac:chgData name="LEUNG Jacky" userId="S::jacky.leung@axa.com.hk::b9445fa1-303b-45da-98a2-a95317d67951" providerId="AD" clId="Web-{E5AD0A55-7EF5-F281-302B-BBF103462F04}" dt="2023-03-27T07:52:22.601" v="446"/>
+          <ac:picMkLst>
+            <pc:docMk/>
+            <pc:sldMk cId="3360548296" sldId="269"/>
+            <ac:picMk id="10" creationId="{39F0489E-756E-50D2-3584-C5846BDFAF86}"/>
+          </ac:picMkLst>
+        </pc:picChg>
+        <pc:picChg chg="add mod">
+          <ac:chgData name="LEUNG Jacky" userId="S::jacky.leung@axa.com.hk::b9445fa1-303b-45da-98a2-a95317d67951" providerId="AD" clId="Web-{E5AD0A55-7EF5-F281-302B-BBF103462F04}" dt="2023-03-27T07:53:35.744" v="452" actId="1076"/>
+          <ac:picMkLst>
+            <pc:docMk/>
+            <pc:sldMk cId="3360548296" sldId="269"/>
+            <ac:picMk id="11" creationId="{B25E5D4E-188B-B22D-F504-DD580F6D8911}"/>
+          </ac:picMkLst>
+        </pc:picChg>
+        <pc:picChg chg="add del mod">
+          <ac:chgData name="LEUNG Jacky" userId="S::jacky.leung@axa.com.hk::b9445fa1-303b-45da-98a2-a95317d67951" providerId="AD" clId="Web-{E5AD0A55-7EF5-F281-302B-BBF103462F04}" dt="2023-03-27T07:54:22.855" v="457"/>
+          <ac:picMkLst>
+            <pc:docMk/>
+            <pc:sldMk cId="3360548296" sldId="269"/>
+            <ac:picMk id="12" creationId="{D9DECC69-5EBA-C2CB-84B3-F35542767BA2}"/>
+          </ac:picMkLst>
+        </pc:picChg>
+      </pc:sldChg>
+      <pc:sldChg chg="modSp">
+        <pc:chgData name="LEUNG Jacky" userId="S::jacky.leung@axa.com.hk::b9445fa1-303b-45da-98a2-a95317d67951" providerId="AD" clId="Web-{E5AD0A55-7EF5-F281-302B-BBF103462F04}" dt="2023-03-27T09:56:57.150" v="2362" actId="20577"/>
+        <pc:sldMkLst>
+          <pc:docMk/>
+          <pc:sldMk cId="4137991421" sldId="271"/>
+        </pc:sldMkLst>
+        <pc:spChg chg="mod">
+          <ac:chgData name="LEUNG Jacky" userId="S::jacky.leung@axa.com.hk::b9445fa1-303b-45da-98a2-a95317d67951" providerId="AD" clId="Web-{E5AD0A55-7EF5-F281-302B-BBF103462F04}" dt="2023-03-27T09:56:57.150" v="2362" actId="20577"/>
+          <ac:spMkLst>
+            <pc:docMk/>
+            <pc:sldMk cId="4137991421" sldId="271"/>
+            <ac:spMk id="2" creationId="{11521F0B-4767-4461-B156-3C8A4334B2F5}"/>
+          </ac:spMkLst>
+        </pc:spChg>
+        <pc:spChg chg="mod">
+          <ac:chgData name="LEUNG Jacky" userId="S::jacky.leung@axa.com.hk::b9445fa1-303b-45da-98a2-a95317d67951" providerId="AD" clId="Web-{E5AD0A55-7EF5-F281-302B-BBF103462F04}" dt="2023-03-27T07:16:10.644" v="431" actId="20577"/>
+          <ac:spMkLst>
+            <pc:docMk/>
+            <pc:sldMk cId="4137991421" sldId="271"/>
+            <ac:spMk id="3" creationId="{20F4C2E6-9C93-44AF-B5A6-72C81F626F2E}"/>
+          </ac:spMkLst>
+        </pc:spChg>
+      </pc:sldChg>
+      <pc:sldChg chg="addSp modSp">
+        <pc:chgData name="LEUNG Jacky" userId="S::jacky.leung@axa.com.hk::b9445fa1-303b-45da-98a2-a95317d67951" providerId="AD" clId="Web-{E5AD0A55-7EF5-F281-302B-BBF103462F04}" dt="2023-03-27T09:54:03.692" v="2320" actId="20577"/>
+        <pc:sldMkLst>
+          <pc:docMk/>
+          <pc:sldMk cId="1727444638" sldId="272"/>
+        </pc:sldMkLst>
+        <pc:spChg chg="mod">
+          <ac:chgData name="LEUNG Jacky" userId="S::jacky.leung@axa.com.hk::b9445fa1-303b-45da-98a2-a95317d67951" providerId="AD" clId="Web-{E5AD0A55-7EF5-F281-302B-BBF103462F04}" dt="2023-03-27T09:45:58.818" v="2236" actId="20577"/>
+          <ac:spMkLst>
+            <pc:docMk/>
+            <pc:sldMk cId="1727444638" sldId="272"/>
+            <ac:spMk id="4" creationId="{D1D58659-EFC8-4B0B-894F-BEA3C186780B}"/>
+          </ac:spMkLst>
+        </pc:spChg>
+        <pc:spChg chg="add mod">
+          <ac:chgData name="LEUNG Jacky" userId="S::jacky.leung@axa.com.hk::b9445fa1-303b-45da-98a2-a95317d67951" providerId="AD" clId="Web-{E5AD0A55-7EF5-F281-302B-BBF103462F04}" dt="2023-03-27T09:54:03.692" v="2320" actId="20577"/>
+          <ac:spMkLst>
+            <pc:docMk/>
+            <pc:sldMk cId="1727444638" sldId="272"/>
+            <ac:spMk id="9" creationId="{4CC9B8B1-E833-F824-3AAE-A337618719BD}"/>
+          </ac:spMkLst>
+        </pc:spChg>
+      </pc:sldChg>
+      <pc:sldChg chg="addSp delSp modSp add ord replId">
+        <pc:chgData name="LEUNG Jacky" userId="S::jacky.leung@axa.com.hk::b9445fa1-303b-45da-98a2-a95317d67951" providerId="AD" clId="Web-{E5AD0A55-7EF5-F281-302B-BBF103462F04}" dt="2023-03-27T08:19:54.525" v="810" actId="20577"/>
+        <pc:sldMkLst>
+          <pc:docMk/>
+          <pc:sldMk cId="2969510933" sldId="274"/>
+        </pc:sldMkLst>
+        <pc:spChg chg="mod">
+          <ac:chgData name="LEUNG Jacky" userId="S::jacky.leung@axa.com.hk::b9445fa1-303b-45da-98a2-a95317d67951" providerId="AD" clId="Web-{E5AD0A55-7EF5-F281-302B-BBF103462F04}" dt="2023-03-27T08:19:54.525" v="810" actId="20577"/>
+          <ac:spMkLst>
+            <pc:docMk/>
+            <pc:sldMk cId="2969510933" sldId="274"/>
+            <ac:spMk id="2" creationId="{1FAE7B19-B532-47E4-AD36-E223BAA71D49}"/>
+          </ac:spMkLst>
+        </pc:spChg>
+        <pc:spChg chg="add del mod">
+          <ac:chgData name="LEUNG Jacky" userId="S::jacky.leung@axa.com.hk::b9445fa1-303b-45da-98a2-a95317d67951" providerId="AD" clId="Web-{E5AD0A55-7EF5-F281-302B-BBF103462F04}" dt="2023-03-27T08:17:53.053" v="687"/>
+          <ac:spMkLst>
+            <pc:docMk/>
+            <pc:sldMk cId="2969510933" sldId="274"/>
+            <ac:spMk id="12" creationId="{C86F88C5-00BE-56DE-3D77-DF1AEBB06D3E}"/>
+          </ac:spMkLst>
+        </pc:spChg>
+        <pc:spChg chg="add mod">
+          <ac:chgData name="LEUNG Jacky" userId="S::jacky.leung@axa.com.hk::b9445fa1-303b-45da-98a2-a95317d67951" providerId="AD" clId="Web-{E5AD0A55-7EF5-F281-302B-BBF103462F04}" dt="2023-03-27T08:19:22.102" v="765" actId="20577"/>
+          <ac:spMkLst>
+            <pc:docMk/>
+            <pc:sldMk cId="2969510933" sldId="274"/>
+            <ac:spMk id="14" creationId="{A95DDA5B-8CC8-5E90-612F-C605A5605C4D}"/>
+          </ac:spMkLst>
+        </pc:spChg>
+        <pc:picChg chg="add mod">
+          <ac:chgData name="LEUNG Jacky" userId="S::jacky.leung@axa.com.hk::b9445fa1-303b-45da-98a2-a95317d67951" providerId="AD" clId="Web-{E5AD0A55-7EF5-F281-302B-BBF103462F04}" dt="2023-03-27T08:13:19.904" v="468" actId="14100"/>
+          <ac:picMkLst>
+            <pc:docMk/>
+            <pc:sldMk cId="2969510933" sldId="274"/>
+            <ac:picMk id="7" creationId="{B1F81377-BF3D-49D3-AA7B-9001A4B66F31}"/>
+          </ac:picMkLst>
+        </pc:picChg>
+        <pc:picChg chg="add mod">
+          <ac:chgData name="LEUNG Jacky" userId="S::jacky.leung@axa.com.hk::b9445fa1-303b-45da-98a2-a95317d67951" providerId="AD" clId="Web-{E5AD0A55-7EF5-F281-302B-BBF103462F04}" dt="2023-03-27T08:13:35.623" v="473" actId="14100"/>
+          <ac:picMkLst>
+            <pc:docMk/>
+            <pc:sldMk cId="2969510933" sldId="274"/>
+            <ac:picMk id="8" creationId="{D6EC4F7A-2967-DB7D-57AA-C03D9F926B2E}"/>
+          </ac:picMkLst>
+        </pc:picChg>
+        <pc:picChg chg="add del mod">
+          <ac:chgData name="LEUNG Jacky" userId="S::jacky.leung@axa.com.hk::b9445fa1-303b-45da-98a2-a95317d67951" providerId="AD" clId="Web-{E5AD0A55-7EF5-F281-302B-BBF103462F04}" dt="2023-03-27T08:14:13.296" v="475"/>
+          <ac:picMkLst>
+            <pc:docMk/>
+            <pc:sldMk cId="2969510933" sldId="274"/>
+            <ac:picMk id="9" creationId="{344B1C7C-0FA3-FD0A-E1A4-355A5D3F44DE}"/>
+          </ac:picMkLst>
+        </pc:picChg>
+        <pc:picChg chg="add del mod">
+          <ac:chgData name="LEUNG Jacky" userId="S::jacky.leung@axa.com.hk::b9445fa1-303b-45da-98a2-a95317d67951" providerId="AD" clId="Web-{E5AD0A55-7EF5-F281-302B-BBF103462F04}" dt="2023-03-27T08:14:22.265" v="477"/>
+          <ac:picMkLst>
+            <pc:docMk/>
+            <pc:sldMk cId="2969510933" sldId="274"/>
+            <ac:picMk id="10" creationId="{959EF1E0-B7C2-C52F-50CD-7DF61D6E2393}"/>
+          </ac:picMkLst>
+        </pc:picChg>
+        <pc:picChg chg="del mod">
+          <ac:chgData name="LEUNG Jacky" userId="S::jacky.leung@axa.com.hk::b9445fa1-303b-45da-98a2-a95317d67951" providerId="AD" clId="Web-{E5AD0A55-7EF5-F281-302B-BBF103462F04}" dt="2023-03-27T07:54:56.731" v="461"/>
+          <ac:picMkLst>
+            <pc:docMk/>
+            <pc:sldMk cId="2969510933" sldId="274"/>
+            <ac:picMk id="11" creationId="{B25E5D4E-188B-B22D-F504-DD580F6D8911}"/>
+          </ac:picMkLst>
+        </pc:picChg>
+      </pc:sldChg>
+      <pc:sldChg chg="addSp delSp modSp add replId">
+        <pc:chgData name="LEUNG Jacky" userId="S::jacky.leung@axa.com.hk::b9445fa1-303b-45da-98a2-a95317d67951" providerId="AD" clId="Web-{E5AD0A55-7EF5-F281-302B-BBF103462F04}" dt="2023-03-27T08:55:12.775" v="1442" actId="20577"/>
+        <pc:sldMkLst>
+          <pc:docMk/>
+          <pc:sldMk cId="314809675" sldId="336"/>
+        </pc:sldMkLst>
+        <pc:spChg chg="mod">
+          <ac:chgData name="LEUNG Jacky" userId="S::jacky.leung@axa.com.hk::b9445fa1-303b-45da-98a2-a95317d67951" providerId="AD" clId="Web-{E5AD0A55-7EF5-F281-302B-BBF103462F04}" dt="2023-03-27T08:55:12.775" v="1442" actId="20577"/>
+          <ac:spMkLst>
+            <pc:docMk/>
+            <pc:sldMk cId="314809675" sldId="336"/>
+            <ac:spMk id="2" creationId="{1FAE7B19-B532-47E4-AD36-E223BAA71D49}"/>
+          </ac:spMkLst>
+        </pc:spChg>
+        <pc:spChg chg="mod">
+          <ac:chgData name="LEUNG Jacky" userId="S::jacky.leung@axa.com.hk::b9445fa1-303b-45da-98a2-a95317d67951" providerId="AD" clId="Web-{E5AD0A55-7EF5-F281-302B-BBF103462F04}" dt="2023-03-27T08:52:32.458" v="1424" actId="20577"/>
+          <ac:spMkLst>
+            <pc:docMk/>
+            <pc:sldMk cId="314809675" sldId="336"/>
+            <ac:spMk id="15" creationId="{C80D9B7C-24E7-89AB-9E73-1EB550EE736B}"/>
+          </ac:spMkLst>
+        </pc:spChg>
+        <pc:graphicFrameChg chg="mod modGraphic">
+          <ac:chgData name="LEUNG Jacky" userId="S::jacky.leung@axa.com.hk::b9445fa1-303b-45da-98a2-a95317d67951" providerId="AD" clId="Web-{E5AD0A55-7EF5-F281-302B-BBF103462F04}" dt="2023-03-27T08:51:31.659" v="1347"/>
+          <ac:graphicFrameMkLst>
+            <pc:docMk/>
+            <pc:sldMk cId="314809675" sldId="336"/>
+            <ac:graphicFrameMk id="13" creationId="{B5570027-FB01-E4C0-BB1F-D9F31CFB3461}"/>
+          </ac:graphicFrameMkLst>
+        </pc:graphicFrameChg>
+        <pc:picChg chg="add mod">
+          <ac:chgData name="LEUNG Jacky" userId="S::jacky.leung@axa.com.hk::b9445fa1-303b-45da-98a2-a95317d67951" providerId="AD" clId="Web-{E5AD0A55-7EF5-F281-302B-BBF103462F04}" dt="2023-03-27T08:46:24.119" v="1152" actId="14100"/>
+          <ac:picMkLst>
+            <pc:docMk/>
+            <pc:sldMk cId="314809675" sldId="336"/>
+            <ac:picMk id="7" creationId="{F0032B42-1AEE-9EA3-7592-CA6F4FA137C4}"/>
+          </ac:picMkLst>
+        </pc:picChg>
+        <pc:picChg chg="del">
+          <ac:chgData name="LEUNG Jacky" userId="S::jacky.leung@axa.com.hk::b9445fa1-303b-45da-98a2-a95317d67951" providerId="AD" clId="Web-{E5AD0A55-7EF5-F281-302B-BBF103462F04}" dt="2023-03-27T08:46:08.134" v="1148"/>
+          <ac:picMkLst>
+            <pc:docMk/>
+            <pc:sldMk cId="314809675" sldId="336"/>
+            <ac:picMk id="11" creationId="{B25E5D4E-188B-B22D-F504-DD580F6D8911}"/>
+          </ac:picMkLst>
+        </pc:picChg>
+      </pc:sldChg>
+      <pc:sldChg chg="addSp delSp modSp add">
+        <pc:chgData name="LEUNG Jacky" userId="S::jacky.leung@axa.com.hk::b9445fa1-303b-45da-98a2-a95317d67951" providerId="AD" clId="Web-{E5AD0A55-7EF5-F281-302B-BBF103462F04}" dt="2023-03-27T09:00:10.690" v="1645" actId="20577"/>
+        <pc:sldMkLst>
+          <pc:docMk/>
+          <pc:sldMk cId="4182086309" sldId="338"/>
+        </pc:sldMkLst>
+        <pc:spChg chg="mod">
+          <ac:chgData name="LEUNG Jacky" userId="S::jacky.leung@axa.com.hk::b9445fa1-303b-45da-98a2-a95317d67951" providerId="AD" clId="Web-{E5AD0A55-7EF5-F281-302B-BBF103462F04}" dt="2023-03-27T08:55:20.431" v="1450" actId="20577"/>
+          <ac:spMkLst>
+            <pc:docMk/>
+            <pc:sldMk cId="4182086309" sldId="338"/>
+            <ac:spMk id="2" creationId="{1FAE7B19-B532-47E4-AD36-E223BAA71D49}"/>
+          </ac:spMkLst>
+        </pc:spChg>
+        <pc:spChg chg="add mod">
+          <ac:chgData name="LEUNG Jacky" userId="S::jacky.leung@axa.com.hk::b9445fa1-303b-45da-98a2-a95317d67951" providerId="AD" clId="Web-{E5AD0A55-7EF5-F281-302B-BBF103462F04}" dt="2023-03-27T09:00:10.690" v="1645" actId="20577"/>
+          <ac:spMkLst>
+            <pc:docMk/>
+            <pc:sldMk cId="4182086309" sldId="338"/>
+            <ac:spMk id="14" creationId="{E78B3DCD-ADBE-D82A-904A-314E47F33185}"/>
+          </ac:spMkLst>
+        </pc:spChg>
+        <pc:spChg chg="mod">
+          <ac:chgData name="LEUNG Jacky" userId="S::jacky.leung@axa.com.hk::b9445fa1-303b-45da-98a2-a95317d67951" providerId="AD" clId="Web-{E5AD0A55-7EF5-F281-302B-BBF103462F04}" dt="2023-03-27T08:57:43.842" v="1465" actId="20577"/>
+          <ac:spMkLst>
+            <pc:docMk/>
+            <pc:sldMk cId="4182086309" sldId="338"/>
+            <ac:spMk id="15" creationId="{C80D9B7C-24E7-89AB-9E73-1EB550EE736B}"/>
+          </ac:spMkLst>
+        </pc:spChg>
+        <pc:graphicFrameChg chg="del mod modGraphic">
+          <ac:chgData name="LEUNG Jacky" userId="S::jacky.leung@axa.com.hk::b9445fa1-303b-45da-98a2-a95317d67951" providerId="AD" clId="Web-{E5AD0A55-7EF5-F281-302B-BBF103462F04}" dt="2023-03-27T08:53:52.335" v="1433"/>
+          <ac:graphicFrameMkLst>
+            <pc:docMk/>
+            <pc:sldMk cId="4182086309" sldId="338"/>
+            <ac:graphicFrameMk id="13" creationId="{B5570027-FB01-E4C0-BB1F-D9F31CFB3461}"/>
+          </ac:graphicFrameMkLst>
+        </pc:graphicFrameChg>
+        <pc:picChg chg="del">
+          <ac:chgData name="LEUNG Jacky" userId="S::jacky.leung@axa.com.hk::b9445fa1-303b-45da-98a2-a95317d67951" providerId="AD" clId="Web-{E5AD0A55-7EF5-F281-302B-BBF103462F04}" dt="2023-03-27T08:53:40.413" v="1426"/>
+          <ac:picMkLst>
+            <pc:docMk/>
+            <pc:sldMk cId="4182086309" sldId="338"/>
+            <ac:picMk id="7" creationId="{F0032B42-1AEE-9EA3-7592-CA6F4FA137C4}"/>
+          </ac:picMkLst>
+        </pc:picChg>
+        <pc:picChg chg="add del mod">
+          <ac:chgData name="LEUNG Jacky" userId="S::jacky.leung@axa.com.hk::b9445fa1-303b-45da-98a2-a95317d67951" providerId="AD" clId="Web-{E5AD0A55-7EF5-F281-302B-BBF103462F04}" dt="2023-03-27T08:56:50.012" v="1451"/>
+          <ac:picMkLst>
+            <pc:docMk/>
+            <pc:sldMk cId="4182086309" sldId="338"/>
+            <ac:picMk id="8" creationId="{BF31A66A-A8E2-A189-5771-72568D6D7417}"/>
+          </ac:picMkLst>
+        </pc:picChg>
+        <pc:picChg chg="add del mod">
+          <ac:chgData name="LEUNG Jacky" userId="S::jacky.leung@axa.com.hk::b9445fa1-303b-45da-98a2-a95317d67951" providerId="AD" clId="Web-{E5AD0A55-7EF5-F281-302B-BBF103462F04}" dt="2023-03-27T08:57:25.201" v="1457"/>
+          <ac:picMkLst>
+            <pc:docMk/>
+            <pc:sldMk cId="4182086309" sldId="338"/>
+            <ac:picMk id="9" creationId="{88510A91-1746-6C9C-C225-A94BD7CFA703}"/>
+          </ac:picMkLst>
+        </pc:picChg>
+        <pc:picChg chg="add del mod">
+          <ac:chgData name="LEUNG Jacky" userId="S::jacky.leung@axa.com.hk::b9445fa1-303b-45da-98a2-a95317d67951" providerId="AD" clId="Web-{E5AD0A55-7EF5-F281-302B-BBF103462F04}" dt="2023-03-27T08:58:10.889" v="1466"/>
+          <ac:picMkLst>
+            <pc:docMk/>
+            <pc:sldMk cId="4182086309" sldId="338"/>
+            <ac:picMk id="10" creationId="{D41B3F99-AEF7-EDD6-5D5E-A48CEAE27148}"/>
+          </ac:picMkLst>
+        </pc:picChg>
+        <pc:picChg chg="add mod">
+          <ac:chgData name="LEUNG Jacky" userId="S::jacky.leung@axa.com.hk::b9445fa1-303b-45da-98a2-a95317d67951" providerId="AD" clId="Web-{E5AD0A55-7EF5-F281-302B-BBF103462F04}" dt="2023-03-27T08:58:19.640" v="1470" actId="14100"/>
+          <ac:picMkLst>
+            <pc:docMk/>
+            <pc:sldMk cId="4182086309" sldId="338"/>
+            <ac:picMk id="11" creationId="{7F663943-BA4F-EABE-4F00-5C777ECC7910}"/>
+          </ac:picMkLst>
+        </pc:picChg>
+      </pc:sldChg>
+      <pc:sldChg chg="addSp delSp modSp add">
+        <pc:chgData name="LEUNG Jacky" userId="S::jacky.leung@axa.com.hk::b9445fa1-303b-45da-98a2-a95317d67951" providerId="AD" clId="Web-{E5AD0A55-7EF5-F281-302B-BBF103462F04}" dt="2023-03-27T09:14:57.825" v="1747" actId="20577"/>
+        <pc:sldMkLst>
+          <pc:docMk/>
+          <pc:sldMk cId="1204536253" sldId="339"/>
+        </pc:sldMkLst>
+        <pc:spChg chg="mod">
+          <ac:chgData name="LEUNG Jacky" userId="S::jacky.leung@axa.com.hk::b9445fa1-303b-45da-98a2-a95317d67951" providerId="AD" clId="Web-{E5AD0A55-7EF5-F281-302B-BBF103462F04}" dt="2023-03-27T09:13:54.074" v="1672" actId="20577"/>
+          <ac:spMkLst>
+            <pc:docMk/>
+            <pc:sldMk cId="1204536253" sldId="339"/>
+            <ac:spMk id="2" creationId="{1FAE7B19-B532-47E4-AD36-E223BAA71D49}"/>
+          </ac:spMkLst>
+        </pc:spChg>
+        <pc:spChg chg="mod">
+          <ac:chgData name="LEUNG Jacky" userId="S::jacky.leung@axa.com.hk::b9445fa1-303b-45da-98a2-a95317d67951" providerId="AD" clId="Web-{E5AD0A55-7EF5-F281-302B-BBF103462F04}" dt="2023-03-27T09:14:57.825" v="1747" actId="20577"/>
+          <ac:spMkLst>
+            <pc:docMk/>
+            <pc:sldMk cId="1204536253" sldId="339"/>
+            <ac:spMk id="14" creationId="{E78B3DCD-ADBE-D82A-904A-314E47F33185}"/>
+          </ac:spMkLst>
+        </pc:spChg>
+        <pc:picChg chg="add del mod">
+          <ac:chgData name="LEUNG Jacky" userId="S::jacky.leung@axa.com.hk::b9445fa1-303b-45da-98a2-a95317d67951" providerId="AD" clId="Web-{E5AD0A55-7EF5-F281-302B-BBF103462F04}" dt="2023-03-27T09:10:05.895" v="1651"/>
+          <ac:picMkLst>
+            <pc:docMk/>
+            <pc:sldMk cId="1204536253" sldId="339"/>
+            <ac:picMk id="7" creationId="{6368F893-BEBF-6D75-B26F-2559C7DD7DC8}"/>
+          </ac:picMkLst>
+        </pc:picChg>
+        <pc:picChg chg="add del mod">
+          <ac:chgData name="LEUNG Jacky" userId="S::jacky.leung@axa.com.hk::b9445fa1-303b-45da-98a2-a95317d67951" providerId="AD" clId="Web-{E5AD0A55-7EF5-F281-302B-BBF103462F04}" dt="2023-03-27T09:13:29.635" v="1661"/>
+          <ac:picMkLst>
+            <pc:docMk/>
+            <pc:sldMk cId="1204536253" sldId="339"/>
+            <ac:picMk id="8" creationId="{B8AC586B-4047-7C9F-2339-D605EEA2F6B2}"/>
+          </ac:picMkLst>
+        </pc:picChg>
+        <pc:picChg chg="add mod">
+          <ac:chgData name="LEUNG Jacky" userId="S::jacky.leung@axa.com.hk::b9445fa1-303b-45da-98a2-a95317d67951" providerId="AD" clId="Web-{E5AD0A55-7EF5-F281-302B-BBF103462F04}" dt="2023-03-27T09:13:37.401" v="1665" actId="1076"/>
+          <ac:picMkLst>
+            <pc:docMk/>
+            <pc:sldMk cId="1204536253" sldId="339"/>
+            <ac:picMk id="9" creationId="{DA889270-1D3F-8681-D169-E48461E6DC86}"/>
+          </ac:picMkLst>
+        </pc:picChg>
+        <pc:picChg chg="add mod">
+          <ac:chgData name="LEUNG Jacky" userId="S::jacky.leung@axa.com.hk::b9445fa1-303b-45da-98a2-a95317d67951" providerId="AD" clId="Web-{E5AD0A55-7EF5-F281-302B-BBF103462F04}" dt="2023-03-27T09:13:45.714" v="1668" actId="1076"/>
+          <ac:picMkLst>
+            <pc:docMk/>
+            <pc:sldMk cId="1204536253" sldId="339"/>
+            <ac:picMk id="10" creationId="{B685FE83-1A5B-432A-C3AF-464A1E4BFBB0}"/>
+          </ac:picMkLst>
+        </pc:picChg>
+        <pc:picChg chg="del">
+          <ac:chgData name="LEUNG Jacky" userId="S::jacky.leung@axa.com.hk::b9445fa1-303b-45da-98a2-a95317d67951" providerId="AD" clId="Web-{E5AD0A55-7EF5-F281-302B-BBF103462F04}" dt="2023-03-27T09:01:09.332" v="1647"/>
+          <ac:picMkLst>
+            <pc:docMk/>
+            <pc:sldMk cId="1204536253" sldId="339"/>
+            <ac:picMk id="11" creationId="{7F663943-BA4F-EABE-4F00-5C777ECC7910}"/>
+          </ac:picMkLst>
+        </pc:picChg>
+      </pc:sldChg>
+      <pc:sldChg chg="addSp delSp modSp add replId">
+        <pc:chgData name="LEUNG Jacky" userId="S::jacky.leung@axa.com.hk::b9445fa1-303b-45da-98a2-a95317d67951" providerId="AD" clId="Web-{E5AD0A55-7EF5-F281-302B-BBF103462F04}" dt="2023-03-27T09:17:56.581" v="1904" actId="14100"/>
+        <pc:sldMkLst>
+          <pc:docMk/>
+          <pc:sldMk cId="2940668355" sldId="342"/>
+        </pc:sldMkLst>
+        <pc:spChg chg="mod">
+          <ac:chgData name="LEUNG Jacky" userId="S::jacky.leung@axa.com.hk::b9445fa1-303b-45da-98a2-a95317d67951" providerId="AD" clId="Web-{E5AD0A55-7EF5-F281-302B-BBF103462F04}" dt="2023-03-27T09:17:06.360" v="1846" actId="20577"/>
+          <ac:spMkLst>
+            <pc:docMk/>
+            <pc:sldMk cId="2940668355" sldId="342"/>
+            <ac:spMk id="2" creationId="{1FAE7B19-B532-47E4-AD36-E223BAA71D49}"/>
+          </ac:spMkLst>
+        </pc:spChg>
+        <pc:spChg chg="mod">
+          <ac:chgData name="LEUNG Jacky" userId="S::jacky.leung@axa.com.hk::b9445fa1-303b-45da-98a2-a95317d67951" providerId="AD" clId="Web-{E5AD0A55-7EF5-F281-302B-BBF103462F04}" dt="2023-03-27T09:17:56.581" v="1904" actId="14100"/>
+          <ac:spMkLst>
+            <pc:docMk/>
+            <pc:sldMk cId="2940668355" sldId="342"/>
+            <ac:spMk id="14" creationId="{E78B3DCD-ADBE-D82A-904A-314E47F33185}"/>
+          </ac:spMkLst>
+        </pc:spChg>
+        <pc:picChg chg="add mod">
+          <ac:chgData name="LEUNG Jacky" userId="S::jacky.leung@axa.com.hk::b9445fa1-303b-45da-98a2-a95317d67951" providerId="AD" clId="Web-{E5AD0A55-7EF5-F281-302B-BBF103462F04}" dt="2023-03-27T09:16:17.312" v="1755" actId="14100"/>
+          <ac:picMkLst>
+            <pc:docMk/>
+            <pc:sldMk cId="2940668355" sldId="342"/>
+            <ac:picMk id="7" creationId="{7B72341F-F441-72AE-9830-3DCABFB2FC4E}"/>
+          </ac:picMkLst>
+        </pc:picChg>
+        <pc:picChg chg="del">
+          <ac:chgData name="LEUNG Jacky" userId="S::jacky.leung@axa.com.hk::b9445fa1-303b-45da-98a2-a95317d67951" providerId="AD" clId="Web-{E5AD0A55-7EF5-F281-302B-BBF103462F04}" dt="2023-03-27T09:16:05.109" v="1749"/>
+          <ac:picMkLst>
+            <pc:docMk/>
+            <pc:sldMk cId="2940668355" sldId="342"/>
+            <ac:picMk id="9" creationId="{DA889270-1D3F-8681-D169-E48461E6DC86}"/>
+          </ac:picMkLst>
+        </pc:picChg>
+        <pc:picChg chg="del">
+          <ac:chgData name="LEUNG Jacky" userId="S::jacky.leung@axa.com.hk::b9445fa1-303b-45da-98a2-a95317d67951" providerId="AD" clId="Web-{E5AD0A55-7EF5-F281-302B-BBF103462F04}" dt="2023-03-27T09:16:06.515" v="1750"/>
+          <ac:picMkLst>
+            <pc:docMk/>
+            <pc:sldMk cId="2940668355" sldId="342"/>
+            <ac:picMk id="10" creationId="{B685FE83-1A5B-432A-C3AF-464A1E4BFBB0}"/>
+          </ac:picMkLst>
+        </pc:picChg>
+      </pc:sldChg>
+      <pc:sldChg chg="addSp delSp modSp add replId">
+        <pc:chgData name="LEUNG Jacky" userId="S::jacky.leung@axa.com.hk::b9445fa1-303b-45da-98a2-a95317d67951" providerId="AD" clId="Web-{E5AD0A55-7EF5-F281-302B-BBF103462F04}" dt="2023-03-27T09:25:54.017" v="1964" actId="20577"/>
+        <pc:sldMkLst>
+          <pc:docMk/>
+          <pc:sldMk cId="1463477700" sldId="343"/>
+        </pc:sldMkLst>
+        <pc:spChg chg="mod">
+          <ac:chgData name="LEUNG Jacky" userId="S::jacky.leung@axa.com.hk::b9445fa1-303b-45da-98a2-a95317d67951" providerId="AD" clId="Web-{E5AD0A55-7EF5-F281-302B-BBF103462F04}" dt="2023-03-27T09:25:54.017" v="1964" actId="20577"/>
+          <ac:spMkLst>
+            <pc:docMk/>
+            <pc:sldMk cId="1463477700" sldId="343"/>
+            <ac:spMk id="2" creationId="{1FAE7B19-B532-47E4-AD36-E223BAA71D49}"/>
+          </ac:spMkLst>
+        </pc:spChg>
+        <pc:spChg chg="del">
+          <ac:chgData name="LEUNG Jacky" userId="S::jacky.leung@axa.com.hk::b9445fa1-303b-45da-98a2-a95317d67951" providerId="AD" clId="Web-{E5AD0A55-7EF5-F281-302B-BBF103462F04}" dt="2023-03-27T09:20:41.273" v="1907"/>
+          <ac:spMkLst>
+            <pc:docMk/>
+            <pc:sldMk cId="1463477700" sldId="343"/>
+            <ac:spMk id="14" creationId="{E78B3DCD-ADBE-D82A-904A-314E47F33185}"/>
+          </ac:spMkLst>
+        </pc:spChg>
+        <pc:picChg chg="del">
+          <ac:chgData name="LEUNG Jacky" userId="S::jacky.leung@axa.com.hk::b9445fa1-303b-45da-98a2-a95317d67951" providerId="AD" clId="Web-{E5AD0A55-7EF5-F281-302B-BBF103462F04}" dt="2023-03-27T09:20:38.210" v="1906"/>
+          <ac:picMkLst>
+            <pc:docMk/>
+            <pc:sldMk cId="1463477700" sldId="343"/>
+            <ac:picMk id="7" creationId="{7B72341F-F441-72AE-9830-3DCABFB2FC4E}"/>
+          </ac:picMkLst>
+        </pc:picChg>
+        <pc:picChg chg="add del mod">
+          <ac:chgData name="LEUNG Jacky" userId="S::jacky.leung@axa.com.hk::b9445fa1-303b-45da-98a2-a95317d67951" providerId="AD" clId="Web-{E5AD0A55-7EF5-F281-302B-BBF103462F04}" dt="2023-03-27T09:25:16.531" v="1919"/>
+          <ac:picMkLst>
+            <pc:docMk/>
+            <pc:sldMk cId="1463477700" sldId="343"/>
+            <ac:picMk id="8" creationId="{CB2814B9-53B2-DC91-EF9F-03D81A5C151D}"/>
+          </ac:picMkLst>
+        </pc:picChg>
+        <pc:picChg chg="add mod">
+          <ac:chgData name="LEUNG Jacky" userId="S::jacky.leung@axa.com.hk::b9445fa1-303b-45da-98a2-a95317d67951" providerId="AD" clId="Web-{E5AD0A55-7EF5-F281-302B-BBF103462F04}" dt="2023-03-27T09:25:32.391" v="1928" actId="1076"/>
+          <ac:picMkLst>
+            <pc:docMk/>
+            <pc:sldMk cId="1463477700" sldId="343"/>
+            <ac:picMk id="9" creationId="{EF2DF5B3-03EE-E7EF-822E-DFE4ED793F54}"/>
+          </ac:picMkLst>
+        </pc:picChg>
+      </pc:sldChg>
+      <pc:sldChg chg="add del replId">
+        <pc:chgData name="LEUNG Jacky" userId="S::jacky.leung@axa.com.hk::b9445fa1-303b-45da-98a2-a95317d67951" providerId="AD" clId="Web-{E5AD0A55-7EF5-F281-302B-BBF103462F04}" dt="2023-03-27T09:16:09.218" v="1752"/>
+        <pc:sldMkLst>
+          <pc:docMk/>
+          <pc:sldMk cId="1796422656" sldId="343"/>
+        </pc:sldMkLst>
+      </pc:sldChg>
+    </pc:docChg>
+  </pc:docChgLst>
+  <pc:docChgLst>
+    <pc:chgData name="TSE Kin" userId="0225f25b-d90a-49aa-8f8a-7a0034099826" providerId="ADAL" clId="{0E7D56F6-7F0E-4E33-94F3-B4A6600CE76B}"/>
+    <pc:docChg chg="undo custSel addSld delSld modSld sldOrd">
+      <pc:chgData name="TSE Kin" userId="0225f25b-d90a-49aa-8f8a-7a0034099826" providerId="ADAL" clId="{0E7D56F6-7F0E-4E33-94F3-B4A6600CE76B}" dt="2023-03-31T09:00:35.504" v="3332" actId="207"/>
+      <pc:docMkLst>
+        <pc:docMk/>
+      </pc:docMkLst>
+      <pc:sldChg chg="modSp mod">
+        <pc:chgData name="TSE Kin" userId="0225f25b-d90a-49aa-8f8a-7a0034099826" providerId="ADAL" clId="{0E7D56F6-7F0E-4E33-94F3-B4A6600CE76B}" dt="2023-03-31T08:59:43.451" v="3296" actId="20577"/>
+        <pc:sldMkLst>
+          <pc:docMk/>
+          <pc:sldMk cId="4093437428" sldId="257"/>
+        </pc:sldMkLst>
+        <pc:spChg chg="mod">
+          <ac:chgData name="TSE Kin" userId="0225f25b-d90a-49aa-8f8a-7a0034099826" providerId="ADAL" clId="{0E7D56F6-7F0E-4E33-94F3-B4A6600CE76B}" dt="2023-03-31T08:59:43.451" v="3296" actId="20577"/>
+          <ac:spMkLst>
+            <pc:docMk/>
+            <pc:sldMk cId="4093437428" sldId="257"/>
+            <ac:spMk id="2" creationId="{266DFD87-74D9-478B-B7FE-8FBC975665C3}"/>
+          </ac:spMkLst>
+        </pc:spChg>
+      </pc:sldChg>
       <pc:sldChg chg="addSp delSp modSp mod">
-        <pc:chgData name="TSE Kin" userId="0225f25b-d90a-49aa-8f8a-7a0034099826" providerId="ADAL" clId="{0E7D56F6-7F0E-4E33-94F3-B4A6600CE76B}" dt="2023-03-30T02:39:38.109" v="2693" actId="207"/>
+        <pc:chgData name="TSE Kin" userId="0225f25b-d90a-49aa-8f8a-7a0034099826" providerId="ADAL" clId="{0E7D56F6-7F0E-4E33-94F3-B4A6600CE76B}" dt="2023-03-31T08:59:52.042" v="3301" actId="5793"/>
         <pc:sldMkLst>
           <pc:docMk/>
           <pc:sldMk cId="1095911629" sldId="258"/>
         </pc:sldMkLst>
         <pc:spChg chg="mod">
-          <ac:chgData name="TSE Kin" userId="0225f25b-d90a-49aa-8f8a-7a0034099826" providerId="ADAL" clId="{0E7D56F6-7F0E-4E33-94F3-B4A6600CE76B}" dt="2023-03-29T21:41:38.040" v="2328" actId="20577"/>
+          <ac:chgData name="TSE Kin" userId="0225f25b-d90a-49aa-8f8a-7a0034099826" providerId="ADAL" clId="{0E7D56F6-7F0E-4E33-94F3-B4A6600CE76B}" dt="2023-03-31T08:59:52.042" v="3301" actId="5793"/>
           <ac:spMkLst>
             <pc:docMk/>
             <pc:sldMk cId="1095911629" sldId="258"/>
@@ -1321,7 +2020,7 @@
         </pc:spChg>
       </pc:sldChg>
       <pc:sldChg chg="addSp modSp new mod">
-        <pc:chgData name="TSE Kin" userId="0225f25b-d90a-49aa-8f8a-7a0034099826" providerId="ADAL" clId="{0E7D56F6-7F0E-4E33-94F3-B4A6600CE76B}" dt="2023-03-29T21:38:56.637" v="2327" actId="113"/>
+        <pc:chgData name="TSE Kin" userId="0225f25b-d90a-49aa-8f8a-7a0034099826" providerId="ADAL" clId="{0E7D56F6-7F0E-4E33-94F3-B4A6600CE76B}" dt="2023-03-31T09:00:35.504" v="3332" actId="207"/>
         <pc:sldMkLst>
           <pc:docMk/>
           <pc:sldMk cId="2799964493" sldId="259"/>
@@ -1359,11 +2058,27 @@
           </ac:spMkLst>
         </pc:spChg>
         <pc:spChg chg="mod">
+          <ac:chgData name="TSE Kin" userId="0225f25b-d90a-49aa-8f8a-7a0034099826" providerId="ADAL" clId="{0E7D56F6-7F0E-4E33-94F3-B4A6600CE76B}" dt="2023-03-31T09:00:21.756" v="3330" actId="20577"/>
+          <ac:spMkLst>
+            <pc:docMk/>
+            <pc:sldMk cId="2799964493" sldId="259"/>
+            <ac:spMk id="29" creationId="{3DEADE20-3EE5-48C1-9368-D3DD28BD3C54}"/>
+          </ac:spMkLst>
+        </pc:spChg>
+        <pc:spChg chg="mod">
           <ac:chgData name="TSE Kin" userId="0225f25b-d90a-49aa-8f8a-7a0034099826" providerId="ADAL" clId="{0E7D56F6-7F0E-4E33-94F3-B4A6600CE76B}" dt="2023-03-27T08:39:05.920" v="1030" actId="14100"/>
           <ac:spMkLst>
             <pc:docMk/>
             <pc:sldMk cId="2799964493" sldId="259"/>
             <ac:spMk id="30" creationId="{55BF9149-8A43-42B6-A17E-13EDBB9BECB4}"/>
+          </ac:spMkLst>
+        </pc:spChg>
+        <pc:spChg chg="add mod">
+          <ac:chgData name="TSE Kin" userId="0225f25b-d90a-49aa-8f8a-7a0034099826" providerId="ADAL" clId="{0E7D56F6-7F0E-4E33-94F3-B4A6600CE76B}" dt="2023-03-31T09:00:35.504" v="3332" actId="207"/>
+          <ac:spMkLst>
+            <pc:docMk/>
+            <pc:sldMk cId="2799964493" sldId="259"/>
+            <ac:spMk id="31" creationId="{6323EBC5-7E79-453A-8E4C-2281109199AF}"/>
           </ac:spMkLst>
         </pc:spChg>
         <pc:spChg chg="mod">
@@ -1986,509 +2701,14 @@
     </pc:docChg>
   </pc:docChgLst>
   <pc:docChgLst>
-    <pc:chgData name="LEUNG Jacky" userId="S::jacky.leung@axa.com.hk::b9445fa1-303b-45da-98a2-a95317d67951" providerId="AD" clId="Web-{E5AD0A55-7EF5-F281-302B-BBF103462F04}"/>
-    <pc:docChg chg="addSld delSld modSld sldOrd">
-      <pc:chgData name="LEUNG Jacky" userId="S::jacky.leung@axa.com.hk::b9445fa1-303b-45da-98a2-a95317d67951" providerId="AD" clId="Web-{E5AD0A55-7EF5-F281-302B-BBF103462F04}" dt="2023-03-27T09:56:57.150" v="2362" actId="20577"/>
-      <pc:docMkLst>
-        <pc:docMk/>
-      </pc:docMkLst>
-      <pc:sldChg chg="addSp delSp modSp">
-        <pc:chgData name="LEUNG Jacky" userId="S::jacky.leung@axa.com.hk::b9445fa1-303b-45da-98a2-a95317d67951" providerId="AD" clId="Web-{E5AD0A55-7EF5-F281-302B-BBF103462F04}" dt="2023-03-27T08:32:15.641" v="1147" actId="20577"/>
-        <pc:sldMkLst>
-          <pc:docMk/>
-          <pc:sldMk cId="3360548296" sldId="269"/>
-        </pc:sldMkLst>
-        <pc:spChg chg="mod">
-          <ac:chgData name="LEUNG Jacky" userId="S::jacky.leung@axa.com.hk::b9445fa1-303b-45da-98a2-a95317d67951" providerId="AD" clId="Web-{E5AD0A55-7EF5-F281-302B-BBF103462F04}" dt="2023-03-27T08:32:15.641" v="1147" actId="20577"/>
-          <ac:spMkLst>
-            <pc:docMk/>
-            <pc:sldMk cId="3360548296" sldId="269"/>
-            <ac:spMk id="2" creationId="{1FAE7B19-B532-47E4-AD36-E223BAA71D49}"/>
-          </ac:spMkLst>
-        </pc:spChg>
-        <pc:spChg chg="add mod">
-          <ac:chgData name="LEUNG Jacky" userId="S::jacky.leung@axa.com.hk::b9445fa1-303b-45da-98a2-a95317d67951" providerId="AD" clId="Web-{E5AD0A55-7EF5-F281-302B-BBF103462F04}" dt="2023-03-27T08:31:50.343" v="1136" actId="20577"/>
-          <ac:spMkLst>
-            <pc:docMk/>
-            <pc:sldMk cId="3360548296" sldId="269"/>
-            <ac:spMk id="15" creationId="{C80D9B7C-24E7-89AB-9E73-1EB550EE736B}"/>
-          </ac:spMkLst>
-        </pc:spChg>
-        <pc:graphicFrameChg chg="add mod modGraphic">
-          <ac:chgData name="LEUNG Jacky" userId="S::jacky.leung@axa.com.hk::b9445fa1-303b-45da-98a2-a95317d67951" providerId="AD" clId="Web-{E5AD0A55-7EF5-F281-302B-BBF103462F04}" dt="2023-03-27T08:30:46.372" v="1054"/>
-          <ac:graphicFrameMkLst>
-            <pc:docMk/>
-            <pc:sldMk cId="3360548296" sldId="269"/>
-            <ac:graphicFrameMk id="13" creationId="{B5570027-FB01-E4C0-BB1F-D9F31CFB3461}"/>
-          </ac:graphicFrameMkLst>
-        </pc:graphicFrameChg>
-        <pc:picChg chg="add del mod">
-          <ac:chgData name="LEUNG Jacky" userId="S::jacky.leung@axa.com.hk::b9445fa1-303b-45da-98a2-a95317d67951" providerId="AD" clId="Web-{E5AD0A55-7EF5-F281-302B-BBF103462F04}" dt="2023-03-27T07:51:27.131" v="435"/>
-          <ac:picMkLst>
-            <pc:docMk/>
-            <pc:sldMk cId="3360548296" sldId="269"/>
-            <ac:picMk id="7" creationId="{BA0407BC-0808-FBCE-5B5B-F14E23C4AC32}"/>
-          </ac:picMkLst>
-        </pc:picChg>
-        <pc:picChg chg="add del mod">
-          <ac:chgData name="LEUNG Jacky" userId="S::jacky.leung@axa.com.hk::b9445fa1-303b-45da-98a2-a95317d67951" providerId="AD" clId="Web-{E5AD0A55-7EF5-F281-302B-BBF103462F04}" dt="2023-03-27T07:51:45.178" v="439"/>
-          <ac:picMkLst>
-            <pc:docMk/>
-            <pc:sldMk cId="3360548296" sldId="269"/>
-            <ac:picMk id="8" creationId="{26B76824-26DE-381C-3BBA-5004FFCAB07B}"/>
-          </ac:picMkLst>
-        </pc:picChg>
-        <pc:picChg chg="add del mod">
-          <ac:chgData name="LEUNG Jacky" userId="S::jacky.leung@axa.com.hk::b9445fa1-303b-45da-98a2-a95317d67951" providerId="AD" clId="Web-{E5AD0A55-7EF5-F281-302B-BBF103462F04}" dt="2023-03-27T07:51:49.772" v="442"/>
-          <ac:picMkLst>
-            <pc:docMk/>
-            <pc:sldMk cId="3360548296" sldId="269"/>
-            <ac:picMk id="9" creationId="{5619F231-F5EB-4284-897B-CAEDD6C5F671}"/>
-          </ac:picMkLst>
-        </pc:picChg>
-        <pc:picChg chg="add del mod">
-          <ac:chgData name="LEUNG Jacky" userId="S::jacky.leung@axa.com.hk::b9445fa1-303b-45da-98a2-a95317d67951" providerId="AD" clId="Web-{E5AD0A55-7EF5-F281-302B-BBF103462F04}" dt="2023-03-27T07:52:22.601" v="446"/>
-          <ac:picMkLst>
-            <pc:docMk/>
-            <pc:sldMk cId="3360548296" sldId="269"/>
-            <ac:picMk id="10" creationId="{39F0489E-756E-50D2-3584-C5846BDFAF86}"/>
-          </ac:picMkLst>
-        </pc:picChg>
-        <pc:picChg chg="add mod">
-          <ac:chgData name="LEUNG Jacky" userId="S::jacky.leung@axa.com.hk::b9445fa1-303b-45da-98a2-a95317d67951" providerId="AD" clId="Web-{E5AD0A55-7EF5-F281-302B-BBF103462F04}" dt="2023-03-27T07:53:35.744" v="452" actId="1076"/>
-          <ac:picMkLst>
-            <pc:docMk/>
-            <pc:sldMk cId="3360548296" sldId="269"/>
-            <ac:picMk id="11" creationId="{B25E5D4E-188B-B22D-F504-DD580F6D8911}"/>
-          </ac:picMkLst>
-        </pc:picChg>
-        <pc:picChg chg="add del mod">
-          <ac:chgData name="LEUNG Jacky" userId="S::jacky.leung@axa.com.hk::b9445fa1-303b-45da-98a2-a95317d67951" providerId="AD" clId="Web-{E5AD0A55-7EF5-F281-302B-BBF103462F04}" dt="2023-03-27T07:54:22.855" v="457"/>
-          <ac:picMkLst>
-            <pc:docMk/>
-            <pc:sldMk cId="3360548296" sldId="269"/>
-            <ac:picMk id="12" creationId="{D9DECC69-5EBA-C2CB-84B3-F35542767BA2}"/>
-          </ac:picMkLst>
-        </pc:picChg>
-      </pc:sldChg>
-      <pc:sldChg chg="modSp">
-        <pc:chgData name="LEUNG Jacky" userId="S::jacky.leung@axa.com.hk::b9445fa1-303b-45da-98a2-a95317d67951" providerId="AD" clId="Web-{E5AD0A55-7EF5-F281-302B-BBF103462F04}" dt="2023-03-27T09:56:57.150" v="2362" actId="20577"/>
-        <pc:sldMkLst>
-          <pc:docMk/>
-          <pc:sldMk cId="4137991421" sldId="271"/>
-        </pc:sldMkLst>
-        <pc:spChg chg="mod">
-          <ac:chgData name="LEUNG Jacky" userId="S::jacky.leung@axa.com.hk::b9445fa1-303b-45da-98a2-a95317d67951" providerId="AD" clId="Web-{E5AD0A55-7EF5-F281-302B-BBF103462F04}" dt="2023-03-27T09:56:57.150" v="2362" actId="20577"/>
-          <ac:spMkLst>
-            <pc:docMk/>
-            <pc:sldMk cId="4137991421" sldId="271"/>
-            <ac:spMk id="2" creationId="{11521F0B-4767-4461-B156-3C8A4334B2F5}"/>
-          </ac:spMkLst>
-        </pc:spChg>
-        <pc:spChg chg="mod">
-          <ac:chgData name="LEUNG Jacky" userId="S::jacky.leung@axa.com.hk::b9445fa1-303b-45da-98a2-a95317d67951" providerId="AD" clId="Web-{E5AD0A55-7EF5-F281-302B-BBF103462F04}" dt="2023-03-27T07:16:10.644" v="431" actId="20577"/>
-          <ac:spMkLst>
-            <pc:docMk/>
-            <pc:sldMk cId="4137991421" sldId="271"/>
-            <ac:spMk id="3" creationId="{20F4C2E6-9C93-44AF-B5A6-72C81F626F2E}"/>
-          </ac:spMkLst>
-        </pc:spChg>
-      </pc:sldChg>
-      <pc:sldChg chg="addSp modSp">
-        <pc:chgData name="LEUNG Jacky" userId="S::jacky.leung@axa.com.hk::b9445fa1-303b-45da-98a2-a95317d67951" providerId="AD" clId="Web-{E5AD0A55-7EF5-F281-302B-BBF103462F04}" dt="2023-03-27T09:54:03.692" v="2320" actId="20577"/>
-        <pc:sldMkLst>
-          <pc:docMk/>
-          <pc:sldMk cId="1727444638" sldId="272"/>
-        </pc:sldMkLst>
-        <pc:spChg chg="mod">
-          <ac:chgData name="LEUNG Jacky" userId="S::jacky.leung@axa.com.hk::b9445fa1-303b-45da-98a2-a95317d67951" providerId="AD" clId="Web-{E5AD0A55-7EF5-F281-302B-BBF103462F04}" dt="2023-03-27T09:45:58.818" v="2236" actId="20577"/>
-          <ac:spMkLst>
-            <pc:docMk/>
-            <pc:sldMk cId="1727444638" sldId="272"/>
-            <ac:spMk id="4" creationId="{D1D58659-EFC8-4B0B-894F-BEA3C186780B}"/>
-          </ac:spMkLst>
-        </pc:spChg>
-        <pc:spChg chg="add mod">
-          <ac:chgData name="LEUNG Jacky" userId="S::jacky.leung@axa.com.hk::b9445fa1-303b-45da-98a2-a95317d67951" providerId="AD" clId="Web-{E5AD0A55-7EF5-F281-302B-BBF103462F04}" dt="2023-03-27T09:54:03.692" v="2320" actId="20577"/>
-          <ac:spMkLst>
-            <pc:docMk/>
-            <pc:sldMk cId="1727444638" sldId="272"/>
-            <ac:spMk id="9" creationId="{4CC9B8B1-E833-F824-3AAE-A337618719BD}"/>
-          </ac:spMkLst>
-        </pc:spChg>
-      </pc:sldChg>
-      <pc:sldChg chg="addSp delSp modSp add ord replId">
-        <pc:chgData name="LEUNG Jacky" userId="S::jacky.leung@axa.com.hk::b9445fa1-303b-45da-98a2-a95317d67951" providerId="AD" clId="Web-{E5AD0A55-7EF5-F281-302B-BBF103462F04}" dt="2023-03-27T08:19:54.525" v="810" actId="20577"/>
-        <pc:sldMkLst>
-          <pc:docMk/>
-          <pc:sldMk cId="2969510933" sldId="274"/>
-        </pc:sldMkLst>
-        <pc:spChg chg="mod">
-          <ac:chgData name="LEUNG Jacky" userId="S::jacky.leung@axa.com.hk::b9445fa1-303b-45da-98a2-a95317d67951" providerId="AD" clId="Web-{E5AD0A55-7EF5-F281-302B-BBF103462F04}" dt="2023-03-27T08:19:54.525" v="810" actId="20577"/>
-          <ac:spMkLst>
-            <pc:docMk/>
-            <pc:sldMk cId="2969510933" sldId="274"/>
-            <ac:spMk id="2" creationId="{1FAE7B19-B532-47E4-AD36-E223BAA71D49}"/>
-          </ac:spMkLst>
-        </pc:spChg>
-        <pc:spChg chg="add del mod">
-          <ac:chgData name="LEUNG Jacky" userId="S::jacky.leung@axa.com.hk::b9445fa1-303b-45da-98a2-a95317d67951" providerId="AD" clId="Web-{E5AD0A55-7EF5-F281-302B-BBF103462F04}" dt="2023-03-27T08:17:53.053" v="687"/>
-          <ac:spMkLst>
-            <pc:docMk/>
-            <pc:sldMk cId="2969510933" sldId="274"/>
-            <ac:spMk id="12" creationId="{C86F88C5-00BE-56DE-3D77-DF1AEBB06D3E}"/>
-          </ac:spMkLst>
-        </pc:spChg>
-        <pc:spChg chg="add mod">
-          <ac:chgData name="LEUNG Jacky" userId="S::jacky.leung@axa.com.hk::b9445fa1-303b-45da-98a2-a95317d67951" providerId="AD" clId="Web-{E5AD0A55-7EF5-F281-302B-BBF103462F04}" dt="2023-03-27T08:19:22.102" v="765" actId="20577"/>
-          <ac:spMkLst>
-            <pc:docMk/>
-            <pc:sldMk cId="2969510933" sldId="274"/>
-            <ac:spMk id="14" creationId="{A95DDA5B-8CC8-5E90-612F-C605A5605C4D}"/>
-          </ac:spMkLst>
-        </pc:spChg>
-        <pc:picChg chg="add mod">
-          <ac:chgData name="LEUNG Jacky" userId="S::jacky.leung@axa.com.hk::b9445fa1-303b-45da-98a2-a95317d67951" providerId="AD" clId="Web-{E5AD0A55-7EF5-F281-302B-BBF103462F04}" dt="2023-03-27T08:13:19.904" v="468" actId="14100"/>
-          <ac:picMkLst>
-            <pc:docMk/>
-            <pc:sldMk cId="2969510933" sldId="274"/>
-            <ac:picMk id="7" creationId="{B1F81377-BF3D-49D3-AA7B-9001A4B66F31}"/>
-          </ac:picMkLst>
-        </pc:picChg>
-        <pc:picChg chg="add mod">
-          <ac:chgData name="LEUNG Jacky" userId="S::jacky.leung@axa.com.hk::b9445fa1-303b-45da-98a2-a95317d67951" providerId="AD" clId="Web-{E5AD0A55-7EF5-F281-302B-BBF103462F04}" dt="2023-03-27T08:13:35.623" v="473" actId="14100"/>
-          <ac:picMkLst>
-            <pc:docMk/>
-            <pc:sldMk cId="2969510933" sldId="274"/>
-            <ac:picMk id="8" creationId="{D6EC4F7A-2967-DB7D-57AA-C03D9F926B2E}"/>
-          </ac:picMkLst>
-        </pc:picChg>
-        <pc:picChg chg="add del mod">
-          <ac:chgData name="LEUNG Jacky" userId="S::jacky.leung@axa.com.hk::b9445fa1-303b-45da-98a2-a95317d67951" providerId="AD" clId="Web-{E5AD0A55-7EF5-F281-302B-BBF103462F04}" dt="2023-03-27T08:14:13.296" v="475"/>
-          <ac:picMkLst>
-            <pc:docMk/>
-            <pc:sldMk cId="2969510933" sldId="274"/>
-            <ac:picMk id="9" creationId="{344B1C7C-0FA3-FD0A-E1A4-355A5D3F44DE}"/>
-          </ac:picMkLst>
-        </pc:picChg>
-        <pc:picChg chg="add del mod">
-          <ac:chgData name="LEUNG Jacky" userId="S::jacky.leung@axa.com.hk::b9445fa1-303b-45da-98a2-a95317d67951" providerId="AD" clId="Web-{E5AD0A55-7EF5-F281-302B-BBF103462F04}" dt="2023-03-27T08:14:22.265" v="477"/>
-          <ac:picMkLst>
-            <pc:docMk/>
-            <pc:sldMk cId="2969510933" sldId="274"/>
-            <ac:picMk id="10" creationId="{959EF1E0-B7C2-C52F-50CD-7DF61D6E2393}"/>
-          </ac:picMkLst>
-        </pc:picChg>
-        <pc:picChg chg="del mod">
-          <ac:chgData name="LEUNG Jacky" userId="S::jacky.leung@axa.com.hk::b9445fa1-303b-45da-98a2-a95317d67951" providerId="AD" clId="Web-{E5AD0A55-7EF5-F281-302B-BBF103462F04}" dt="2023-03-27T07:54:56.731" v="461"/>
-          <ac:picMkLst>
-            <pc:docMk/>
-            <pc:sldMk cId="2969510933" sldId="274"/>
-            <ac:picMk id="11" creationId="{B25E5D4E-188B-B22D-F504-DD580F6D8911}"/>
-          </ac:picMkLst>
-        </pc:picChg>
-      </pc:sldChg>
-      <pc:sldChg chg="addSp delSp modSp add replId">
-        <pc:chgData name="LEUNG Jacky" userId="S::jacky.leung@axa.com.hk::b9445fa1-303b-45da-98a2-a95317d67951" providerId="AD" clId="Web-{E5AD0A55-7EF5-F281-302B-BBF103462F04}" dt="2023-03-27T08:55:12.775" v="1442" actId="20577"/>
-        <pc:sldMkLst>
-          <pc:docMk/>
-          <pc:sldMk cId="314809675" sldId="336"/>
-        </pc:sldMkLst>
-        <pc:spChg chg="mod">
-          <ac:chgData name="LEUNG Jacky" userId="S::jacky.leung@axa.com.hk::b9445fa1-303b-45da-98a2-a95317d67951" providerId="AD" clId="Web-{E5AD0A55-7EF5-F281-302B-BBF103462F04}" dt="2023-03-27T08:55:12.775" v="1442" actId="20577"/>
-          <ac:spMkLst>
-            <pc:docMk/>
-            <pc:sldMk cId="314809675" sldId="336"/>
-            <ac:spMk id="2" creationId="{1FAE7B19-B532-47E4-AD36-E223BAA71D49}"/>
-          </ac:spMkLst>
-        </pc:spChg>
-        <pc:spChg chg="mod">
-          <ac:chgData name="LEUNG Jacky" userId="S::jacky.leung@axa.com.hk::b9445fa1-303b-45da-98a2-a95317d67951" providerId="AD" clId="Web-{E5AD0A55-7EF5-F281-302B-BBF103462F04}" dt="2023-03-27T08:52:32.458" v="1424" actId="20577"/>
-          <ac:spMkLst>
-            <pc:docMk/>
-            <pc:sldMk cId="314809675" sldId="336"/>
-            <ac:spMk id="15" creationId="{C80D9B7C-24E7-89AB-9E73-1EB550EE736B}"/>
-          </ac:spMkLst>
-        </pc:spChg>
-        <pc:graphicFrameChg chg="mod modGraphic">
-          <ac:chgData name="LEUNG Jacky" userId="S::jacky.leung@axa.com.hk::b9445fa1-303b-45da-98a2-a95317d67951" providerId="AD" clId="Web-{E5AD0A55-7EF5-F281-302B-BBF103462F04}" dt="2023-03-27T08:51:31.659" v="1347"/>
-          <ac:graphicFrameMkLst>
-            <pc:docMk/>
-            <pc:sldMk cId="314809675" sldId="336"/>
-            <ac:graphicFrameMk id="13" creationId="{B5570027-FB01-E4C0-BB1F-D9F31CFB3461}"/>
-          </ac:graphicFrameMkLst>
-        </pc:graphicFrameChg>
-        <pc:picChg chg="add mod">
-          <ac:chgData name="LEUNG Jacky" userId="S::jacky.leung@axa.com.hk::b9445fa1-303b-45da-98a2-a95317d67951" providerId="AD" clId="Web-{E5AD0A55-7EF5-F281-302B-BBF103462F04}" dt="2023-03-27T08:46:24.119" v="1152" actId="14100"/>
-          <ac:picMkLst>
-            <pc:docMk/>
-            <pc:sldMk cId="314809675" sldId="336"/>
-            <ac:picMk id="7" creationId="{F0032B42-1AEE-9EA3-7592-CA6F4FA137C4}"/>
-          </ac:picMkLst>
-        </pc:picChg>
-        <pc:picChg chg="del">
-          <ac:chgData name="LEUNG Jacky" userId="S::jacky.leung@axa.com.hk::b9445fa1-303b-45da-98a2-a95317d67951" providerId="AD" clId="Web-{E5AD0A55-7EF5-F281-302B-BBF103462F04}" dt="2023-03-27T08:46:08.134" v="1148"/>
-          <ac:picMkLst>
-            <pc:docMk/>
-            <pc:sldMk cId="314809675" sldId="336"/>
-            <ac:picMk id="11" creationId="{B25E5D4E-188B-B22D-F504-DD580F6D8911}"/>
-          </ac:picMkLst>
-        </pc:picChg>
-      </pc:sldChg>
-      <pc:sldChg chg="addSp delSp modSp add">
-        <pc:chgData name="LEUNG Jacky" userId="S::jacky.leung@axa.com.hk::b9445fa1-303b-45da-98a2-a95317d67951" providerId="AD" clId="Web-{E5AD0A55-7EF5-F281-302B-BBF103462F04}" dt="2023-03-27T09:00:10.690" v="1645" actId="20577"/>
-        <pc:sldMkLst>
-          <pc:docMk/>
-          <pc:sldMk cId="4182086309" sldId="338"/>
-        </pc:sldMkLst>
-        <pc:spChg chg="mod">
-          <ac:chgData name="LEUNG Jacky" userId="S::jacky.leung@axa.com.hk::b9445fa1-303b-45da-98a2-a95317d67951" providerId="AD" clId="Web-{E5AD0A55-7EF5-F281-302B-BBF103462F04}" dt="2023-03-27T08:55:20.431" v="1450" actId="20577"/>
-          <ac:spMkLst>
-            <pc:docMk/>
-            <pc:sldMk cId="4182086309" sldId="338"/>
-            <ac:spMk id="2" creationId="{1FAE7B19-B532-47E4-AD36-E223BAA71D49}"/>
-          </ac:spMkLst>
-        </pc:spChg>
-        <pc:spChg chg="add mod">
-          <ac:chgData name="LEUNG Jacky" userId="S::jacky.leung@axa.com.hk::b9445fa1-303b-45da-98a2-a95317d67951" providerId="AD" clId="Web-{E5AD0A55-7EF5-F281-302B-BBF103462F04}" dt="2023-03-27T09:00:10.690" v="1645" actId="20577"/>
-          <ac:spMkLst>
-            <pc:docMk/>
-            <pc:sldMk cId="4182086309" sldId="338"/>
-            <ac:spMk id="14" creationId="{E78B3DCD-ADBE-D82A-904A-314E47F33185}"/>
-          </ac:spMkLst>
-        </pc:spChg>
-        <pc:spChg chg="mod">
-          <ac:chgData name="LEUNG Jacky" userId="S::jacky.leung@axa.com.hk::b9445fa1-303b-45da-98a2-a95317d67951" providerId="AD" clId="Web-{E5AD0A55-7EF5-F281-302B-BBF103462F04}" dt="2023-03-27T08:57:43.842" v="1465" actId="20577"/>
-          <ac:spMkLst>
-            <pc:docMk/>
-            <pc:sldMk cId="4182086309" sldId="338"/>
-            <ac:spMk id="15" creationId="{C80D9B7C-24E7-89AB-9E73-1EB550EE736B}"/>
-          </ac:spMkLst>
-        </pc:spChg>
-        <pc:graphicFrameChg chg="del mod modGraphic">
-          <ac:chgData name="LEUNG Jacky" userId="S::jacky.leung@axa.com.hk::b9445fa1-303b-45da-98a2-a95317d67951" providerId="AD" clId="Web-{E5AD0A55-7EF5-F281-302B-BBF103462F04}" dt="2023-03-27T08:53:52.335" v="1433"/>
-          <ac:graphicFrameMkLst>
-            <pc:docMk/>
-            <pc:sldMk cId="4182086309" sldId="338"/>
-            <ac:graphicFrameMk id="13" creationId="{B5570027-FB01-E4C0-BB1F-D9F31CFB3461}"/>
-          </ac:graphicFrameMkLst>
-        </pc:graphicFrameChg>
-        <pc:picChg chg="del">
-          <ac:chgData name="LEUNG Jacky" userId="S::jacky.leung@axa.com.hk::b9445fa1-303b-45da-98a2-a95317d67951" providerId="AD" clId="Web-{E5AD0A55-7EF5-F281-302B-BBF103462F04}" dt="2023-03-27T08:53:40.413" v="1426"/>
-          <ac:picMkLst>
-            <pc:docMk/>
-            <pc:sldMk cId="4182086309" sldId="338"/>
-            <ac:picMk id="7" creationId="{F0032B42-1AEE-9EA3-7592-CA6F4FA137C4}"/>
-          </ac:picMkLst>
-        </pc:picChg>
-        <pc:picChg chg="add del mod">
-          <ac:chgData name="LEUNG Jacky" userId="S::jacky.leung@axa.com.hk::b9445fa1-303b-45da-98a2-a95317d67951" providerId="AD" clId="Web-{E5AD0A55-7EF5-F281-302B-BBF103462F04}" dt="2023-03-27T08:56:50.012" v="1451"/>
-          <ac:picMkLst>
-            <pc:docMk/>
-            <pc:sldMk cId="4182086309" sldId="338"/>
-            <ac:picMk id="8" creationId="{BF31A66A-A8E2-A189-5771-72568D6D7417}"/>
-          </ac:picMkLst>
-        </pc:picChg>
-        <pc:picChg chg="add del mod">
-          <ac:chgData name="LEUNG Jacky" userId="S::jacky.leung@axa.com.hk::b9445fa1-303b-45da-98a2-a95317d67951" providerId="AD" clId="Web-{E5AD0A55-7EF5-F281-302B-BBF103462F04}" dt="2023-03-27T08:57:25.201" v="1457"/>
-          <ac:picMkLst>
-            <pc:docMk/>
-            <pc:sldMk cId="4182086309" sldId="338"/>
-            <ac:picMk id="9" creationId="{88510A91-1746-6C9C-C225-A94BD7CFA703}"/>
-          </ac:picMkLst>
-        </pc:picChg>
-        <pc:picChg chg="add del mod">
-          <ac:chgData name="LEUNG Jacky" userId="S::jacky.leung@axa.com.hk::b9445fa1-303b-45da-98a2-a95317d67951" providerId="AD" clId="Web-{E5AD0A55-7EF5-F281-302B-BBF103462F04}" dt="2023-03-27T08:58:10.889" v="1466"/>
-          <ac:picMkLst>
-            <pc:docMk/>
-            <pc:sldMk cId="4182086309" sldId="338"/>
-            <ac:picMk id="10" creationId="{D41B3F99-AEF7-EDD6-5D5E-A48CEAE27148}"/>
-          </ac:picMkLst>
-        </pc:picChg>
-        <pc:picChg chg="add mod">
-          <ac:chgData name="LEUNG Jacky" userId="S::jacky.leung@axa.com.hk::b9445fa1-303b-45da-98a2-a95317d67951" providerId="AD" clId="Web-{E5AD0A55-7EF5-F281-302B-BBF103462F04}" dt="2023-03-27T08:58:19.640" v="1470" actId="14100"/>
-          <ac:picMkLst>
-            <pc:docMk/>
-            <pc:sldMk cId="4182086309" sldId="338"/>
-            <ac:picMk id="11" creationId="{7F663943-BA4F-EABE-4F00-5C777ECC7910}"/>
-          </ac:picMkLst>
-        </pc:picChg>
-      </pc:sldChg>
-      <pc:sldChg chg="addSp delSp modSp add">
-        <pc:chgData name="LEUNG Jacky" userId="S::jacky.leung@axa.com.hk::b9445fa1-303b-45da-98a2-a95317d67951" providerId="AD" clId="Web-{E5AD0A55-7EF5-F281-302B-BBF103462F04}" dt="2023-03-27T09:14:57.825" v="1747" actId="20577"/>
-        <pc:sldMkLst>
-          <pc:docMk/>
-          <pc:sldMk cId="1204536253" sldId="339"/>
-        </pc:sldMkLst>
-        <pc:spChg chg="mod">
-          <ac:chgData name="LEUNG Jacky" userId="S::jacky.leung@axa.com.hk::b9445fa1-303b-45da-98a2-a95317d67951" providerId="AD" clId="Web-{E5AD0A55-7EF5-F281-302B-BBF103462F04}" dt="2023-03-27T09:13:54.074" v="1672" actId="20577"/>
-          <ac:spMkLst>
-            <pc:docMk/>
-            <pc:sldMk cId="1204536253" sldId="339"/>
-            <ac:spMk id="2" creationId="{1FAE7B19-B532-47E4-AD36-E223BAA71D49}"/>
-          </ac:spMkLst>
-        </pc:spChg>
-        <pc:spChg chg="mod">
-          <ac:chgData name="LEUNG Jacky" userId="S::jacky.leung@axa.com.hk::b9445fa1-303b-45da-98a2-a95317d67951" providerId="AD" clId="Web-{E5AD0A55-7EF5-F281-302B-BBF103462F04}" dt="2023-03-27T09:14:57.825" v="1747" actId="20577"/>
-          <ac:spMkLst>
-            <pc:docMk/>
-            <pc:sldMk cId="1204536253" sldId="339"/>
-            <ac:spMk id="14" creationId="{E78B3DCD-ADBE-D82A-904A-314E47F33185}"/>
-          </ac:spMkLst>
-        </pc:spChg>
-        <pc:picChg chg="add del mod">
-          <ac:chgData name="LEUNG Jacky" userId="S::jacky.leung@axa.com.hk::b9445fa1-303b-45da-98a2-a95317d67951" providerId="AD" clId="Web-{E5AD0A55-7EF5-F281-302B-BBF103462F04}" dt="2023-03-27T09:10:05.895" v="1651"/>
-          <ac:picMkLst>
-            <pc:docMk/>
-            <pc:sldMk cId="1204536253" sldId="339"/>
-            <ac:picMk id="7" creationId="{6368F893-BEBF-6D75-B26F-2559C7DD7DC8}"/>
-          </ac:picMkLst>
-        </pc:picChg>
-        <pc:picChg chg="add del mod">
-          <ac:chgData name="LEUNG Jacky" userId="S::jacky.leung@axa.com.hk::b9445fa1-303b-45da-98a2-a95317d67951" providerId="AD" clId="Web-{E5AD0A55-7EF5-F281-302B-BBF103462F04}" dt="2023-03-27T09:13:29.635" v="1661"/>
-          <ac:picMkLst>
-            <pc:docMk/>
-            <pc:sldMk cId="1204536253" sldId="339"/>
-            <ac:picMk id="8" creationId="{B8AC586B-4047-7C9F-2339-D605EEA2F6B2}"/>
-          </ac:picMkLst>
-        </pc:picChg>
-        <pc:picChg chg="add mod">
-          <ac:chgData name="LEUNG Jacky" userId="S::jacky.leung@axa.com.hk::b9445fa1-303b-45da-98a2-a95317d67951" providerId="AD" clId="Web-{E5AD0A55-7EF5-F281-302B-BBF103462F04}" dt="2023-03-27T09:13:37.401" v="1665" actId="1076"/>
-          <ac:picMkLst>
-            <pc:docMk/>
-            <pc:sldMk cId="1204536253" sldId="339"/>
-            <ac:picMk id="9" creationId="{DA889270-1D3F-8681-D169-E48461E6DC86}"/>
-          </ac:picMkLst>
-        </pc:picChg>
-        <pc:picChg chg="add mod">
-          <ac:chgData name="LEUNG Jacky" userId="S::jacky.leung@axa.com.hk::b9445fa1-303b-45da-98a2-a95317d67951" providerId="AD" clId="Web-{E5AD0A55-7EF5-F281-302B-BBF103462F04}" dt="2023-03-27T09:13:45.714" v="1668" actId="1076"/>
-          <ac:picMkLst>
-            <pc:docMk/>
-            <pc:sldMk cId="1204536253" sldId="339"/>
-            <ac:picMk id="10" creationId="{B685FE83-1A5B-432A-C3AF-464A1E4BFBB0}"/>
-          </ac:picMkLst>
-        </pc:picChg>
-        <pc:picChg chg="del">
-          <ac:chgData name="LEUNG Jacky" userId="S::jacky.leung@axa.com.hk::b9445fa1-303b-45da-98a2-a95317d67951" providerId="AD" clId="Web-{E5AD0A55-7EF5-F281-302B-BBF103462F04}" dt="2023-03-27T09:01:09.332" v="1647"/>
-          <ac:picMkLst>
-            <pc:docMk/>
-            <pc:sldMk cId="1204536253" sldId="339"/>
-            <ac:picMk id="11" creationId="{7F663943-BA4F-EABE-4F00-5C777ECC7910}"/>
-          </ac:picMkLst>
-        </pc:picChg>
-      </pc:sldChg>
-      <pc:sldChg chg="addSp delSp modSp add replId">
-        <pc:chgData name="LEUNG Jacky" userId="S::jacky.leung@axa.com.hk::b9445fa1-303b-45da-98a2-a95317d67951" providerId="AD" clId="Web-{E5AD0A55-7EF5-F281-302B-BBF103462F04}" dt="2023-03-27T09:17:56.581" v="1904" actId="14100"/>
-        <pc:sldMkLst>
-          <pc:docMk/>
-          <pc:sldMk cId="2940668355" sldId="342"/>
-        </pc:sldMkLst>
-        <pc:spChg chg="mod">
-          <ac:chgData name="LEUNG Jacky" userId="S::jacky.leung@axa.com.hk::b9445fa1-303b-45da-98a2-a95317d67951" providerId="AD" clId="Web-{E5AD0A55-7EF5-F281-302B-BBF103462F04}" dt="2023-03-27T09:17:06.360" v="1846" actId="20577"/>
-          <ac:spMkLst>
-            <pc:docMk/>
-            <pc:sldMk cId="2940668355" sldId="342"/>
-            <ac:spMk id="2" creationId="{1FAE7B19-B532-47E4-AD36-E223BAA71D49}"/>
-          </ac:spMkLst>
-        </pc:spChg>
-        <pc:spChg chg="mod">
-          <ac:chgData name="LEUNG Jacky" userId="S::jacky.leung@axa.com.hk::b9445fa1-303b-45da-98a2-a95317d67951" providerId="AD" clId="Web-{E5AD0A55-7EF5-F281-302B-BBF103462F04}" dt="2023-03-27T09:17:56.581" v="1904" actId="14100"/>
-          <ac:spMkLst>
-            <pc:docMk/>
-            <pc:sldMk cId="2940668355" sldId="342"/>
-            <ac:spMk id="14" creationId="{E78B3DCD-ADBE-D82A-904A-314E47F33185}"/>
-          </ac:spMkLst>
-        </pc:spChg>
-        <pc:picChg chg="add mod">
-          <ac:chgData name="LEUNG Jacky" userId="S::jacky.leung@axa.com.hk::b9445fa1-303b-45da-98a2-a95317d67951" providerId="AD" clId="Web-{E5AD0A55-7EF5-F281-302B-BBF103462F04}" dt="2023-03-27T09:16:17.312" v="1755" actId="14100"/>
-          <ac:picMkLst>
-            <pc:docMk/>
-            <pc:sldMk cId="2940668355" sldId="342"/>
-            <ac:picMk id="7" creationId="{7B72341F-F441-72AE-9830-3DCABFB2FC4E}"/>
-          </ac:picMkLst>
-        </pc:picChg>
-        <pc:picChg chg="del">
-          <ac:chgData name="LEUNG Jacky" userId="S::jacky.leung@axa.com.hk::b9445fa1-303b-45da-98a2-a95317d67951" providerId="AD" clId="Web-{E5AD0A55-7EF5-F281-302B-BBF103462F04}" dt="2023-03-27T09:16:05.109" v="1749"/>
-          <ac:picMkLst>
-            <pc:docMk/>
-            <pc:sldMk cId="2940668355" sldId="342"/>
-            <ac:picMk id="9" creationId="{DA889270-1D3F-8681-D169-E48461E6DC86}"/>
-          </ac:picMkLst>
-        </pc:picChg>
-        <pc:picChg chg="del">
-          <ac:chgData name="LEUNG Jacky" userId="S::jacky.leung@axa.com.hk::b9445fa1-303b-45da-98a2-a95317d67951" providerId="AD" clId="Web-{E5AD0A55-7EF5-F281-302B-BBF103462F04}" dt="2023-03-27T09:16:06.515" v="1750"/>
-          <ac:picMkLst>
-            <pc:docMk/>
-            <pc:sldMk cId="2940668355" sldId="342"/>
-            <ac:picMk id="10" creationId="{B685FE83-1A5B-432A-C3AF-464A1E4BFBB0}"/>
-          </ac:picMkLst>
-        </pc:picChg>
-      </pc:sldChg>
-      <pc:sldChg chg="addSp delSp modSp add replId">
-        <pc:chgData name="LEUNG Jacky" userId="S::jacky.leung@axa.com.hk::b9445fa1-303b-45da-98a2-a95317d67951" providerId="AD" clId="Web-{E5AD0A55-7EF5-F281-302B-BBF103462F04}" dt="2023-03-27T09:25:54.017" v="1964" actId="20577"/>
-        <pc:sldMkLst>
-          <pc:docMk/>
-          <pc:sldMk cId="1463477700" sldId="343"/>
-        </pc:sldMkLst>
-        <pc:spChg chg="mod">
-          <ac:chgData name="LEUNG Jacky" userId="S::jacky.leung@axa.com.hk::b9445fa1-303b-45da-98a2-a95317d67951" providerId="AD" clId="Web-{E5AD0A55-7EF5-F281-302B-BBF103462F04}" dt="2023-03-27T09:25:54.017" v="1964" actId="20577"/>
-          <ac:spMkLst>
-            <pc:docMk/>
-            <pc:sldMk cId="1463477700" sldId="343"/>
-            <ac:spMk id="2" creationId="{1FAE7B19-B532-47E4-AD36-E223BAA71D49}"/>
-          </ac:spMkLst>
-        </pc:spChg>
-        <pc:spChg chg="del">
-          <ac:chgData name="LEUNG Jacky" userId="S::jacky.leung@axa.com.hk::b9445fa1-303b-45da-98a2-a95317d67951" providerId="AD" clId="Web-{E5AD0A55-7EF5-F281-302B-BBF103462F04}" dt="2023-03-27T09:20:41.273" v="1907"/>
-          <ac:spMkLst>
-            <pc:docMk/>
-            <pc:sldMk cId="1463477700" sldId="343"/>
-            <ac:spMk id="14" creationId="{E78B3DCD-ADBE-D82A-904A-314E47F33185}"/>
-          </ac:spMkLst>
-        </pc:spChg>
-        <pc:picChg chg="del">
-          <ac:chgData name="LEUNG Jacky" userId="S::jacky.leung@axa.com.hk::b9445fa1-303b-45da-98a2-a95317d67951" providerId="AD" clId="Web-{E5AD0A55-7EF5-F281-302B-BBF103462F04}" dt="2023-03-27T09:20:38.210" v="1906"/>
-          <ac:picMkLst>
-            <pc:docMk/>
-            <pc:sldMk cId="1463477700" sldId="343"/>
-            <ac:picMk id="7" creationId="{7B72341F-F441-72AE-9830-3DCABFB2FC4E}"/>
-          </ac:picMkLst>
-        </pc:picChg>
-        <pc:picChg chg="add del mod">
-          <ac:chgData name="LEUNG Jacky" userId="S::jacky.leung@axa.com.hk::b9445fa1-303b-45da-98a2-a95317d67951" providerId="AD" clId="Web-{E5AD0A55-7EF5-F281-302B-BBF103462F04}" dt="2023-03-27T09:25:16.531" v="1919"/>
-          <ac:picMkLst>
-            <pc:docMk/>
-            <pc:sldMk cId="1463477700" sldId="343"/>
-            <ac:picMk id="8" creationId="{CB2814B9-53B2-DC91-EF9F-03D81A5C151D}"/>
-          </ac:picMkLst>
-        </pc:picChg>
-        <pc:picChg chg="add mod">
-          <ac:chgData name="LEUNG Jacky" userId="S::jacky.leung@axa.com.hk::b9445fa1-303b-45da-98a2-a95317d67951" providerId="AD" clId="Web-{E5AD0A55-7EF5-F281-302B-BBF103462F04}" dt="2023-03-27T09:25:32.391" v="1928" actId="1076"/>
-          <ac:picMkLst>
-            <pc:docMk/>
-            <pc:sldMk cId="1463477700" sldId="343"/>
-            <ac:picMk id="9" creationId="{EF2DF5B3-03EE-E7EF-822E-DFE4ED793F54}"/>
-          </ac:picMkLst>
-        </pc:picChg>
-      </pc:sldChg>
-      <pc:sldChg chg="add del replId">
-        <pc:chgData name="LEUNG Jacky" userId="S::jacky.leung@axa.com.hk::b9445fa1-303b-45da-98a2-a95317d67951" providerId="AD" clId="Web-{E5AD0A55-7EF5-F281-302B-BBF103462F04}" dt="2023-03-27T09:16:09.218" v="1752"/>
-        <pc:sldMkLst>
-          <pc:docMk/>
-          <pc:sldMk cId="1796422656" sldId="343"/>
-        </pc:sldMkLst>
-      </pc:sldChg>
-    </pc:docChg>
-  </pc:docChgLst>
-  <pc:docChgLst>
     <pc:chgData name="AU Kelvin" userId="416e5d84-3133-4774-aa1a-290e1bef47d6" providerId="ADAL" clId="{5B8966E4-3FDC-47B2-843B-7F15A992AB94}"/>
     <pc:docChg chg="undo redo custSel addSld delSld modSld sldOrd">
-      <pc:chgData name="AU Kelvin" userId="416e5d84-3133-4774-aa1a-290e1bef47d6" providerId="ADAL" clId="{5B8966E4-3FDC-47B2-843B-7F15A992AB94}" dt="2023-03-30T09:26:43.468" v="4373" actId="20577"/>
+      <pc:chgData name="AU Kelvin" userId="416e5d84-3133-4774-aa1a-290e1bef47d6" providerId="ADAL" clId="{5B8966E4-3FDC-47B2-843B-7F15A992AB94}" dt="2023-03-31T09:12:27.723" v="4464" actId="1589"/>
       <pc:docMkLst>
         <pc:docMk/>
       </pc:docMkLst>
       <pc:sldChg chg="addSp delSp modSp mod">
-        <pc:chgData name="AU Kelvin" userId="416e5d84-3133-4774-aa1a-290e1bef47d6" providerId="ADAL" clId="{5B8966E4-3FDC-47B2-843B-7F15A992AB94}" dt="2023-03-27T10:08:23.501" v="2013" actId="1076"/>
+        <pc:chgData name="AU Kelvin" userId="416e5d84-3133-4774-aa1a-290e1bef47d6" providerId="ADAL" clId="{5B8966E4-3FDC-47B2-843B-7F15A992AB94}" dt="2023-03-31T08:12:08.022" v="4418" actId="1076"/>
         <pc:sldMkLst>
           <pc:docMk/>
           <pc:sldMk cId="2799964493" sldId="259"/>
@@ -2611,6 +2831,22 @@
             <pc:docMk/>
             <pc:sldMk cId="2799964493" sldId="259"/>
             <ac:spMk id="27" creationId="{3C9A449B-EBF6-4F87-ADFC-FB96F0255276}"/>
+          </ac:spMkLst>
+        </pc:spChg>
+        <pc:spChg chg="add del mod">
+          <ac:chgData name="AU Kelvin" userId="416e5d84-3133-4774-aa1a-290e1bef47d6" providerId="ADAL" clId="{5B8966E4-3FDC-47B2-843B-7F15A992AB94}" dt="2023-03-31T08:12:05.649" v="4416" actId="478"/>
+          <ac:spMkLst>
+            <pc:docMk/>
+            <pc:sldMk cId="2799964493" sldId="259"/>
+            <ac:spMk id="28" creationId="{AD4F1EFD-1E32-4362-AE58-0E23B037AEEB}"/>
+          </ac:spMkLst>
+        </pc:spChg>
+        <pc:spChg chg="add mod">
+          <ac:chgData name="AU Kelvin" userId="416e5d84-3133-4774-aa1a-290e1bef47d6" providerId="ADAL" clId="{5B8966E4-3FDC-47B2-843B-7F15A992AB94}" dt="2023-03-31T08:12:08.022" v="4418" actId="1076"/>
+          <ac:spMkLst>
+            <pc:docMk/>
+            <pc:sldMk cId="2799964493" sldId="259"/>
+            <ac:spMk id="29" creationId="{3DEADE20-3EE5-48C1-9368-D3DD28BD3C54}"/>
           </ac:spMkLst>
         </pc:spChg>
         <pc:spChg chg="add mod">
@@ -2926,8 +3162,8 @@
           </ac:picMkLst>
         </pc:picChg>
       </pc:sldChg>
-      <pc:sldChg chg="modSp mod">
-        <pc:chgData name="AU Kelvin" userId="416e5d84-3133-4774-aa1a-290e1bef47d6" providerId="ADAL" clId="{5B8966E4-3FDC-47B2-843B-7F15A992AB94}" dt="2023-03-27T09:33:34.197" v="1976" actId="20577"/>
+      <pc:sldChg chg="addSp modSp mod">
+        <pc:chgData name="AU Kelvin" userId="416e5d84-3133-4774-aa1a-290e1bef47d6" providerId="ADAL" clId="{5B8966E4-3FDC-47B2-843B-7F15A992AB94}" dt="2023-03-31T08:12:13.197" v="4419"/>
         <pc:sldMkLst>
           <pc:docMk/>
           <pc:sldMk cId="1417494134" sldId="260"/>
@@ -2948,9 +3184,17 @@
             <ac:spMk id="8" creationId="{70BF0398-5C1E-4360-B93F-2D9A7183751A}"/>
           </ac:spMkLst>
         </pc:spChg>
+        <pc:spChg chg="add mod">
+          <ac:chgData name="AU Kelvin" userId="416e5d84-3133-4774-aa1a-290e1bef47d6" providerId="ADAL" clId="{5B8966E4-3FDC-47B2-843B-7F15A992AB94}" dt="2023-03-31T08:12:13.197" v="4419"/>
+          <ac:spMkLst>
+            <pc:docMk/>
+            <pc:sldMk cId="1417494134" sldId="260"/>
+            <ac:spMk id="9" creationId="{31771517-F980-4B2D-8B20-DB029E22C139}"/>
+          </ac:spMkLst>
+        </pc:spChg>
       </pc:sldChg>
-      <pc:sldChg chg="addSp delSp modSp mod">
-        <pc:chgData name="AU Kelvin" userId="416e5d84-3133-4774-aa1a-290e1bef47d6" providerId="ADAL" clId="{5B8966E4-3FDC-47B2-843B-7F15A992AB94}" dt="2023-03-27T07:54:11.081" v="1348" actId="20577"/>
+      <pc:sldChg chg="addSp delSp modSp mod addCm modCm">
+        <pc:chgData name="AU Kelvin" userId="416e5d84-3133-4774-aa1a-290e1bef47d6" providerId="ADAL" clId="{5B8966E4-3FDC-47B2-843B-7F15A992AB94}" dt="2023-03-31T09:06:50.369" v="4453"/>
         <pc:sldMkLst>
           <pc:docMk/>
           <pc:sldMk cId="3442902861" sldId="266"/>
@@ -2969,6 +3213,30 @@
             <pc:docMk/>
             <pc:sldMk cId="3442902861" sldId="266"/>
             <ac:spMk id="3" creationId="{0722FC5A-B29F-4C58-940E-4D925D707B51}"/>
+          </ac:spMkLst>
+        </pc:spChg>
+        <pc:spChg chg="add del mod">
+          <ac:chgData name="AU Kelvin" userId="416e5d84-3133-4774-aa1a-290e1bef47d6" providerId="ADAL" clId="{5B8966E4-3FDC-47B2-843B-7F15A992AB94}" dt="2023-03-31T08:12:38.953" v="4422" actId="478"/>
+          <ac:spMkLst>
+            <pc:docMk/>
+            <pc:sldMk cId="3442902861" sldId="266"/>
+            <ac:spMk id="8" creationId="{E7479829-383C-4D3D-8EB5-242394EAD334}"/>
+          </ac:spMkLst>
+        </pc:spChg>
+        <pc:spChg chg="add del mod">
+          <ac:chgData name="AU Kelvin" userId="416e5d84-3133-4774-aa1a-290e1bef47d6" providerId="ADAL" clId="{5B8966E4-3FDC-47B2-843B-7F15A992AB94}" dt="2023-03-31T08:12:48.037" v="4424"/>
+          <ac:spMkLst>
+            <pc:docMk/>
+            <pc:sldMk cId="3442902861" sldId="266"/>
+            <ac:spMk id="9" creationId="{B5ADBBCD-F9F2-4812-A400-AB50B758CE03}"/>
+          </ac:spMkLst>
+        </pc:spChg>
+        <pc:spChg chg="add mod">
+          <ac:chgData name="AU Kelvin" userId="416e5d84-3133-4774-aa1a-290e1bef47d6" providerId="ADAL" clId="{5B8966E4-3FDC-47B2-843B-7F15A992AB94}" dt="2023-03-31T08:12:48.044" v="4425"/>
+          <ac:spMkLst>
+            <pc:docMk/>
+            <pc:sldMk cId="3442902861" sldId="266"/>
+            <ac:spMk id="10" creationId="{C6E52774-DDAA-41EA-AFC0-061C480E2173}"/>
           </ac:spMkLst>
         </pc:spChg>
         <pc:spChg chg="mod">
@@ -3011,8 +3279,8 @@
           <pc:sldMk cId="281168202" sldId="267"/>
         </pc:sldMkLst>
       </pc:sldChg>
-      <pc:sldChg chg="modSp add mod">
-        <pc:chgData name="AU Kelvin" userId="416e5d84-3133-4774-aa1a-290e1bef47d6" providerId="ADAL" clId="{5B8966E4-3FDC-47B2-843B-7F15A992AB94}" dt="2023-03-27T06:13:56.833" v="418" actId="20577"/>
+      <pc:sldChg chg="addSp modSp add mod addCm modCm">
+        <pc:chgData name="AU Kelvin" userId="416e5d84-3133-4774-aa1a-290e1bef47d6" providerId="ADAL" clId="{5B8966E4-3FDC-47B2-843B-7F15A992AB94}" dt="2023-03-31T09:03:54.057" v="4451"/>
         <pc:sldMkLst>
           <pc:docMk/>
           <pc:sldMk cId="1727444638" sldId="272"/>
@@ -3025,9 +3293,17 @@
             <ac:spMk id="2" creationId="{E2599000-462A-47CF-923C-47F7496770B9}"/>
           </ac:spMkLst>
         </pc:spChg>
+        <pc:spChg chg="add mod">
+          <ac:chgData name="AU Kelvin" userId="416e5d84-3133-4774-aa1a-290e1bef47d6" providerId="ADAL" clId="{5B8966E4-3FDC-47B2-843B-7F15A992AB94}" dt="2023-03-31T08:07:18.434" v="4386" actId="20577"/>
+          <ac:spMkLst>
+            <pc:docMk/>
+            <pc:sldMk cId="1727444638" sldId="272"/>
+            <ac:spMk id="10" creationId="{B922F867-B1B0-4AB7-8E93-4C925139043B}"/>
+          </ac:spMkLst>
+        </pc:spChg>
       </pc:sldChg>
       <pc:sldChg chg="addSp delSp modSp add mod">
-        <pc:chgData name="AU Kelvin" userId="416e5d84-3133-4774-aa1a-290e1bef47d6" providerId="ADAL" clId="{5B8966E4-3FDC-47B2-843B-7F15A992AB94}" dt="2023-03-27T07:58:24.718" v="1374" actId="20577"/>
+        <pc:chgData name="AU Kelvin" userId="416e5d84-3133-4774-aa1a-290e1bef47d6" providerId="ADAL" clId="{5B8966E4-3FDC-47B2-843B-7F15A992AB94}" dt="2023-03-31T08:12:52.099" v="4428"/>
         <pc:sldMkLst>
           <pc:docMk/>
           <pc:sldMk cId="3042729915" sldId="273"/>
@@ -3049,11 +3325,27 @@
           </ac:spMkLst>
         </pc:spChg>
         <pc:spChg chg="add del mod">
+          <ac:chgData name="AU Kelvin" userId="416e5d84-3133-4774-aa1a-290e1bef47d6" providerId="ADAL" clId="{5B8966E4-3FDC-47B2-843B-7F15A992AB94}" dt="2023-03-31T08:12:52.094" v="4427"/>
+          <ac:spMkLst>
+            <pc:docMk/>
+            <pc:sldMk cId="3042729915" sldId="273"/>
+            <ac:spMk id="6" creationId="{1A0CE092-576A-40FA-8E99-EE24ADFF2E90}"/>
+          </ac:spMkLst>
+        </pc:spChg>
+        <pc:spChg chg="add del mod">
           <ac:chgData name="AU Kelvin" userId="416e5d84-3133-4774-aa1a-290e1bef47d6" providerId="ADAL" clId="{5B8966E4-3FDC-47B2-843B-7F15A992AB94}" dt="2023-03-27T07:57:29.096" v="1366" actId="478"/>
           <ac:spMkLst>
             <pc:docMk/>
             <pc:sldMk cId="3042729915" sldId="273"/>
             <ac:spMk id="6" creationId="{E02D2668-64B4-41CB-98C3-D86068DC010B}"/>
+          </ac:spMkLst>
+        </pc:spChg>
+        <pc:spChg chg="add mod">
+          <ac:chgData name="AU Kelvin" userId="416e5d84-3133-4774-aa1a-290e1bef47d6" providerId="ADAL" clId="{5B8966E4-3FDC-47B2-843B-7F15A992AB94}" dt="2023-03-31T08:12:52.099" v="4428"/>
+          <ac:spMkLst>
+            <pc:docMk/>
+            <pc:sldMk cId="3042729915" sldId="273"/>
+            <ac:spMk id="7" creationId="{E4FF92F3-99E0-4688-8D93-06887766D5C4}"/>
           </ac:spMkLst>
         </pc:spChg>
         <pc:spChg chg="mod">
@@ -3298,8 +3590,8 @@
           </ac:picMkLst>
         </pc:picChg>
       </pc:sldChg>
-      <pc:sldChg chg="addSp delSp modSp add mod setBg delDesignElem">
-        <pc:chgData name="AU Kelvin" userId="416e5d84-3133-4774-aa1a-290e1bef47d6" providerId="ADAL" clId="{5B8966E4-3FDC-47B2-843B-7F15A992AB94}" dt="2023-03-30T08:31:04.280" v="4372" actId="14100"/>
+      <pc:sldChg chg="addSp delSp modSp add mod setBg delDesignElem addCm">
+        <pc:chgData name="AU Kelvin" userId="416e5d84-3133-4774-aa1a-290e1bef47d6" providerId="ADAL" clId="{5B8966E4-3FDC-47B2-843B-7F15A992AB94}" dt="2023-03-31T09:12:27.723" v="4464" actId="1589"/>
         <pc:sldMkLst>
           <pc:docMk/>
           <pc:sldMk cId="851749145" sldId="297"/>
@@ -3326,6 +3618,22 @@
             <pc:docMk/>
             <pc:sldMk cId="851749145" sldId="297"/>
             <ac:spMk id="8" creationId="{395C8B0D-F320-4712-8E7C-2568E54F3793}"/>
+          </ac:spMkLst>
+        </pc:spChg>
+        <pc:spChg chg="add del mod">
+          <ac:chgData name="AU Kelvin" userId="416e5d84-3133-4774-aa1a-290e1bef47d6" providerId="ADAL" clId="{5B8966E4-3FDC-47B2-843B-7F15A992AB94}" dt="2023-03-31T08:13:08.760" v="4442"/>
+          <ac:spMkLst>
+            <pc:docMk/>
+            <pc:sldMk cId="851749145" sldId="297"/>
+            <ac:spMk id="11" creationId="{A475293C-AF1B-418E-8C75-1681F37E03CB}"/>
+          </ac:spMkLst>
+        </pc:spChg>
+        <pc:spChg chg="add mod">
+          <ac:chgData name="AU Kelvin" userId="416e5d84-3133-4774-aa1a-290e1bef47d6" providerId="ADAL" clId="{5B8966E4-3FDC-47B2-843B-7F15A992AB94}" dt="2023-03-31T08:13:08.765" v="4443"/>
+          <ac:spMkLst>
+            <pc:docMk/>
+            <pc:sldMk cId="851749145" sldId="297"/>
+            <ac:spMk id="12" creationId="{55877094-9CED-4ED5-B89E-8AAE34ACAD13}"/>
           </ac:spMkLst>
         </pc:spChg>
         <pc:spChg chg="del">
@@ -3391,8 +3699,8 @@
           <pc:sldMk cId="2947753765" sldId="337"/>
         </pc:sldMkLst>
       </pc:sldChg>
-      <pc:sldChg chg="addSp delSp modSp add mod">
-        <pc:chgData name="AU Kelvin" userId="416e5d84-3133-4774-aa1a-290e1bef47d6" providerId="ADAL" clId="{5B8966E4-3FDC-47B2-843B-7F15A992AB94}" dt="2023-03-27T09:19:17.330" v="1567" actId="732"/>
+      <pc:sldChg chg="addSp delSp modSp add mod addCm modCm">
+        <pc:chgData name="AU Kelvin" userId="416e5d84-3133-4774-aa1a-290e1bef47d6" providerId="ADAL" clId="{5B8966E4-3FDC-47B2-843B-7F15A992AB94}" dt="2023-03-31T09:10:49.673" v="4461"/>
         <pc:sldMkLst>
           <pc:docMk/>
           <pc:sldMk cId="2352445319" sldId="340"/>
@@ -3403,6 +3711,22 @@
             <pc:docMk/>
             <pc:sldMk cId="2352445319" sldId="340"/>
             <ac:spMk id="4" creationId="{D8A4C36E-E243-4793-B4C8-AB6CB9E10F72}"/>
+          </ac:spMkLst>
+        </pc:spChg>
+        <pc:spChg chg="add del mod">
+          <ac:chgData name="AU Kelvin" userId="416e5d84-3133-4774-aa1a-290e1bef47d6" providerId="ADAL" clId="{5B8966E4-3FDC-47B2-843B-7F15A992AB94}" dt="2023-03-31T08:12:55.454" v="4430"/>
+          <ac:spMkLst>
+            <pc:docMk/>
+            <pc:sldMk cId="2352445319" sldId="340"/>
+            <ac:spMk id="7" creationId="{5A58A92E-CBD6-4090-947D-785792521115}"/>
+          </ac:spMkLst>
+        </pc:spChg>
+        <pc:spChg chg="add mod">
+          <ac:chgData name="AU Kelvin" userId="416e5d84-3133-4774-aa1a-290e1bef47d6" providerId="ADAL" clId="{5B8966E4-3FDC-47B2-843B-7F15A992AB94}" dt="2023-03-31T08:12:55.461" v="4431"/>
+          <ac:spMkLst>
+            <pc:docMk/>
+            <pc:sldMk cId="2352445319" sldId="340"/>
+            <ac:spMk id="9" creationId="{9924D629-8787-4DB2-94E7-2A4D90307541}"/>
           </ac:spMkLst>
         </pc:spChg>
         <pc:spChg chg="mod">
@@ -3454,12 +3778,28 @@
           </ac:picMkLst>
         </pc:picChg>
       </pc:sldChg>
-      <pc:sldChg chg="addSp delSp modSp add mod">
-        <pc:chgData name="AU Kelvin" userId="416e5d84-3133-4774-aa1a-290e1bef47d6" providerId="ADAL" clId="{5B8966E4-3FDC-47B2-843B-7F15A992AB94}" dt="2023-03-27T09:24:11.888" v="1621" actId="1076"/>
+      <pc:sldChg chg="addSp delSp modSp add mod addCm modCm">
+        <pc:chgData name="AU Kelvin" userId="416e5d84-3133-4774-aa1a-290e1bef47d6" providerId="ADAL" clId="{5B8966E4-3FDC-47B2-843B-7F15A992AB94}" dt="2023-03-31T09:07:48.039" v="4457"/>
         <pc:sldMkLst>
           <pc:docMk/>
           <pc:sldMk cId="1332715669" sldId="341"/>
         </pc:sldMkLst>
+        <pc:spChg chg="add del mod">
+          <ac:chgData name="AU Kelvin" userId="416e5d84-3133-4774-aa1a-290e1bef47d6" providerId="ADAL" clId="{5B8966E4-3FDC-47B2-843B-7F15A992AB94}" dt="2023-03-31T08:12:58.688" v="4433"/>
+          <ac:spMkLst>
+            <pc:docMk/>
+            <pc:sldMk cId="1332715669" sldId="341"/>
+            <ac:spMk id="14" creationId="{94537F31-63EE-4032-A2AA-132681CD608C}"/>
+          </ac:spMkLst>
+        </pc:spChg>
+        <pc:spChg chg="add mod">
+          <ac:chgData name="AU Kelvin" userId="416e5d84-3133-4774-aa1a-290e1bef47d6" providerId="ADAL" clId="{5B8966E4-3FDC-47B2-843B-7F15A992AB94}" dt="2023-03-31T08:12:58.694" v="4434"/>
+          <ac:spMkLst>
+            <pc:docMk/>
+            <pc:sldMk cId="1332715669" sldId="341"/>
+            <ac:spMk id="15" creationId="{1B955732-546C-42D8-9B07-C11D822122D4}"/>
+          </ac:spMkLst>
+        </pc:spChg>
         <pc:spChg chg="del mod">
           <ac:chgData name="AU Kelvin" userId="416e5d84-3133-4774-aa1a-290e1bef47d6" providerId="ADAL" clId="{5B8966E4-3FDC-47B2-843B-7F15A992AB94}" dt="2023-03-27T09:23:19.108" v="1602" actId="478"/>
           <ac:spMkLst>
@@ -3652,18 +3992,34 @@
           <pc:sldMk cId="3702213180" sldId="344"/>
         </pc:sldMkLst>
       </pc:sldChg>
-      <pc:sldChg chg="addSp delSp modSp add mod">
-        <pc:chgData name="AU Kelvin" userId="416e5d84-3133-4774-aa1a-290e1bef47d6" providerId="ADAL" clId="{5B8966E4-3FDC-47B2-843B-7F15A992AB94}" dt="2023-03-27T09:31:39.067" v="1954" actId="20577"/>
+      <pc:sldChg chg="addSp delSp modSp add mod addCm modCm">
+        <pc:chgData name="AU Kelvin" userId="416e5d84-3133-4774-aa1a-290e1bef47d6" providerId="ADAL" clId="{5B8966E4-3FDC-47B2-843B-7F15A992AB94}" dt="2023-03-31T09:11:22.001" v="4463"/>
         <pc:sldMkLst>
           <pc:docMk/>
           <pc:sldMk cId="3817614916" sldId="344"/>
         </pc:sldMkLst>
+        <pc:spChg chg="add del mod">
+          <ac:chgData name="AU Kelvin" userId="416e5d84-3133-4774-aa1a-290e1bef47d6" providerId="ADAL" clId="{5B8966E4-3FDC-47B2-843B-7F15A992AB94}" dt="2023-03-31T08:13:06.347" v="4439"/>
+          <ac:spMkLst>
+            <pc:docMk/>
+            <pc:sldMk cId="3817614916" sldId="344"/>
+            <ac:spMk id="5" creationId="{8A354AEA-8C64-4083-B7DA-E261AF515B07}"/>
+          </ac:spMkLst>
+        </pc:spChg>
         <pc:spChg chg="add mod">
           <ac:chgData name="AU Kelvin" userId="416e5d84-3133-4774-aa1a-290e1bef47d6" providerId="ADAL" clId="{5B8966E4-3FDC-47B2-843B-7F15A992AB94}" dt="2023-03-27T09:28:34.787" v="1669"/>
           <ac:spMkLst>
             <pc:docMk/>
             <pc:sldMk cId="3817614916" sldId="344"/>
             <ac:spMk id="6" creationId="{D2FE89D0-582C-4733-A2D3-5202D504AD6D}"/>
+          </ac:spMkLst>
+        </pc:spChg>
+        <pc:spChg chg="add mod">
+          <ac:chgData name="AU Kelvin" userId="416e5d84-3133-4774-aa1a-290e1bef47d6" providerId="ADAL" clId="{5B8966E4-3FDC-47B2-843B-7F15A992AB94}" dt="2023-03-31T08:13:06.352" v="4440"/>
+          <ac:spMkLst>
+            <pc:docMk/>
+            <pc:sldMk cId="3817614916" sldId="344"/>
+            <ac:spMk id="8" creationId="{12F9C9F2-F2CC-483C-9EFB-757A9E7B9968}"/>
           </ac:spMkLst>
         </pc:spChg>
         <pc:spChg chg="del">
@@ -3706,8 +4062,54 @@
           <pc:sldMk cId="3613470785" sldId="345"/>
         </pc:sldMkLst>
       </pc:sldChg>
-      <pc:sldChg chg="addSp delSp modSp new mod">
-        <pc:chgData name="AU Kelvin" userId="416e5d84-3133-4774-aa1a-290e1bef47d6" providerId="ADAL" clId="{5B8966E4-3FDC-47B2-843B-7F15A992AB94}" dt="2023-03-29T18:02:47.873" v="4120" actId="20577"/>
+      <pc:sldChg chg="addSp delSp modSp">
+        <pc:chgData name="AU Kelvin" userId="416e5d84-3133-4774-aa1a-290e1bef47d6" providerId="ADAL" clId="{5B8966E4-3FDC-47B2-843B-7F15A992AB94}" dt="2023-03-31T08:13:15.997" v="4449"/>
+        <pc:sldMkLst>
+          <pc:docMk/>
+          <pc:sldMk cId="2429607499" sldId="347"/>
+        </pc:sldMkLst>
+        <pc:spChg chg="add del mod">
+          <ac:chgData name="AU Kelvin" userId="416e5d84-3133-4774-aa1a-290e1bef47d6" providerId="ADAL" clId="{5B8966E4-3FDC-47B2-843B-7F15A992AB94}" dt="2023-03-31T08:13:15.992" v="4448"/>
+          <ac:spMkLst>
+            <pc:docMk/>
+            <pc:sldMk cId="2429607499" sldId="347"/>
+            <ac:spMk id="7" creationId="{991FB098-5D34-4327-9C18-25908BDFD7CB}"/>
+          </ac:spMkLst>
+        </pc:spChg>
+        <pc:spChg chg="add mod">
+          <ac:chgData name="AU Kelvin" userId="416e5d84-3133-4774-aa1a-290e1bef47d6" providerId="ADAL" clId="{5B8966E4-3FDC-47B2-843B-7F15A992AB94}" dt="2023-03-31T08:13:15.997" v="4449"/>
+          <ac:spMkLst>
+            <pc:docMk/>
+            <pc:sldMk cId="2429607499" sldId="347"/>
+            <ac:spMk id="10" creationId="{3D85BB39-9912-4D97-B693-EB25A8CA7EA7}"/>
+          </ac:spMkLst>
+        </pc:spChg>
+      </pc:sldChg>
+      <pc:sldChg chg="addSp delSp modSp addCm modCm">
+        <pc:chgData name="AU Kelvin" userId="416e5d84-3133-4774-aa1a-290e1bef47d6" providerId="ADAL" clId="{5B8966E4-3FDC-47B2-843B-7F15A992AB94}" dt="2023-03-31T09:09:30.800" v="4459"/>
+        <pc:sldMkLst>
+          <pc:docMk/>
+          <pc:sldMk cId="2823189888" sldId="348"/>
+        </pc:sldMkLst>
+        <pc:spChg chg="add del mod">
+          <ac:chgData name="AU Kelvin" userId="416e5d84-3133-4774-aa1a-290e1bef47d6" providerId="ADAL" clId="{5B8966E4-3FDC-47B2-843B-7F15A992AB94}" dt="2023-03-31T08:13:01.911" v="4436"/>
+          <ac:spMkLst>
+            <pc:docMk/>
+            <pc:sldMk cId="2823189888" sldId="348"/>
+            <ac:spMk id="5" creationId="{341A4332-9AF7-4CED-AC62-5F0570651313}"/>
+          </ac:spMkLst>
+        </pc:spChg>
+        <pc:spChg chg="add mod">
+          <ac:chgData name="AU Kelvin" userId="416e5d84-3133-4774-aa1a-290e1bef47d6" providerId="ADAL" clId="{5B8966E4-3FDC-47B2-843B-7F15A992AB94}" dt="2023-03-31T08:13:01.916" v="4437"/>
+          <ac:spMkLst>
+            <pc:docMk/>
+            <pc:sldMk cId="2823189888" sldId="348"/>
+            <ac:spMk id="6" creationId="{AC5BC3F1-1B20-4EEA-A938-05AC93927302}"/>
+          </ac:spMkLst>
+        </pc:spChg>
+      </pc:sldChg>
+      <pc:sldChg chg="addSp delSp modSp new mod addCm modCm">
+        <pc:chgData name="AU Kelvin" userId="416e5d84-3133-4774-aa1a-290e1bef47d6" providerId="ADAL" clId="{5B8966E4-3FDC-47B2-843B-7F15A992AB94}" dt="2023-03-31T08:11:53.553" v="4415"/>
         <pc:sldMkLst>
           <pc:docMk/>
           <pc:sldMk cId="2962584605" sldId="354"/>
@@ -3750,6 +4152,14 @@
             <pc:docMk/>
             <pc:sldMk cId="2962584605" sldId="354"/>
             <ac:spMk id="11" creationId="{6DCA788F-16D5-4BB3-88C1-737883722938}"/>
+          </ac:spMkLst>
+        </pc:spChg>
+        <pc:spChg chg="add mod">
+          <ac:chgData name="AU Kelvin" userId="416e5d84-3133-4774-aa1a-290e1bef47d6" providerId="ADAL" clId="{5B8966E4-3FDC-47B2-843B-7F15A992AB94}" dt="2023-03-31T08:10:13.971" v="4404" actId="1076"/>
+          <ac:spMkLst>
+            <pc:docMk/>
+            <pc:sldMk cId="2962584605" sldId="354"/>
+            <ac:spMk id="12" creationId="{833F5CFE-E980-483A-95EB-1535E7C0CF9F}"/>
           </ac:spMkLst>
         </pc:spChg>
         <pc:spChg chg="add del mod">
@@ -3817,8 +4227,8 @@
           </ac:cxnSpMkLst>
         </pc:cxnChg>
       </pc:sldChg>
-      <pc:sldChg chg="addSp delSp modSp add mod ord">
-        <pc:chgData name="AU Kelvin" userId="416e5d84-3133-4774-aa1a-290e1bef47d6" providerId="ADAL" clId="{5B8966E4-3FDC-47B2-843B-7F15A992AB94}" dt="2023-03-30T02:47:27.295" v="4235" actId="403"/>
+      <pc:sldChg chg="addSp delSp modSp add mod ord addCm modCm">
+        <pc:chgData name="AU Kelvin" userId="416e5d84-3133-4774-aa1a-290e1bef47d6" providerId="ADAL" clId="{5B8966E4-3FDC-47B2-843B-7F15A992AB94}" dt="2023-03-31T08:11:48.381" v="4414"/>
         <pc:sldMkLst>
           <pc:docMk/>
           <pc:sldMk cId="3383283417" sldId="355"/>
@@ -3863,6 +4273,14 @@
             <ac:spMk id="9" creationId="{95DF8DD2-5838-4A0F-8913-893E290AF6DB}"/>
           </ac:spMkLst>
         </pc:spChg>
+        <pc:spChg chg="add mod">
+          <ac:chgData name="AU Kelvin" userId="416e5d84-3133-4774-aa1a-290e1bef47d6" providerId="ADAL" clId="{5B8966E4-3FDC-47B2-843B-7F15A992AB94}" dt="2023-03-31T08:10:20.270" v="4406" actId="1076"/>
+          <ac:spMkLst>
+            <pc:docMk/>
+            <pc:sldMk cId="3383283417" sldId="355"/>
+            <ac:spMk id="10" creationId="{3F0B958F-C69F-418B-9C72-AD52677AEF9E}"/>
+          </ac:spMkLst>
+        </pc:spChg>
         <pc:graphicFrameChg chg="add mod ord modGraphic">
           <ac:chgData name="AU Kelvin" userId="416e5d84-3133-4774-aa1a-290e1bef47d6" providerId="ADAL" clId="{5B8966E4-3FDC-47B2-843B-7F15A992AB94}" dt="2023-03-30T02:47:27.295" v="4235" actId="403"/>
           <ac:graphicFrameMkLst>
@@ -3872,8 +4290,8 @@
           </ac:graphicFrameMkLst>
         </pc:graphicFrameChg>
       </pc:sldChg>
-      <pc:sldChg chg="addSp delSp modSp add mod">
-        <pc:chgData name="AU Kelvin" userId="416e5d84-3133-4774-aa1a-290e1bef47d6" providerId="ADAL" clId="{5B8966E4-3FDC-47B2-843B-7F15A992AB94}" dt="2023-03-30T03:03:06.583" v="4262" actId="20577"/>
+      <pc:sldChg chg="addSp delSp modSp add mod addCm modCm">
+        <pc:chgData name="AU Kelvin" userId="416e5d84-3133-4774-aa1a-290e1bef47d6" providerId="ADAL" clId="{5B8966E4-3FDC-47B2-843B-7F15A992AB94}" dt="2023-03-31T08:11:15.850" v="4408"/>
         <pc:sldMkLst>
           <pc:docMk/>
           <pc:sldMk cId="871361999" sldId="361"/>
@@ -3894,6 +4312,22 @@
             <ac:spMk id="4" creationId="{A6BE2058-C259-4422-B897-530842E26774}"/>
           </ac:spMkLst>
         </pc:spChg>
+        <pc:spChg chg="add del mod">
+          <ac:chgData name="AU Kelvin" userId="416e5d84-3133-4774-aa1a-290e1bef47d6" providerId="ADAL" clId="{5B8966E4-3FDC-47B2-843B-7F15A992AB94}" dt="2023-03-31T08:09:59.706" v="4395" actId="478"/>
+          <ac:spMkLst>
+            <pc:docMk/>
+            <pc:sldMk cId="871361999" sldId="361"/>
+            <ac:spMk id="8" creationId="{2C919D69-71A7-4D01-8D32-A62AEDEBBE50}"/>
+          </ac:spMkLst>
+        </pc:spChg>
+        <pc:spChg chg="add mod">
+          <ac:chgData name="AU Kelvin" userId="416e5d84-3133-4774-aa1a-290e1bef47d6" providerId="ADAL" clId="{5B8966E4-3FDC-47B2-843B-7F15A992AB94}" dt="2023-03-31T08:10:02.265" v="4401" actId="20577"/>
+          <ac:spMkLst>
+            <pc:docMk/>
+            <pc:sldMk cId="871361999" sldId="361"/>
+            <ac:spMk id="10" creationId="{D0443FC2-2F5B-4885-ABAA-138664DBDBE9}"/>
+          </ac:spMkLst>
+        </pc:spChg>
         <pc:picChg chg="add mod ord">
           <ac:chgData name="AU Kelvin" userId="416e5d84-3133-4774-aa1a-290e1bef47d6" providerId="ADAL" clId="{5B8966E4-3FDC-47B2-843B-7F15A992AB94}" dt="2023-03-30T02:21:07.392" v="4167" actId="22"/>
           <ac:picMkLst>
@@ -3910,8 +4344,8 @@
           <pc:sldMk cId="1158951002" sldId="361"/>
         </pc:sldMkLst>
       </pc:sldChg>
-      <pc:sldChg chg="addSp delSp modSp add mod">
-        <pc:chgData name="AU Kelvin" userId="416e5d84-3133-4774-aa1a-290e1bef47d6" providerId="ADAL" clId="{5B8966E4-3FDC-47B2-843B-7F15A992AB94}" dt="2023-03-30T03:43:20.218" v="4311" actId="14100"/>
+      <pc:sldChg chg="addSp delSp modSp add mod addCm modCm">
+        <pc:chgData name="AU Kelvin" userId="416e5d84-3133-4774-aa1a-290e1bef47d6" providerId="ADAL" clId="{5B8966E4-3FDC-47B2-843B-7F15A992AB94}" dt="2023-03-31T08:11:21.444" v="4410"/>
         <pc:sldMkLst>
           <pc:docMk/>
           <pc:sldMk cId="3863319356" sldId="362"/>
@@ -3925,7 +4359,7 @@
           </ac:spMkLst>
         </pc:spChg>
         <pc:spChg chg="mod">
-          <ac:chgData name="AU Kelvin" userId="416e5d84-3133-4774-aa1a-290e1bef47d6" providerId="ADAL" clId="{5B8966E4-3FDC-47B2-843B-7F15A992AB94}" dt="2023-03-30T03:30:30.661" v="4283" actId="20577"/>
+          <ac:chgData name="AU Kelvin" userId="416e5d84-3133-4774-aa1a-290e1bef47d6" providerId="ADAL" clId="{5B8966E4-3FDC-47B2-843B-7F15A992AB94}" dt="2023-03-31T08:10:06.549" v="4402"/>
           <ac:spMkLst>
             <pc:docMk/>
             <pc:sldMk cId="3863319356" sldId="362"/>
@@ -4006,7 +4440,7 @@
         </pc:picChg>
       </pc:sldChg>
       <pc:sldChg chg="addSp delSp modSp add mod">
-        <pc:chgData name="AU Kelvin" userId="416e5d84-3133-4774-aa1a-290e1bef47d6" providerId="ADAL" clId="{5B8966E4-3FDC-47B2-843B-7F15A992AB94}" dt="2023-03-30T09:26:43.468" v="4373" actId="20577"/>
+        <pc:chgData name="AU Kelvin" userId="416e5d84-3133-4774-aa1a-290e1bef47d6" providerId="ADAL" clId="{5B8966E4-3FDC-47B2-843B-7F15A992AB94}" dt="2023-03-31T08:13:11.307" v="4446"/>
         <pc:sldMkLst>
           <pc:docMk/>
           <pc:sldMk cId="528976787" sldId="363"/>
@@ -4035,12 +4469,28 @@
             <ac:spMk id="9" creationId="{C523F280-E15A-499D-AA02-2E7FBDC370EB}"/>
           </ac:spMkLst>
         </pc:spChg>
+        <pc:spChg chg="add del mod">
+          <ac:chgData name="AU Kelvin" userId="416e5d84-3133-4774-aa1a-290e1bef47d6" providerId="ADAL" clId="{5B8966E4-3FDC-47B2-843B-7F15A992AB94}" dt="2023-03-31T08:13:11.302" v="4445"/>
+          <ac:spMkLst>
+            <pc:docMk/>
+            <pc:sldMk cId="528976787" sldId="363"/>
+            <ac:spMk id="10" creationId="{D5A755C3-4951-416C-BC5C-DCA7E856616F}"/>
+          </ac:spMkLst>
+        </pc:spChg>
         <pc:spChg chg="add mod">
           <ac:chgData name="AU Kelvin" userId="416e5d84-3133-4774-aa1a-290e1bef47d6" providerId="ADAL" clId="{5B8966E4-3FDC-47B2-843B-7F15A992AB94}" dt="2023-03-30T08:28:34.795" v="4355" actId="1076"/>
           <ac:spMkLst>
             <pc:docMk/>
             <pc:sldMk cId="528976787" sldId="363"/>
             <ac:spMk id="11" creationId="{5E939A62-007F-4338-A441-D3C51E6581B0}"/>
+          </ac:spMkLst>
+        </pc:spChg>
+        <pc:spChg chg="add mod">
+          <ac:chgData name="AU Kelvin" userId="416e5d84-3133-4774-aa1a-290e1bef47d6" providerId="ADAL" clId="{5B8966E4-3FDC-47B2-843B-7F15A992AB94}" dt="2023-03-31T08:13:11.307" v="4446"/>
+          <ac:spMkLst>
+            <pc:docMk/>
+            <pc:sldMk cId="528976787" sldId="363"/>
+            <ac:spMk id="12" creationId="{5F65068F-2936-43FD-9F1A-0CBD6D2437EB}"/>
           </ac:spMkLst>
         </pc:spChg>
         <pc:picChg chg="add mod modCrop">
@@ -5484,49 +5934,7 @@
 </p:cmLst>
 </file>
 
-<file path=ppt/comments/comment2.xml><?xml version="1.0" encoding="utf-8"?>
-<p:cmLst xmlns:a="http://schemas.openxmlformats.org/drawingml/2006/main" xmlns:r="http://schemas.openxmlformats.org/officeDocument/2006/relationships" xmlns:p="http://schemas.openxmlformats.org/presentationml/2006/main">
-  <p:cm authorId="1" dt="2023-03-24T18:04:36.064" idx="1">
-    <p:pos x="7087" y="153"/>
-    <p:text>Make it quarterly too in another slide</p:text>
-    <p:extLst>
-      <p:ext uri="{C676402C-5697-4E1C-873F-D02D1690AC5C}">
-        <p15:threadingInfo xmlns:p15="http://schemas.microsoft.com/office/powerpoint/2012/main" timeZoneBias="-480"/>
-      </p:ext>
-    </p:extLst>
-  </p:cm>
-</p:cmLst>
-</file>
-
-<file path=ppt/comments/comment3.xml><?xml version="1.0" encoding="utf-8"?>
-<p:cmLst xmlns:a="http://schemas.openxmlformats.org/drawingml/2006/main" xmlns:r="http://schemas.openxmlformats.org/officeDocument/2006/relationships" xmlns:p="http://schemas.openxmlformats.org/presentationml/2006/main">
-  <p:cm authorId="2" dt="2023-03-27T11:39:12.888" idx="1">
-    <p:pos x="10" y="10"/>
-    <p:text>Add stacked % bar</p:text>
-    <p:extLst>
-      <p:ext uri="{C676402C-5697-4E1C-873F-D02D1690AC5C}">
-        <p15:threadingInfo xmlns:p15="http://schemas.microsoft.com/office/powerpoint/2012/main" timeZoneBias="-480"/>
-      </p:ext>
-    </p:extLst>
-  </p:cm>
-</p:cmLst>
-</file>
-
-<file path=ppt/comments/comment4.xml><?xml version="1.0" encoding="utf-8"?>
-<p:cmLst xmlns:a="http://schemas.openxmlformats.org/drawingml/2006/main" xmlns:r="http://schemas.openxmlformats.org/officeDocument/2006/relationships" xmlns:p="http://schemas.openxmlformats.org/presentationml/2006/main">
-  <p:cm authorId="2" dt="2023-03-27T11:39:12.888" idx="2">
-    <p:pos x="10" y="10"/>
-    <p:text>Add stacked % bar</p:text>
-    <p:extLst>
-      <p:ext uri="{C676402C-5697-4E1C-873F-D02D1690AC5C}">
-        <p15:threadingInfo xmlns:p15="http://schemas.microsoft.com/office/powerpoint/2012/main" timeZoneBias="-480"/>
-      </p:ext>
-    </p:extLst>
-  </p:cm>
-</p:cmLst>
-</file>
-
-<file path=ppt/comments/comment5.xml><?xml version="1.0" encoding="utf-8"?>
+<file path=ppt/comments/comment10.xml><?xml version="1.0" encoding="utf-8"?>
 <p:cmLst xmlns:a="http://schemas.openxmlformats.org/drawingml/2006/main" xmlns:r="http://schemas.openxmlformats.org/officeDocument/2006/relationships" xmlns:p="http://schemas.openxmlformats.org/presentationml/2006/main">
   <p:cm authorId="3" dt="2023-03-29T19:59:15.843" idx="1">
     <p:pos x="5702" y="740"/>
@@ -5547,6 +5955,201 @@
         <p15:threadingInfo xmlns:p15="http://schemas.microsoft.com/office/powerpoint/2012/main" timeZoneBias="420">
           <p15:parentCm authorId="3" idx="1"/>
         </p15:threadingInfo>
+      </p:ext>
+    </p:extLst>
+  </p:cm>
+</p:cmLst>
+</file>
+
+<file path=ppt/comments/comment11.xml><?xml version="1.0" encoding="utf-8"?>
+<p:cmLst xmlns:a="http://schemas.openxmlformats.org/drawingml/2006/main" xmlns:r="http://schemas.openxmlformats.org/officeDocument/2006/relationships" xmlns:p="http://schemas.openxmlformats.org/presentationml/2006/main">
+  <p:cm authorId="2" dt="2023-03-31T16:11:00.901" idx="3">
+    <p:pos x="10" y="10"/>
+    <p:text>need to add other L&amp;H channels as well</p:text>
+    <p:extLst>
+      <p:ext uri="{C676402C-5697-4E1C-873F-D02D1690AC5C}">
+        <p15:threadingInfo xmlns:p15="http://schemas.microsoft.com/office/powerpoint/2012/main" timeZoneBias="-480"/>
+      </p:ext>
+    </p:extLst>
+  </p:cm>
+</p:cmLst>
+</file>
+
+<file path=ppt/comments/comment12.xml><?xml version="1.0" encoding="utf-8"?>
+<p:cmLst xmlns:a="http://schemas.openxmlformats.org/drawingml/2006/main" xmlns:r="http://schemas.openxmlformats.org/officeDocument/2006/relationships" xmlns:p="http://schemas.openxmlformats.org/presentationml/2006/main">
+  <p:cm authorId="2" dt="2023-03-31T16:11:19.695" idx="4">
+    <p:pos x="10" y="10"/>
+    <p:text>need to add other L&amp;H channels as well</p:text>
+    <p:extLst>
+      <p:ext uri="{C676402C-5697-4E1C-873F-D02D1690AC5C}">
+        <p15:threadingInfo xmlns:p15="http://schemas.microsoft.com/office/powerpoint/2012/main" timeZoneBias="-480"/>
+      </p:ext>
+    </p:extLst>
+  </p:cm>
+</p:cmLst>
+</file>
+
+<file path=ppt/comments/comment13.xml><?xml version="1.0" encoding="utf-8"?>
+<p:cmLst xmlns:a="http://schemas.openxmlformats.org/drawingml/2006/main" xmlns:r="http://schemas.openxmlformats.org/officeDocument/2006/relationships" xmlns:p="http://schemas.openxmlformats.org/presentationml/2006/main">
+  <p:cm authorId="2" dt="2023-03-31T16:11:40.704" idx="5">
+    <p:pos x="10" y="10"/>
+    <p:text>need to add other L&amp;H channels as well?</p:text>
+    <p:extLst>
+      <p:ext uri="{C676402C-5697-4E1C-873F-D02D1690AC5C}">
+        <p15:threadingInfo xmlns:p15="http://schemas.microsoft.com/office/powerpoint/2012/main" timeZoneBias="-480"/>
+      </p:ext>
+    </p:extLst>
+  </p:cm>
+</p:cmLst>
+</file>
+
+<file path=ppt/comments/comment14.xml><?xml version="1.0" encoding="utf-8"?>
+<p:cmLst xmlns:a="http://schemas.openxmlformats.org/drawingml/2006/main" xmlns:r="http://schemas.openxmlformats.org/officeDocument/2006/relationships" xmlns:p="http://schemas.openxmlformats.org/presentationml/2006/main">
+  <p:cm authorId="2" dt="2023-03-31T16:11:45.856" idx="6">
+    <p:pos x="10" y="10"/>
+    <p:text>need to add other L&amp;H channels as well?</p:text>
+    <p:extLst>
+      <p:ext uri="{C676402C-5697-4E1C-873F-D02D1690AC5C}">
+        <p15:threadingInfo xmlns:p15="http://schemas.microsoft.com/office/powerpoint/2012/main" timeZoneBias="-480"/>
+      </p:ext>
+    </p:extLst>
+  </p:cm>
+</p:cmLst>
+</file>
+
+<file path=ppt/comments/comment2.xml><?xml version="1.0" encoding="utf-8"?>
+<p:cmLst xmlns:a="http://schemas.openxmlformats.org/drawingml/2006/main" xmlns:r="http://schemas.openxmlformats.org/officeDocument/2006/relationships" xmlns:p="http://schemas.openxmlformats.org/presentationml/2006/main">
+  <p:cm authorId="2" dt="2023-03-31T17:03:47.614" idx="7">
+    <p:pos x="10" y="10"/>
+    <p:text>add gender stats</p:text>
+    <p:extLst>
+      <p:ext uri="{C676402C-5697-4E1C-873F-D02D1690AC5C}">
+        <p15:threadingInfo xmlns:p15="http://schemas.microsoft.com/office/powerpoint/2012/main" timeZoneBias="-480"/>
+      </p:ext>
+    </p:extLst>
+  </p:cm>
+</p:cmLst>
+</file>
+
+<file path=ppt/comments/comment3.xml><?xml version="1.0" encoding="utf-8"?>
+<p:cmLst xmlns:a="http://schemas.openxmlformats.org/drawingml/2006/main" xmlns:r="http://schemas.openxmlformats.org/officeDocument/2006/relationships" xmlns:p="http://schemas.openxmlformats.org/presentationml/2006/main">
+  <p:cm authorId="1" dt="2023-03-24T18:04:36.064" idx="1">
+    <p:pos x="7087" y="153"/>
+    <p:text>Make it quarterly too in another slide</p:text>
+    <p:extLst>
+      <p:ext uri="{C676402C-5697-4E1C-873F-D02D1690AC5C}">
+        <p15:threadingInfo xmlns:p15="http://schemas.microsoft.com/office/powerpoint/2012/main" timeZoneBias="-480"/>
+      </p:ext>
+    </p:extLst>
+  </p:cm>
+  <p:cm authorId="2" dt="2023-03-31T17:06:23.335" idx="8">
+    <p:pos x="10" y="10"/>
+    <p:text>delete this slide and only keep the quarterly one</p:text>
+    <p:extLst>
+      <p:ext uri="{C676402C-5697-4E1C-873F-D02D1690AC5C}">
+        <p15:threadingInfo xmlns:p15="http://schemas.microsoft.com/office/powerpoint/2012/main" timeZoneBias="-480"/>
+      </p:ext>
+    </p:extLst>
+  </p:cm>
+</p:cmLst>
+</file>
+
+<file path=ppt/comments/comment4.xml><?xml version="1.0" encoding="utf-8"?>
+<p:cmLst xmlns:a="http://schemas.openxmlformats.org/drawingml/2006/main" xmlns:r="http://schemas.openxmlformats.org/officeDocument/2006/relationships" xmlns:p="http://schemas.openxmlformats.org/presentationml/2006/main">
+  <p:cm authorId="2" dt="2023-03-31T17:07:40.045" idx="9">
+    <p:pos x="10" y="10"/>
+    <p:text>remove</p:text>
+    <p:extLst>
+      <p:ext uri="{C676402C-5697-4E1C-873F-D02D1690AC5C}">
+        <p15:threadingInfo xmlns:p15="http://schemas.microsoft.com/office/powerpoint/2012/main" timeZoneBias="-480"/>
+      </p:ext>
+    </p:extLst>
+  </p:cm>
+  <p:cm authorId="2" dt="2023-03-31T17:10:47.413" idx="12">
+    <p:pos x="106" y="106"/>
+    <p:text>maybe we can add a graph about single vs annual proportion only if different plan type affects buy L&amp;H</p:text>
+    <p:extLst>
+      <p:ext uri="{C676402C-5697-4E1C-873F-D02D1690AC5C}">
+        <p15:threadingInfo xmlns:p15="http://schemas.microsoft.com/office/powerpoint/2012/main" timeZoneBias="-480"/>
+      </p:ext>
+    </p:extLst>
+  </p:cm>
+</p:cmLst>
+</file>
+
+<file path=ppt/comments/comment5.xml><?xml version="1.0" encoding="utf-8"?>
+<p:cmLst xmlns:a="http://schemas.openxmlformats.org/drawingml/2006/main" xmlns:r="http://schemas.openxmlformats.org/officeDocument/2006/relationships" xmlns:p="http://schemas.openxmlformats.org/presentationml/2006/main">
+  <p:cm authorId="2" dt="2023-03-31T17:07:46.865" idx="10">
+    <p:pos x="10" y="10"/>
+    <p:text>remove</p:text>
+    <p:extLst>
+      <p:ext uri="{C676402C-5697-4E1C-873F-D02D1690AC5C}">
+        <p15:threadingInfo xmlns:p15="http://schemas.microsoft.com/office/powerpoint/2012/main" timeZoneBias="-480"/>
+      </p:ext>
+    </p:extLst>
+  </p:cm>
+</p:cmLst>
+</file>
+
+<file path=ppt/comments/comment6.xml><?xml version="1.0" encoding="utf-8"?>
+<p:cmLst xmlns:a="http://schemas.openxmlformats.org/drawingml/2006/main" xmlns:r="http://schemas.openxmlformats.org/officeDocument/2006/relationships" xmlns:p="http://schemas.openxmlformats.org/presentationml/2006/main">
+  <p:cm authorId="2" dt="2023-03-31T17:08:52.885" idx="11">
+    <p:pos x="10" y="10"/>
+    <p:text>remove</p:text>
+    <p:extLst>
+      <p:ext uri="{C676402C-5697-4E1C-873F-D02D1690AC5C}">
+        <p15:threadingInfo xmlns:p15="http://schemas.microsoft.com/office/powerpoint/2012/main" timeZoneBias="-480"/>
+      </p:ext>
+    </p:extLst>
+  </p:cm>
+</p:cmLst>
+</file>
+
+<file path=ppt/comments/comment7.xml><?xml version="1.0" encoding="utf-8"?>
+<p:cmLst xmlns:a="http://schemas.openxmlformats.org/drawingml/2006/main" xmlns:r="http://schemas.openxmlformats.org/officeDocument/2006/relationships" xmlns:p="http://schemas.openxmlformats.org/presentationml/2006/main">
+  <p:cm authorId="2" dt="2023-03-31T17:11:19.458" idx="13">
+    <p:pos x="10" y="10"/>
+    <p:text>remove</p:text>
+    <p:extLst>
+      <p:ext uri="{C676402C-5697-4E1C-873F-D02D1690AC5C}">
+        <p15:threadingInfo xmlns:p15="http://schemas.microsoft.com/office/powerpoint/2012/main" timeZoneBias="-480"/>
+      </p:ext>
+    </p:extLst>
+  </p:cm>
+</p:cmLst>
+</file>
+
+<file path=ppt/comments/comment8.xml><?xml version="1.0" encoding="utf-8"?>
+<p:cmLst xmlns:a="http://schemas.openxmlformats.org/drawingml/2006/main" xmlns:r="http://schemas.openxmlformats.org/officeDocument/2006/relationships" xmlns:p="http://schemas.openxmlformats.org/presentationml/2006/main">
+  <p:cm authorId="2" dt="2023-03-27T11:39:12.888" idx="1">
+    <p:pos x="10" y="10"/>
+    <p:text>Add stacked % bar</p:text>
+    <p:extLst>
+      <p:ext uri="{C676402C-5697-4E1C-873F-D02D1690AC5C}">
+        <p15:threadingInfo xmlns:p15="http://schemas.microsoft.com/office/powerpoint/2012/main" timeZoneBias="-480"/>
+      </p:ext>
+    </p:extLst>
+  </p:cm>
+  <p:cm authorId="2" dt="2023-03-31T17:12:27.671" idx="14">
+    <p:pos x="106" y="106"/>
+    <p:text/>
+    <p:extLst>
+      <p:ext uri="{C676402C-5697-4E1C-873F-D02D1690AC5C}">
+        <p15:threadingInfo xmlns:p15="http://schemas.microsoft.com/office/powerpoint/2012/main" timeZoneBias="-480"/>
+      </p:ext>
+    </p:extLst>
+  </p:cm>
+</p:cmLst>
+</file>
+
+<file path=ppt/comments/comment9.xml><?xml version="1.0" encoding="utf-8"?>
+<p:cmLst xmlns:a="http://schemas.openxmlformats.org/drawingml/2006/main" xmlns:r="http://schemas.openxmlformats.org/officeDocument/2006/relationships" xmlns:p="http://schemas.openxmlformats.org/presentationml/2006/main">
+  <p:cm authorId="2" dt="2023-03-27T11:39:12.888" idx="2">
+    <p:pos x="10" y="10"/>
+    <p:text>Add stacked % bar</p:text>
+    <p:extLst>
+      <p:ext uri="{C676402C-5697-4E1C-873F-D02D1690AC5C}">
+        <p15:threadingInfo xmlns:p15="http://schemas.microsoft.com/office/powerpoint/2012/main" timeZoneBias="-480"/>
       </p:ext>
     </p:extLst>
   </p:cm>
@@ -8434,7 +9037,7 @@
           <a:p>
             <a:fld id="{02AC24A9-CCB6-4F8D-B8DB-C2F3692CFA5A}" type="datetimeFigureOut">
               <a:rPr lang="en-US" smtClean="0"/>
-              <a:t>3/30/2023</a:t>
+              <a:t>3/31/2023</a:t>
             </a:fld>
             <a:endParaRPr lang="en-US"/>
           </a:p>
@@ -8632,7 +9235,7 @@
           <a:p>
             <a:fld id="{02AC24A9-CCB6-4F8D-B8DB-C2F3692CFA5A}" type="datetimeFigureOut">
               <a:rPr lang="en-US" smtClean="0"/>
-              <a:t>3/30/2023</a:t>
+              <a:t>3/31/2023</a:t>
             </a:fld>
             <a:endParaRPr lang="en-US"/>
           </a:p>
@@ -24261,6 +24864,13 @@
             <a:r>
               <a:rPr lang="en-US" sz="4400"/>
               <a:t>In-depth EDA</a:t>
+            </a:r>
+            <a:br>
+              <a:rPr lang="en-US" sz="4400"/>
+            </a:br>
+            <a:r>
+              <a:rPr lang="en-US" sz="4400"/>
+              <a:t>Travel and Home Insurance</a:t>
             </a:r>
           </a:p>
         </p:txBody>
@@ -25106,6 +25716,75 @@
           </a:prstGeom>
         </p:spPr>
       </p:pic>
+      <p:sp>
+        <p:nvSpPr>
+          <p:cNvPr id="9" name="Rectangle 8">
+            <a:extLst>
+              <a:ext uri="{FF2B5EF4-FFF2-40B4-BE49-F238E27FC236}">
+                <a16:creationId xmlns:a16="http://schemas.microsoft.com/office/drawing/2014/main" id="{9924D629-8787-4DB2-94E7-2A4D90307541}"/>
+              </a:ext>
+            </a:extLst>
+          </p:cNvPr>
+          <p:cNvSpPr/>
+          <p:nvPr/>
+        </p:nvSpPr>
+        <p:spPr>
+          <a:xfrm>
+            <a:off x="9997675" y="192759"/>
+            <a:ext cx="1810987" cy="754084"/>
+          </a:xfrm>
+          <a:prstGeom prst="rect">
+            <a:avLst/>
+          </a:prstGeom>
+          <a:solidFill>
+            <a:srgbClr val="FCD385"/>
+          </a:solidFill>
+          <a:ln>
+            <a:solidFill>
+              <a:srgbClr val="027180"/>
+            </a:solidFill>
+          </a:ln>
+        </p:spPr>
+        <p:txBody>
+          <a:bodyPr rtlCol="0" anchor="ctr"/>
+          <a:lstStyle/>
+          <a:p>
+            <a:pPr marL="0" marR="0" lvl="0" indent="0" algn="ctr" defTabSz="914400" eaLnBrk="1" fontAlgn="auto" latinLnBrk="0" hangingPunct="1">
+              <a:lnSpc>
+                <a:spcPct val="100000"/>
+              </a:lnSpc>
+              <a:spcBef>
+                <a:spcPts val="0"/>
+              </a:spcBef>
+              <a:spcAft>
+                <a:spcPts val="0"/>
+              </a:spcAft>
+              <a:buClrTx/>
+              <a:buSzTx/>
+              <a:buFontTx/>
+              <a:buNone/>
+              <a:tabLst/>
+              <a:defRPr/>
+            </a:pPr>
+            <a:r>
+              <a:rPr kumimoji="0" lang="en-US" sz="1600" b="0" i="0" u="none" strike="noStrike" kern="0" cap="none" spc="0" normalizeH="0" baseline="0" noProof="0">
+                <a:ln>
+                  <a:noFill/>
+                </a:ln>
+                <a:solidFill>
+                  <a:srgbClr val="027180"/>
+                </a:solidFill>
+                <a:effectLst/>
+                <a:uLnTx/>
+                <a:uFillTx/>
+                <a:latin typeface="Source Sans Pro"/>
+                <a:cs typeface="Arial" charset="0"/>
+              </a:rPr>
+              <a:t>Kelvin</a:t>
+            </a:r>
+          </a:p>
+        </p:txBody>
+      </p:sp>
     </p:spTree>
     <p:extLst>
       <p:ext uri="{BB962C8B-B14F-4D97-AF65-F5344CB8AC3E}">
@@ -25745,6 +26424,75 @@
           </a:p>
         </p:txBody>
       </p:sp>
+      <p:sp>
+        <p:nvSpPr>
+          <p:cNvPr id="15" name="Rectangle 14">
+            <a:extLst>
+              <a:ext uri="{FF2B5EF4-FFF2-40B4-BE49-F238E27FC236}">
+                <a16:creationId xmlns:a16="http://schemas.microsoft.com/office/drawing/2014/main" id="{1B955732-546C-42D8-9B07-C11D822122D4}"/>
+              </a:ext>
+            </a:extLst>
+          </p:cNvPr>
+          <p:cNvSpPr/>
+          <p:nvPr/>
+        </p:nvSpPr>
+        <p:spPr>
+          <a:xfrm>
+            <a:off x="9997675" y="192759"/>
+            <a:ext cx="1810987" cy="754084"/>
+          </a:xfrm>
+          <a:prstGeom prst="rect">
+            <a:avLst/>
+          </a:prstGeom>
+          <a:solidFill>
+            <a:srgbClr val="FCD385"/>
+          </a:solidFill>
+          <a:ln>
+            <a:solidFill>
+              <a:srgbClr val="027180"/>
+            </a:solidFill>
+          </a:ln>
+        </p:spPr>
+        <p:txBody>
+          <a:bodyPr rtlCol="0" anchor="ctr"/>
+          <a:lstStyle/>
+          <a:p>
+            <a:pPr marL="0" marR="0" lvl="0" indent="0" algn="ctr" defTabSz="914400" eaLnBrk="1" fontAlgn="auto" latinLnBrk="0" hangingPunct="1">
+              <a:lnSpc>
+                <a:spcPct val="100000"/>
+              </a:lnSpc>
+              <a:spcBef>
+                <a:spcPts val="0"/>
+              </a:spcBef>
+              <a:spcAft>
+                <a:spcPts val="0"/>
+              </a:spcAft>
+              <a:buClrTx/>
+              <a:buSzTx/>
+              <a:buFontTx/>
+              <a:buNone/>
+              <a:tabLst/>
+              <a:defRPr/>
+            </a:pPr>
+            <a:r>
+              <a:rPr kumimoji="0" lang="en-US" sz="1600" b="0" i="0" u="none" strike="noStrike" kern="0" cap="none" spc="0" normalizeH="0" baseline="0" noProof="0">
+                <a:ln>
+                  <a:noFill/>
+                </a:ln>
+                <a:solidFill>
+                  <a:srgbClr val="027180"/>
+                </a:solidFill>
+                <a:effectLst/>
+                <a:uLnTx/>
+                <a:uFillTx/>
+                <a:latin typeface="Source Sans Pro"/>
+                <a:cs typeface="Arial" charset="0"/>
+              </a:rPr>
+              <a:t>Kelvin</a:t>
+            </a:r>
+          </a:p>
+        </p:txBody>
+      </p:sp>
     </p:spTree>
     <p:extLst>
       <p:ext uri="{BB962C8B-B14F-4D97-AF65-F5344CB8AC3E}">
@@ -25898,6 +26646,75 @@
             <a:r>
               <a:rPr lang="en-US" sz="1050"/>
               <a:t>The travel duration for single trip is the highest during covid </a:t>
+            </a:r>
+          </a:p>
+        </p:txBody>
+      </p:sp>
+      <p:sp>
+        <p:nvSpPr>
+          <p:cNvPr id="6" name="Rectangle 5">
+            <a:extLst>
+              <a:ext uri="{FF2B5EF4-FFF2-40B4-BE49-F238E27FC236}">
+                <a16:creationId xmlns:a16="http://schemas.microsoft.com/office/drawing/2014/main" id="{AC5BC3F1-1B20-4EEA-A938-05AC93927302}"/>
+              </a:ext>
+            </a:extLst>
+          </p:cNvPr>
+          <p:cNvSpPr/>
+          <p:nvPr/>
+        </p:nvSpPr>
+        <p:spPr>
+          <a:xfrm>
+            <a:off x="9997675" y="192759"/>
+            <a:ext cx="1810987" cy="754084"/>
+          </a:xfrm>
+          <a:prstGeom prst="rect">
+            <a:avLst/>
+          </a:prstGeom>
+          <a:solidFill>
+            <a:srgbClr val="FCD385"/>
+          </a:solidFill>
+          <a:ln>
+            <a:solidFill>
+              <a:srgbClr val="027180"/>
+            </a:solidFill>
+          </a:ln>
+        </p:spPr>
+        <p:txBody>
+          <a:bodyPr rtlCol="0" anchor="ctr"/>
+          <a:lstStyle/>
+          <a:p>
+            <a:pPr marL="0" marR="0" lvl="0" indent="0" algn="ctr" defTabSz="914400" eaLnBrk="1" fontAlgn="auto" latinLnBrk="0" hangingPunct="1">
+              <a:lnSpc>
+                <a:spcPct val="100000"/>
+              </a:lnSpc>
+              <a:spcBef>
+                <a:spcPts val="0"/>
+              </a:spcBef>
+              <a:spcAft>
+                <a:spcPts val="0"/>
+              </a:spcAft>
+              <a:buClrTx/>
+              <a:buSzTx/>
+              <a:buFontTx/>
+              <a:buNone/>
+              <a:tabLst/>
+              <a:defRPr/>
+            </a:pPr>
+            <a:r>
+              <a:rPr kumimoji="0" lang="en-US" sz="1600" b="0" i="0" u="none" strike="noStrike" kern="0" cap="none" spc="0" normalizeH="0" baseline="0" noProof="0">
+                <a:ln>
+                  <a:noFill/>
+                </a:ln>
+                <a:solidFill>
+                  <a:srgbClr val="027180"/>
+                </a:solidFill>
+                <a:effectLst/>
+                <a:uLnTx/>
+                <a:uFillTx/>
+                <a:latin typeface="Source Sans Pro"/>
+                <a:cs typeface="Arial" charset="0"/>
+              </a:rPr>
+              <a:t>Kelvin</a:t>
             </a:r>
           </a:p>
         </p:txBody>
@@ -26140,6 +26957,75 @@
             <a:r>
               <a:rPr lang="en-US" sz="1050"/>
               <a:t>There is an increase in the average age of traveler during Covid. However, after covid, the distribution becomes like pre-covid.</a:t>
+            </a:r>
+          </a:p>
+        </p:txBody>
+      </p:sp>
+      <p:sp>
+        <p:nvSpPr>
+          <p:cNvPr id="8" name="Rectangle 7">
+            <a:extLst>
+              <a:ext uri="{FF2B5EF4-FFF2-40B4-BE49-F238E27FC236}">
+                <a16:creationId xmlns:a16="http://schemas.microsoft.com/office/drawing/2014/main" id="{12F9C9F2-F2CC-483C-9EFB-757A9E7B9968}"/>
+              </a:ext>
+            </a:extLst>
+          </p:cNvPr>
+          <p:cNvSpPr/>
+          <p:nvPr/>
+        </p:nvSpPr>
+        <p:spPr>
+          <a:xfrm>
+            <a:off x="9997675" y="192759"/>
+            <a:ext cx="1810987" cy="754084"/>
+          </a:xfrm>
+          <a:prstGeom prst="rect">
+            <a:avLst/>
+          </a:prstGeom>
+          <a:solidFill>
+            <a:srgbClr val="FCD385"/>
+          </a:solidFill>
+          <a:ln>
+            <a:solidFill>
+              <a:srgbClr val="027180"/>
+            </a:solidFill>
+          </a:ln>
+        </p:spPr>
+        <p:txBody>
+          <a:bodyPr rtlCol="0" anchor="ctr"/>
+          <a:lstStyle/>
+          <a:p>
+            <a:pPr marL="0" marR="0" lvl="0" indent="0" algn="ctr" defTabSz="914400" eaLnBrk="1" fontAlgn="auto" latinLnBrk="0" hangingPunct="1">
+              <a:lnSpc>
+                <a:spcPct val="100000"/>
+              </a:lnSpc>
+              <a:spcBef>
+                <a:spcPts val="0"/>
+              </a:spcBef>
+              <a:spcAft>
+                <a:spcPts val="0"/>
+              </a:spcAft>
+              <a:buClrTx/>
+              <a:buSzTx/>
+              <a:buFontTx/>
+              <a:buNone/>
+              <a:tabLst/>
+              <a:defRPr/>
+            </a:pPr>
+            <a:r>
+              <a:rPr kumimoji="0" lang="en-US" sz="1600" b="0" i="0" u="none" strike="noStrike" kern="0" cap="none" spc="0" normalizeH="0" baseline="0" noProof="0">
+                <a:ln>
+                  <a:noFill/>
+                </a:ln>
+                <a:solidFill>
+                  <a:srgbClr val="027180"/>
+                </a:solidFill>
+                <a:effectLst/>
+                <a:uLnTx/>
+                <a:uFillTx/>
+                <a:latin typeface="Source Sans Pro"/>
+                <a:cs typeface="Arial" charset="0"/>
+              </a:rPr>
+              <a:t>Kelvin</a:t>
             </a:r>
           </a:p>
         </p:txBody>
@@ -26404,6 +27290,75 @@
           </a:fontRef>
         </p:style>
       </p:cxnSp>
+      <p:sp>
+        <p:nvSpPr>
+          <p:cNvPr id="12" name="Rectangle 11">
+            <a:extLst>
+              <a:ext uri="{FF2B5EF4-FFF2-40B4-BE49-F238E27FC236}">
+                <a16:creationId xmlns:a16="http://schemas.microsoft.com/office/drawing/2014/main" id="{55877094-9CED-4ED5-B89E-8AAE34ACAD13}"/>
+              </a:ext>
+            </a:extLst>
+          </p:cNvPr>
+          <p:cNvSpPr/>
+          <p:nvPr/>
+        </p:nvSpPr>
+        <p:spPr>
+          <a:xfrm>
+            <a:off x="9997675" y="192759"/>
+            <a:ext cx="1810987" cy="754084"/>
+          </a:xfrm>
+          <a:prstGeom prst="rect">
+            <a:avLst/>
+          </a:prstGeom>
+          <a:solidFill>
+            <a:srgbClr val="FCD385"/>
+          </a:solidFill>
+          <a:ln>
+            <a:solidFill>
+              <a:srgbClr val="027180"/>
+            </a:solidFill>
+          </a:ln>
+        </p:spPr>
+        <p:txBody>
+          <a:bodyPr rtlCol="0" anchor="ctr"/>
+          <a:lstStyle/>
+          <a:p>
+            <a:pPr marL="0" marR="0" lvl="0" indent="0" algn="ctr" defTabSz="914400" eaLnBrk="1" fontAlgn="auto" latinLnBrk="0" hangingPunct="1">
+              <a:lnSpc>
+                <a:spcPct val="100000"/>
+              </a:lnSpc>
+              <a:spcBef>
+                <a:spcPts val="0"/>
+              </a:spcBef>
+              <a:spcAft>
+                <a:spcPts val="0"/>
+              </a:spcAft>
+              <a:buClrTx/>
+              <a:buSzTx/>
+              <a:buFontTx/>
+              <a:buNone/>
+              <a:tabLst/>
+              <a:defRPr/>
+            </a:pPr>
+            <a:r>
+              <a:rPr kumimoji="0" lang="en-US" sz="1600" b="0" i="0" u="none" strike="noStrike" kern="0" cap="none" spc="0" normalizeH="0" baseline="0" noProof="0">
+                <a:ln>
+                  <a:noFill/>
+                </a:ln>
+                <a:solidFill>
+                  <a:srgbClr val="027180"/>
+                </a:solidFill>
+                <a:effectLst/>
+                <a:uLnTx/>
+                <a:uFillTx/>
+                <a:latin typeface="Source Sans Pro"/>
+                <a:cs typeface="Arial" charset="0"/>
+              </a:rPr>
+              <a:t>Kelvin</a:t>
+            </a:r>
+          </a:p>
+        </p:txBody>
+      </p:sp>
     </p:spTree>
     <p:extLst>
       <p:ext uri="{BB962C8B-B14F-4D97-AF65-F5344CB8AC3E}">
@@ -26671,6 +27626,75 @@
           </a:p>
         </p:txBody>
       </p:sp>
+      <p:sp>
+        <p:nvSpPr>
+          <p:cNvPr id="12" name="Rectangle 11">
+            <a:extLst>
+              <a:ext uri="{FF2B5EF4-FFF2-40B4-BE49-F238E27FC236}">
+                <a16:creationId xmlns:a16="http://schemas.microsoft.com/office/drawing/2014/main" id="{5F65068F-2936-43FD-9F1A-0CBD6D2437EB}"/>
+              </a:ext>
+            </a:extLst>
+          </p:cNvPr>
+          <p:cNvSpPr/>
+          <p:nvPr/>
+        </p:nvSpPr>
+        <p:spPr>
+          <a:xfrm>
+            <a:off x="9997675" y="192759"/>
+            <a:ext cx="1810987" cy="754084"/>
+          </a:xfrm>
+          <a:prstGeom prst="rect">
+            <a:avLst/>
+          </a:prstGeom>
+          <a:solidFill>
+            <a:srgbClr val="FCD385"/>
+          </a:solidFill>
+          <a:ln>
+            <a:solidFill>
+              <a:srgbClr val="027180"/>
+            </a:solidFill>
+          </a:ln>
+        </p:spPr>
+        <p:txBody>
+          <a:bodyPr rtlCol="0" anchor="ctr"/>
+          <a:lstStyle/>
+          <a:p>
+            <a:pPr marL="0" marR="0" lvl="0" indent="0" algn="ctr" defTabSz="914400" eaLnBrk="1" fontAlgn="auto" latinLnBrk="0" hangingPunct="1">
+              <a:lnSpc>
+                <a:spcPct val="100000"/>
+              </a:lnSpc>
+              <a:spcBef>
+                <a:spcPts val="0"/>
+              </a:spcBef>
+              <a:spcAft>
+                <a:spcPts val="0"/>
+              </a:spcAft>
+              <a:buClrTx/>
+              <a:buSzTx/>
+              <a:buFontTx/>
+              <a:buNone/>
+              <a:tabLst/>
+              <a:defRPr/>
+            </a:pPr>
+            <a:r>
+              <a:rPr kumimoji="0" lang="en-US" sz="1600" b="0" i="0" u="none" strike="noStrike" kern="0" cap="none" spc="0" normalizeH="0" baseline="0" noProof="0">
+                <a:ln>
+                  <a:noFill/>
+                </a:ln>
+                <a:solidFill>
+                  <a:srgbClr val="027180"/>
+                </a:solidFill>
+                <a:effectLst/>
+                <a:uLnTx/>
+                <a:uFillTx/>
+                <a:latin typeface="Source Sans Pro"/>
+                <a:cs typeface="Arial" charset="0"/>
+              </a:rPr>
+              <a:t>Kelvin</a:t>
+            </a:r>
+          </a:p>
+        </p:txBody>
+      </p:sp>
     </p:spTree>
     <p:extLst>
       <p:ext uri="{BB962C8B-B14F-4D97-AF65-F5344CB8AC3E}">
@@ -26937,6 +27961,75 @@
           </a:prstGeom>
         </p:spPr>
       </p:pic>
+      <p:sp>
+        <p:nvSpPr>
+          <p:cNvPr id="10" name="Rectangle 9">
+            <a:extLst>
+              <a:ext uri="{FF2B5EF4-FFF2-40B4-BE49-F238E27FC236}">
+                <a16:creationId xmlns:a16="http://schemas.microsoft.com/office/drawing/2014/main" id="{3D85BB39-9912-4D97-B693-EB25A8CA7EA7}"/>
+              </a:ext>
+            </a:extLst>
+          </p:cNvPr>
+          <p:cNvSpPr/>
+          <p:nvPr/>
+        </p:nvSpPr>
+        <p:spPr>
+          <a:xfrm>
+            <a:off x="9997675" y="192759"/>
+            <a:ext cx="1810987" cy="754084"/>
+          </a:xfrm>
+          <a:prstGeom prst="rect">
+            <a:avLst/>
+          </a:prstGeom>
+          <a:solidFill>
+            <a:srgbClr val="FCD385"/>
+          </a:solidFill>
+          <a:ln>
+            <a:solidFill>
+              <a:srgbClr val="027180"/>
+            </a:solidFill>
+          </a:ln>
+        </p:spPr>
+        <p:txBody>
+          <a:bodyPr rtlCol="0" anchor="ctr"/>
+          <a:lstStyle/>
+          <a:p>
+            <a:pPr marL="0" marR="0" lvl="0" indent="0" algn="ctr" defTabSz="914400" eaLnBrk="1" fontAlgn="auto" latinLnBrk="0" hangingPunct="1">
+              <a:lnSpc>
+                <a:spcPct val="100000"/>
+              </a:lnSpc>
+              <a:spcBef>
+                <a:spcPts val="0"/>
+              </a:spcBef>
+              <a:spcAft>
+                <a:spcPts val="0"/>
+              </a:spcAft>
+              <a:buClrTx/>
+              <a:buSzTx/>
+              <a:buFontTx/>
+              <a:buNone/>
+              <a:tabLst/>
+              <a:defRPr/>
+            </a:pPr>
+            <a:r>
+              <a:rPr kumimoji="0" lang="en-US" sz="1600" b="0" i="0" u="none" strike="noStrike" kern="0" cap="none" spc="0" normalizeH="0" baseline="0" noProof="0">
+                <a:ln>
+                  <a:noFill/>
+                </a:ln>
+                <a:solidFill>
+                  <a:srgbClr val="027180"/>
+                </a:solidFill>
+                <a:effectLst/>
+                <a:uLnTx/>
+                <a:uFillTx/>
+                <a:latin typeface="Source Sans Pro"/>
+                <a:cs typeface="Arial" charset="0"/>
+              </a:rPr>
+              <a:t>Kelvin</a:t>
+            </a:r>
+          </a:p>
+        </p:txBody>
+      </p:sp>
     </p:spTree>
     <p:extLst>
       <p:ext uri="{BB962C8B-B14F-4D97-AF65-F5344CB8AC3E}">
@@ -27099,35 +28192,21 @@
             <a:pPr lvl="1"/>
             <a:r>
               <a:rPr lang="en-US"/>
-              <a:t>Travel claimed customers in Life Agent channel have higher tendency to buy L&amp;H products</a:t>
+              <a:t>Signing up L&amp;H insurance rate given there were travel insurance claims before is 8.5%, a 1.7% increase over no travel insurance claims (rephrase it, [1] significantly higher + [2] specific for SOMETHING (e.g. agent channel or medical?) )</a:t>
             </a:r>
           </a:p>
           <a:p>
             <a:pPr lvl="1"/>
             <a:r>
               <a:rPr lang="en-US"/>
-              <a:t>Unsuccessful claims had no noticeable impact on Travel insurance cancellation (~3%)</a:t>
+              <a:t>…</a:t>
             </a:r>
           </a:p>
           <a:p>
             <a:pPr lvl="1"/>
             <a:r>
               <a:rPr lang="en-US"/>
-              <a:t>Signing up L&amp;H insurance rate given there were travel insurance claims before is 8.5%, a 1.7% increase over no travel insurance claims </a:t>
-            </a:r>
-          </a:p>
-          <a:p>
-            <a:pPr lvl="1"/>
-            <a:r>
-              <a:rPr lang="en-US"/>
-              <a:t>Using Light GMB as a baseline model, we preliminarily identified ~17500 </a:t>
-            </a:r>
-            <a:r>
-              <a:rPr lang="en-US">
-                <a:latin typeface="Source Sans Pro"/>
-                <a:ea typeface="Source Sans Pro"/>
-              </a:rPr>
-              <a:t>customers that have the propensity to buy medical insurance.</a:t>
+              <a:t>…</a:t>
             </a:r>
           </a:p>
           <a:p>
@@ -27140,7 +28219,14 @@
             <a:pPr lvl="1"/>
             <a:r>
               <a:rPr lang="en-US"/>
-              <a:t>Out of the 17500 possible customers, ~13800 has AXA Agent as their primary channel. Dependent on the customers' features (i.e. Claim, GI policy duration, GWP, </a:t>
+              <a:t>[Claim-to-L&amp;H-different-products] …</a:t>
+            </a:r>
+          </a:p>
+          <a:p>
+            <a:pPr lvl="1"/>
+            <a:r>
+              <a:rPr lang="en-US"/>
+              <a:t>[Propensity] Out of the 17500 possible customers, ~13800 has AXA Agent as their primary channel. Dependent on the customers' features (i.e. Claim, GI policy duration, GWP, </a:t>
             </a:r>
             <a:r>
               <a:rPr lang="en-US" err="1"/>
@@ -27712,6 +28798,57 @@
                 <a:cs typeface="Arial"/>
               </a:rPr>
               <a:t>Jacky – Confirmed</a:t>
+            </a:r>
+          </a:p>
+        </p:txBody>
+      </p:sp>
+      <p:sp>
+        <p:nvSpPr>
+          <p:cNvPr id="10" name="Rectangle 9">
+            <a:extLst>
+              <a:ext uri="{FF2B5EF4-FFF2-40B4-BE49-F238E27FC236}">
+                <a16:creationId xmlns:a16="http://schemas.microsoft.com/office/drawing/2014/main" id="{89DCDA58-591B-7425-0D8A-B916F8F7A938}"/>
+              </a:ext>
+            </a:extLst>
+          </p:cNvPr>
+          <p:cNvSpPr/>
+          <p:nvPr/>
+        </p:nvSpPr>
+        <p:spPr>
+          <a:xfrm>
+            <a:off x="10677525" y="152400"/>
+            <a:ext cx="1219200" cy="517419"/>
+          </a:xfrm>
+          <a:prstGeom prst="rect">
+            <a:avLst/>
+          </a:prstGeom>
+          <a:solidFill>
+            <a:schemeClr val="accent3"/>
+          </a:solidFill>
+          <a:effectLst/>
+        </p:spPr>
+        <p:style>
+          <a:lnRef idx="1">
+            <a:schemeClr val="accent1"/>
+          </a:lnRef>
+          <a:fillRef idx="3">
+            <a:schemeClr val="accent1"/>
+          </a:fillRef>
+          <a:effectRef idx="2">
+            <a:schemeClr val="accent1"/>
+          </a:effectRef>
+          <a:fontRef idx="minor">
+            <a:schemeClr val="lt1"/>
+          </a:fontRef>
+        </p:style>
+        <p:txBody>
+          <a:bodyPr rtlCol="0" anchor="ctr"/>
+          <a:lstStyle/>
+          <a:p>
+            <a:pPr algn="ctr"/>
+            <a:r>
+              <a:rPr lang="en-US"/>
+              <a:t>Jacky</a:t>
             </a:r>
           </a:p>
         </p:txBody>
@@ -30103,6 +31240,57 @@
           </a:graphicData>
         </a:graphic>
       </p:graphicFrame>
+      <p:sp>
+        <p:nvSpPr>
+          <p:cNvPr id="4" name="Rectangle 3">
+            <a:extLst>
+              <a:ext uri="{FF2B5EF4-FFF2-40B4-BE49-F238E27FC236}">
+                <a16:creationId xmlns:a16="http://schemas.microsoft.com/office/drawing/2014/main" id="{3F6D7D96-FC7A-DB0C-FA30-3100439D3ABF}"/>
+              </a:ext>
+            </a:extLst>
+          </p:cNvPr>
+          <p:cNvSpPr/>
+          <p:nvPr/>
+        </p:nvSpPr>
+        <p:spPr>
+          <a:xfrm>
+            <a:off x="10677525" y="152400"/>
+            <a:ext cx="1219200" cy="517419"/>
+          </a:xfrm>
+          <a:prstGeom prst="rect">
+            <a:avLst/>
+          </a:prstGeom>
+          <a:solidFill>
+            <a:schemeClr val="accent3"/>
+          </a:solidFill>
+          <a:effectLst/>
+        </p:spPr>
+        <p:style>
+          <a:lnRef idx="1">
+            <a:schemeClr val="accent1"/>
+          </a:lnRef>
+          <a:fillRef idx="3">
+            <a:schemeClr val="accent1"/>
+          </a:fillRef>
+          <a:effectRef idx="2">
+            <a:schemeClr val="accent1"/>
+          </a:effectRef>
+          <a:fontRef idx="minor">
+            <a:schemeClr val="lt1"/>
+          </a:fontRef>
+        </p:style>
+        <p:txBody>
+          <a:bodyPr rtlCol="0" anchor="ctr"/>
+          <a:lstStyle/>
+          <a:p>
+            <a:pPr algn="ctr"/>
+            <a:r>
+              <a:rPr lang="en-US"/>
+              <a:t>Jacky</a:t>
+            </a:r>
+          </a:p>
+        </p:txBody>
+      </p:sp>
     </p:spTree>
     <p:extLst>
       <p:ext uri="{BB962C8B-B14F-4D97-AF65-F5344CB8AC3E}">
@@ -30565,6 +31753,57 @@
           </a:prstGeom>
         </p:spPr>
       </p:pic>
+      <p:sp>
+        <p:nvSpPr>
+          <p:cNvPr id="9" name="Rectangle 8">
+            <a:extLst>
+              <a:ext uri="{FF2B5EF4-FFF2-40B4-BE49-F238E27FC236}">
+                <a16:creationId xmlns:a16="http://schemas.microsoft.com/office/drawing/2014/main" id="{ADD48F6F-B779-1C47-AA35-E5C649FB8148}"/>
+              </a:ext>
+            </a:extLst>
+          </p:cNvPr>
+          <p:cNvSpPr/>
+          <p:nvPr/>
+        </p:nvSpPr>
+        <p:spPr>
+          <a:xfrm>
+            <a:off x="10677525" y="152400"/>
+            <a:ext cx="1219200" cy="517419"/>
+          </a:xfrm>
+          <a:prstGeom prst="rect">
+            <a:avLst/>
+          </a:prstGeom>
+          <a:solidFill>
+            <a:schemeClr val="accent3"/>
+          </a:solidFill>
+          <a:effectLst/>
+        </p:spPr>
+        <p:style>
+          <a:lnRef idx="1">
+            <a:schemeClr val="accent1"/>
+          </a:lnRef>
+          <a:fillRef idx="3">
+            <a:schemeClr val="accent1"/>
+          </a:fillRef>
+          <a:effectRef idx="2">
+            <a:schemeClr val="accent1"/>
+          </a:effectRef>
+          <a:fontRef idx="minor">
+            <a:schemeClr val="lt1"/>
+          </a:fontRef>
+        </p:style>
+        <p:txBody>
+          <a:bodyPr rtlCol="0" anchor="ctr"/>
+          <a:lstStyle/>
+          <a:p>
+            <a:pPr algn="ctr"/>
+            <a:r>
+              <a:rPr lang="en-US"/>
+              <a:t>Jacky</a:t>
+            </a:r>
+          </a:p>
+        </p:txBody>
+      </p:sp>
     </p:spTree>
     <p:extLst>
       <p:ext uri="{BB962C8B-B14F-4D97-AF65-F5344CB8AC3E}">
@@ -31075,6 +32314,57 @@
           </a:prstGeom>
         </p:spPr>
       </p:pic>
+      <p:sp>
+        <p:nvSpPr>
+          <p:cNvPr id="8" name="Rectangle 7">
+            <a:extLst>
+              <a:ext uri="{FF2B5EF4-FFF2-40B4-BE49-F238E27FC236}">
+                <a16:creationId xmlns:a16="http://schemas.microsoft.com/office/drawing/2014/main" id="{0B3EEA5D-2AA7-26DC-3F13-4D4B62A97B48}"/>
+              </a:ext>
+            </a:extLst>
+          </p:cNvPr>
+          <p:cNvSpPr/>
+          <p:nvPr/>
+        </p:nvSpPr>
+        <p:spPr>
+          <a:xfrm>
+            <a:off x="10677525" y="152400"/>
+            <a:ext cx="1219200" cy="517419"/>
+          </a:xfrm>
+          <a:prstGeom prst="rect">
+            <a:avLst/>
+          </a:prstGeom>
+          <a:solidFill>
+            <a:schemeClr val="accent3"/>
+          </a:solidFill>
+          <a:effectLst/>
+        </p:spPr>
+        <p:style>
+          <a:lnRef idx="1">
+            <a:schemeClr val="accent1"/>
+          </a:lnRef>
+          <a:fillRef idx="3">
+            <a:schemeClr val="accent1"/>
+          </a:fillRef>
+          <a:effectRef idx="2">
+            <a:schemeClr val="accent1"/>
+          </a:effectRef>
+          <a:fontRef idx="minor">
+            <a:schemeClr val="lt1"/>
+          </a:fontRef>
+        </p:style>
+        <p:txBody>
+          <a:bodyPr rtlCol="0" anchor="ctr"/>
+          <a:lstStyle/>
+          <a:p>
+            <a:pPr algn="ctr"/>
+            <a:r>
+              <a:rPr lang="en-US"/>
+              <a:t>Jacky</a:t>
+            </a:r>
+          </a:p>
+        </p:txBody>
+      </p:sp>
     </p:spTree>
     <p:extLst>
       <p:ext uri="{BB962C8B-B14F-4D97-AF65-F5344CB8AC3E}">
@@ -31770,6 +33060,57 @@
           </a:prstGeom>
         </p:spPr>
       </p:pic>
+      <p:sp>
+        <p:nvSpPr>
+          <p:cNvPr id="9" name="Rectangle 8">
+            <a:extLst>
+              <a:ext uri="{FF2B5EF4-FFF2-40B4-BE49-F238E27FC236}">
+                <a16:creationId xmlns:a16="http://schemas.microsoft.com/office/drawing/2014/main" id="{6AC29E29-2FBE-5E04-CCFC-C01730158FE2}"/>
+              </a:ext>
+            </a:extLst>
+          </p:cNvPr>
+          <p:cNvSpPr/>
+          <p:nvPr/>
+        </p:nvSpPr>
+        <p:spPr>
+          <a:xfrm>
+            <a:off x="10677525" y="152400"/>
+            <a:ext cx="1219200" cy="517419"/>
+          </a:xfrm>
+          <a:prstGeom prst="rect">
+            <a:avLst/>
+          </a:prstGeom>
+          <a:solidFill>
+            <a:schemeClr val="accent3"/>
+          </a:solidFill>
+          <a:effectLst/>
+        </p:spPr>
+        <p:style>
+          <a:lnRef idx="1">
+            <a:schemeClr val="accent1"/>
+          </a:lnRef>
+          <a:fillRef idx="3">
+            <a:schemeClr val="accent1"/>
+          </a:fillRef>
+          <a:effectRef idx="2">
+            <a:schemeClr val="accent1"/>
+          </a:effectRef>
+          <a:fontRef idx="minor">
+            <a:schemeClr val="lt1"/>
+          </a:fontRef>
+        </p:style>
+        <p:txBody>
+          <a:bodyPr rtlCol="0" anchor="ctr"/>
+          <a:lstStyle/>
+          <a:p>
+            <a:pPr algn="ctr"/>
+            <a:r>
+              <a:rPr lang="en-US"/>
+              <a:t>Jacky</a:t>
+            </a:r>
+          </a:p>
+        </p:txBody>
+      </p:sp>
     </p:spTree>
     <p:extLst>
       <p:ext uri="{BB962C8B-B14F-4D97-AF65-F5344CB8AC3E}">
@@ -32436,6 +33777,57 @@
           </a:prstGeom>
         </p:spPr>
       </p:pic>
+      <p:sp>
+        <p:nvSpPr>
+          <p:cNvPr id="8" name="Rectangle 7">
+            <a:extLst>
+              <a:ext uri="{FF2B5EF4-FFF2-40B4-BE49-F238E27FC236}">
+                <a16:creationId xmlns:a16="http://schemas.microsoft.com/office/drawing/2014/main" id="{E035E6BC-48A1-6837-AD96-94C8B23F8521}"/>
+              </a:ext>
+            </a:extLst>
+          </p:cNvPr>
+          <p:cNvSpPr/>
+          <p:nvPr/>
+        </p:nvSpPr>
+        <p:spPr>
+          <a:xfrm>
+            <a:off x="10677525" y="152400"/>
+            <a:ext cx="1219200" cy="517419"/>
+          </a:xfrm>
+          <a:prstGeom prst="rect">
+            <a:avLst/>
+          </a:prstGeom>
+          <a:solidFill>
+            <a:schemeClr val="accent3"/>
+          </a:solidFill>
+          <a:effectLst/>
+        </p:spPr>
+        <p:style>
+          <a:lnRef idx="1">
+            <a:schemeClr val="accent1"/>
+          </a:lnRef>
+          <a:fillRef idx="3">
+            <a:schemeClr val="accent1"/>
+          </a:fillRef>
+          <a:effectRef idx="2">
+            <a:schemeClr val="accent1"/>
+          </a:effectRef>
+          <a:fontRef idx="minor">
+            <a:schemeClr val="lt1"/>
+          </a:fontRef>
+        </p:style>
+        <p:txBody>
+          <a:bodyPr rtlCol="0" anchor="ctr"/>
+          <a:lstStyle/>
+          <a:p>
+            <a:pPr algn="ctr"/>
+            <a:r>
+              <a:rPr lang="en-US"/>
+              <a:t>Jacky</a:t>
+            </a:r>
+          </a:p>
+        </p:txBody>
+      </p:sp>
     </p:spTree>
     <p:extLst>
       <p:ext uri="{BB962C8B-B14F-4D97-AF65-F5344CB8AC3E}">
@@ -33068,6 +34460,57 @@
           </a:prstGeom>
         </p:spPr>
       </p:pic>
+      <p:sp>
+        <p:nvSpPr>
+          <p:cNvPr id="9" name="Rectangle 8">
+            <a:extLst>
+              <a:ext uri="{FF2B5EF4-FFF2-40B4-BE49-F238E27FC236}">
+                <a16:creationId xmlns:a16="http://schemas.microsoft.com/office/drawing/2014/main" id="{A94B71C8-57FE-CBC2-20D3-32095618A156}"/>
+              </a:ext>
+            </a:extLst>
+          </p:cNvPr>
+          <p:cNvSpPr/>
+          <p:nvPr/>
+        </p:nvSpPr>
+        <p:spPr>
+          <a:xfrm>
+            <a:off x="10677525" y="152400"/>
+            <a:ext cx="1219200" cy="517419"/>
+          </a:xfrm>
+          <a:prstGeom prst="rect">
+            <a:avLst/>
+          </a:prstGeom>
+          <a:solidFill>
+            <a:schemeClr val="accent3"/>
+          </a:solidFill>
+          <a:effectLst/>
+        </p:spPr>
+        <p:style>
+          <a:lnRef idx="1">
+            <a:schemeClr val="accent1"/>
+          </a:lnRef>
+          <a:fillRef idx="3">
+            <a:schemeClr val="accent1"/>
+          </a:fillRef>
+          <a:effectRef idx="2">
+            <a:schemeClr val="accent1"/>
+          </a:effectRef>
+          <a:fontRef idx="minor">
+            <a:schemeClr val="lt1"/>
+          </a:fontRef>
+        </p:style>
+        <p:txBody>
+          <a:bodyPr rtlCol="0" anchor="ctr"/>
+          <a:lstStyle/>
+          <a:p>
+            <a:pPr algn="ctr"/>
+            <a:r>
+              <a:rPr lang="en-US"/>
+              <a:t>Jacky</a:t>
+            </a:r>
+          </a:p>
+        </p:txBody>
+      </p:sp>
     </p:spTree>
     <p:extLst>
       <p:ext uri="{BB962C8B-B14F-4D97-AF65-F5344CB8AC3E}">
@@ -33723,6 +35166,57 @@
               <a:latin typeface="Source Sans Pro"/>
               <a:ea typeface="Source Sans Pro"/>
             </a:endParaRPr>
+          </a:p>
+        </p:txBody>
+      </p:sp>
+      <p:sp>
+        <p:nvSpPr>
+          <p:cNvPr id="7" name="Rectangle 6">
+            <a:extLst>
+              <a:ext uri="{FF2B5EF4-FFF2-40B4-BE49-F238E27FC236}">
+                <a16:creationId xmlns:a16="http://schemas.microsoft.com/office/drawing/2014/main" id="{3C633241-0A2E-F92D-4E70-F45EB97B3BBE}"/>
+              </a:ext>
+            </a:extLst>
+          </p:cNvPr>
+          <p:cNvSpPr/>
+          <p:nvPr/>
+        </p:nvSpPr>
+        <p:spPr>
+          <a:xfrm>
+            <a:off x="10677525" y="152400"/>
+            <a:ext cx="1219200" cy="517419"/>
+          </a:xfrm>
+          <a:prstGeom prst="rect">
+            <a:avLst/>
+          </a:prstGeom>
+          <a:solidFill>
+            <a:schemeClr val="accent3"/>
+          </a:solidFill>
+          <a:effectLst/>
+        </p:spPr>
+        <p:style>
+          <a:lnRef idx="1">
+            <a:schemeClr val="accent1"/>
+          </a:lnRef>
+          <a:fillRef idx="3">
+            <a:schemeClr val="accent1"/>
+          </a:fillRef>
+          <a:effectRef idx="2">
+            <a:schemeClr val="accent1"/>
+          </a:effectRef>
+          <a:fontRef idx="minor">
+            <a:schemeClr val="lt1"/>
+          </a:fontRef>
+        </p:style>
+        <p:txBody>
+          <a:bodyPr rtlCol="0" anchor="ctr"/>
+          <a:lstStyle/>
+          <a:p>
+            <a:pPr algn="ctr"/>
+            <a:r>
+              <a:rPr lang="en-US"/>
+              <a:t>Jacky</a:t>
+            </a:r>
           </a:p>
         </p:txBody>
       </p:sp>
@@ -36099,6 +37593,100 @@
           </a:p>
         </p:txBody>
       </p:sp>
+      <p:sp>
+        <p:nvSpPr>
+          <p:cNvPr id="29" name="Rectangle 28">
+            <a:extLst>
+              <a:ext uri="{FF2B5EF4-FFF2-40B4-BE49-F238E27FC236}">
+                <a16:creationId xmlns:a16="http://schemas.microsoft.com/office/drawing/2014/main" id="{3DEADE20-3EE5-48C1-9368-D3DD28BD3C54}"/>
+              </a:ext>
+            </a:extLst>
+          </p:cNvPr>
+          <p:cNvSpPr/>
+          <p:nvPr/>
+        </p:nvSpPr>
+        <p:spPr>
+          <a:xfrm>
+            <a:off x="7511329" y="192759"/>
+            <a:ext cx="1810987" cy="754084"/>
+          </a:xfrm>
+          <a:prstGeom prst="rect">
+            <a:avLst/>
+          </a:prstGeom>
+          <a:solidFill>
+            <a:schemeClr val="bg2"/>
+          </a:solidFill>
+          <a:ln>
+            <a:solidFill>
+              <a:srgbClr val="027180"/>
+            </a:solidFill>
+          </a:ln>
+        </p:spPr>
+        <p:txBody>
+          <a:bodyPr rtlCol="0" anchor="ctr"/>
+          <a:lstStyle/>
+          <a:p>
+            <a:pPr algn="ctr" eaLnBrk="1" hangingPunct="1"/>
+            <a:r>
+              <a:rPr lang="en-US" sz="1600">
+                <a:solidFill>
+                  <a:srgbClr val="027180"/>
+                </a:solidFill>
+                <a:latin typeface="+mj-lt"/>
+                <a:cs typeface="Arial" charset="0"/>
+              </a:rPr>
+              <a:t>Kelvin follow</a:t>
+            </a:r>
+          </a:p>
+        </p:txBody>
+      </p:sp>
+      <p:sp>
+        <p:nvSpPr>
+          <p:cNvPr id="31" name="Rectangle 30">
+            <a:extLst>
+              <a:ext uri="{FF2B5EF4-FFF2-40B4-BE49-F238E27FC236}">
+                <a16:creationId xmlns:a16="http://schemas.microsoft.com/office/drawing/2014/main" id="{6323EBC5-7E79-453A-8E4C-2281109199AF}"/>
+              </a:ext>
+            </a:extLst>
+          </p:cNvPr>
+          <p:cNvSpPr/>
+          <p:nvPr/>
+        </p:nvSpPr>
+        <p:spPr>
+          <a:xfrm>
+            <a:off x="9997675" y="192759"/>
+            <a:ext cx="1810987" cy="754084"/>
+          </a:xfrm>
+          <a:prstGeom prst="rect">
+            <a:avLst/>
+          </a:prstGeom>
+          <a:solidFill>
+            <a:schemeClr val="accent3"/>
+          </a:solidFill>
+          <a:ln>
+            <a:solidFill>
+              <a:srgbClr val="027180"/>
+            </a:solidFill>
+          </a:ln>
+        </p:spPr>
+        <p:txBody>
+          <a:bodyPr rtlCol="0" anchor="ctr"/>
+          <a:lstStyle/>
+          <a:p>
+            <a:pPr algn="ctr" eaLnBrk="1" hangingPunct="1"/>
+            <a:r>
+              <a:rPr lang="en-US" sz="1600">
+                <a:solidFill>
+                  <a:schemeClr val="bg1"/>
+                </a:solidFill>
+                <a:latin typeface="+mj-lt"/>
+                <a:cs typeface="Arial" charset="0"/>
+              </a:rPr>
+              <a:t>Kin refine first</a:t>
+            </a:r>
+          </a:p>
+        </p:txBody>
+      </p:sp>
     </p:spTree>
     <p:extLst>
       <p:ext uri="{BB962C8B-B14F-4D97-AF65-F5344CB8AC3E}">
@@ -36311,6 +37899,53 @@
             <a:r>
               <a:rPr lang="fr-FR"/>
               <a:t>CONFIDENTIALITY LEVEL</a:t>
+            </a:r>
+          </a:p>
+        </p:txBody>
+      </p:sp>
+      <p:sp>
+        <p:nvSpPr>
+          <p:cNvPr id="10" name="Rectangle 9">
+            <a:extLst>
+              <a:ext uri="{FF2B5EF4-FFF2-40B4-BE49-F238E27FC236}">
+                <a16:creationId xmlns:a16="http://schemas.microsoft.com/office/drawing/2014/main" id="{D0443FC2-2F5B-4885-ABAA-138664DBDBE9}"/>
+              </a:ext>
+            </a:extLst>
+          </p:cNvPr>
+          <p:cNvSpPr/>
+          <p:nvPr/>
+        </p:nvSpPr>
+        <p:spPr>
+          <a:xfrm>
+            <a:off x="9901588" y="1046755"/>
+            <a:ext cx="1810987" cy="754084"/>
+          </a:xfrm>
+          <a:prstGeom prst="rect">
+            <a:avLst/>
+          </a:prstGeom>
+          <a:solidFill>
+            <a:schemeClr val="bg2"/>
+          </a:solidFill>
+          <a:ln>
+            <a:solidFill>
+              <a:srgbClr val="027180"/>
+            </a:solidFill>
+          </a:ln>
+        </p:spPr>
+        <p:txBody>
+          <a:bodyPr rtlCol="0" anchor="ctr"/>
+          <a:lstStyle/>
+          <a:p>
+            <a:pPr algn="ctr" eaLnBrk="1" hangingPunct="1"/>
+            <a:r>
+              <a:rPr lang="en-US" sz="1600">
+                <a:solidFill>
+                  <a:srgbClr val="027180"/>
+                </a:solidFill>
+                <a:latin typeface="+mj-lt"/>
+                <a:cs typeface="Arial" charset="0"/>
+              </a:rPr>
+              <a:t>Kelvin</a:t>
             </a:r>
           </a:p>
         </p:txBody>
@@ -36549,7 +38184,7 @@
                 <a:latin typeface="+mj-lt"/>
                 <a:cs typeface="Arial" charset="0"/>
               </a:rPr>
-              <a:t>confirmed</a:t>
+              <a:t>Kelvin</a:t>
             </a:r>
           </a:p>
         </p:txBody>
@@ -37348,6 +38983,53 @@
                 <a:latin typeface="Source Sans Pro" pitchFamily="34" charset="0"/>
               </a:rPr>
               <a:t>Example of calculating the buying effect</a:t>
+            </a:r>
+          </a:p>
+        </p:txBody>
+      </p:sp>
+      <p:sp>
+        <p:nvSpPr>
+          <p:cNvPr id="12" name="Rectangle 11">
+            <a:extLst>
+              <a:ext uri="{FF2B5EF4-FFF2-40B4-BE49-F238E27FC236}">
+                <a16:creationId xmlns:a16="http://schemas.microsoft.com/office/drawing/2014/main" id="{833F5CFE-E980-483A-95EB-1535E7C0CF9F}"/>
+              </a:ext>
+            </a:extLst>
+          </p:cNvPr>
+          <p:cNvSpPr/>
+          <p:nvPr/>
+        </p:nvSpPr>
+        <p:spPr>
+          <a:xfrm>
+            <a:off x="10234097" y="145200"/>
+            <a:ext cx="1810987" cy="754084"/>
+          </a:xfrm>
+          <a:prstGeom prst="rect">
+            <a:avLst/>
+          </a:prstGeom>
+          <a:solidFill>
+            <a:schemeClr val="bg2"/>
+          </a:solidFill>
+          <a:ln>
+            <a:solidFill>
+              <a:srgbClr val="027180"/>
+            </a:solidFill>
+          </a:ln>
+        </p:spPr>
+        <p:txBody>
+          <a:bodyPr rtlCol="0" anchor="ctr"/>
+          <a:lstStyle/>
+          <a:p>
+            <a:pPr algn="ctr" eaLnBrk="1" hangingPunct="1"/>
+            <a:r>
+              <a:rPr lang="en-US" sz="1600">
+                <a:solidFill>
+                  <a:srgbClr val="027180"/>
+                </a:solidFill>
+                <a:latin typeface="+mj-lt"/>
+                <a:cs typeface="Arial" charset="0"/>
+              </a:rPr>
+              <a:t>Kelvin</a:t>
             </a:r>
           </a:p>
         </p:txBody>
@@ -39174,6 +40856,53 @@
           </a:p>
         </p:txBody>
       </p:sp>
+      <p:sp>
+        <p:nvSpPr>
+          <p:cNvPr id="10" name="Rectangle 9">
+            <a:extLst>
+              <a:ext uri="{FF2B5EF4-FFF2-40B4-BE49-F238E27FC236}">
+                <a16:creationId xmlns:a16="http://schemas.microsoft.com/office/drawing/2014/main" id="{3F0B958F-C69F-418B-9C72-AD52677AEF9E}"/>
+              </a:ext>
+            </a:extLst>
+          </p:cNvPr>
+          <p:cNvSpPr/>
+          <p:nvPr/>
+        </p:nvSpPr>
+        <p:spPr>
+          <a:xfrm>
+            <a:off x="10076139" y="302910"/>
+            <a:ext cx="1810987" cy="754084"/>
+          </a:xfrm>
+          <a:prstGeom prst="rect">
+            <a:avLst/>
+          </a:prstGeom>
+          <a:solidFill>
+            <a:schemeClr val="bg2"/>
+          </a:solidFill>
+          <a:ln>
+            <a:solidFill>
+              <a:srgbClr val="027180"/>
+            </a:solidFill>
+          </a:ln>
+        </p:spPr>
+        <p:txBody>
+          <a:bodyPr rtlCol="0" anchor="ctr"/>
+          <a:lstStyle/>
+          <a:p>
+            <a:pPr algn="ctr" eaLnBrk="1" hangingPunct="1"/>
+            <a:r>
+              <a:rPr lang="en-US" sz="1600">
+                <a:solidFill>
+                  <a:srgbClr val="027180"/>
+                </a:solidFill>
+                <a:latin typeface="+mj-lt"/>
+                <a:cs typeface="Arial" charset="0"/>
+              </a:rPr>
+              <a:t>Kelvin</a:t>
+            </a:r>
+          </a:p>
+        </p:txBody>
+      </p:sp>
     </p:spTree>
     <p:extLst>
       <p:ext uri="{BB962C8B-B14F-4D97-AF65-F5344CB8AC3E}">
@@ -39812,6 +41541,57 @@
           </a:p>
           <a:p>
             <a:endParaRPr lang="en-US"/>
+          </a:p>
+        </p:txBody>
+      </p:sp>
+      <p:sp>
+        <p:nvSpPr>
+          <p:cNvPr id="9" name="Rectangle 8">
+            <a:extLst>
+              <a:ext uri="{FF2B5EF4-FFF2-40B4-BE49-F238E27FC236}">
+                <a16:creationId xmlns:a16="http://schemas.microsoft.com/office/drawing/2014/main" id="{FD530B00-889A-93D4-2464-59BC6A78E2EB}"/>
+              </a:ext>
+            </a:extLst>
+          </p:cNvPr>
+          <p:cNvSpPr/>
+          <p:nvPr/>
+        </p:nvSpPr>
+        <p:spPr>
+          <a:xfrm>
+            <a:off x="10677525" y="152400"/>
+            <a:ext cx="1219200" cy="517419"/>
+          </a:xfrm>
+          <a:prstGeom prst="rect">
+            <a:avLst/>
+          </a:prstGeom>
+          <a:solidFill>
+            <a:schemeClr val="accent3"/>
+          </a:solidFill>
+          <a:effectLst/>
+        </p:spPr>
+        <p:style>
+          <a:lnRef idx="1">
+            <a:schemeClr val="accent1"/>
+          </a:lnRef>
+          <a:fillRef idx="3">
+            <a:schemeClr val="accent1"/>
+          </a:fillRef>
+          <a:effectRef idx="2">
+            <a:schemeClr val="accent1"/>
+          </a:effectRef>
+          <a:fontRef idx="minor">
+            <a:schemeClr val="lt1"/>
+          </a:fontRef>
+        </p:style>
+        <p:txBody>
+          <a:bodyPr rtlCol="0" anchor="ctr"/>
+          <a:lstStyle/>
+          <a:p>
+            <a:pPr algn="ctr"/>
+            <a:r>
+              <a:rPr lang="en-US"/>
+              <a:t>Jacky</a:t>
+            </a:r>
           </a:p>
         </p:txBody>
       </p:sp>
@@ -40352,6 +42132,57 @@
           </a:p>
         </p:txBody>
       </p:sp>
+      <p:sp>
+        <p:nvSpPr>
+          <p:cNvPr id="12" name="Rectangle 11">
+            <a:extLst>
+              <a:ext uri="{FF2B5EF4-FFF2-40B4-BE49-F238E27FC236}">
+                <a16:creationId xmlns:a16="http://schemas.microsoft.com/office/drawing/2014/main" id="{400F5993-950E-CF8D-EA25-EFF090228AC9}"/>
+              </a:ext>
+            </a:extLst>
+          </p:cNvPr>
+          <p:cNvSpPr/>
+          <p:nvPr/>
+        </p:nvSpPr>
+        <p:spPr>
+          <a:xfrm>
+            <a:off x="10677525" y="152400"/>
+            <a:ext cx="1219200" cy="517419"/>
+          </a:xfrm>
+          <a:prstGeom prst="rect">
+            <a:avLst/>
+          </a:prstGeom>
+          <a:solidFill>
+            <a:schemeClr val="accent3"/>
+          </a:solidFill>
+          <a:effectLst/>
+        </p:spPr>
+        <p:style>
+          <a:lnRef idx="1">
+            <a:schemeClr val="accent1"/>
+          </a:lnRef>
+          <a:fillRef idx="3">
+            <a:schemeClr val="accent1"/>
+          </a:fillRef>
+          <a:effectRef idx="2">
+            <a:schemeClr val="accent1"/>
+          </a:effectRef>
+          <a:fontRef idx="minor">
+            <a:schemeClr val="lt1"/>
+          </a:fontRef>
+        </p:style>
+        <p:txBody>
+          <a:bodyPr rtlCol="0" anchor="ctr"/>
+          <a:lstStyle/>
+          <a:p>
+            <a:pPr algn="ctr"/>
+            <a:r>
+              <a:rPr lang="en-US"/>
+              <a:t>Jacky</a:t>
+            </a:r>
+          </a:p>
+        </p:txBody>
+      </p:sp>
     </p:spTree>
     <p:extLst>
       <p:ext uri="{BB962C8B-B14F-4D97-AF65-F5344CB8AC3E}">
@@ -40602,6 +42433,57 @@
           </a:prstGeom>
         </p:spPr>
       </p:pic>
+      <p:sp>
+        <p:nvSpPr>
+          <p:cNvPr id="9" name="Rectangle 8">
+            <a:extLst>
+              <a:ext uri="{FF2B5EF4-FFF2-40B4-BE49-F238E27FC236}">
+                <a16:creationId xmlns:a16="http://schemas.microsoft.com/office/drawing/2014/main" id="{2D8337EC-CB32-2290-9381-DFF61296C1D6}"/>
+              </a:ext>
+            </a:extLst>
+          </p:cNvPr>
+          <p:cNvSpPr/>
+          <p:nvPr/>
+        </p:nvSpPr>
+        <p:spPr>
+          <a:xfrm>
+            <a:off x="10677525" y="152400"/>
+            <a:ext cx="1219200" cy="517419"/>
+          </a:xfrm>
+          <a:prstGeom prst="rect">
+            <a:avLst/>
+          </a:prstGeom>
+          <a:solidFill>
+            <a:schemeClr val="accent3"/>
+          </a:solidFill>
+          <a:effectLst/>
+        </p:spPr>
+        <p:style>
+          <a:lnRef idx="1">
+            <a:schemeClr val="accent1"/>
+          </a:lnRef>
+          <a:fillRef idx="3">
+            <a:schemeClr val="accent1"/>
+          </a:fillRef>
+          <a:effectRef idx="2">
+            <a:schemeClr val="accent1"/>
+          </a:effectRef>
+          <a:fontRef idx="minor">
+            <a:schemeClr val="lt1"/>
+          </a:fontRef>
+        </p:style>
+        <p:txBody>
+          <a:bodyPr rtlCol="0" anchor="ctr"/>
+          <a:lstStyle/>
+          <a:p>
+            <a:pPr algn="ctr"/>
+            <a:r>
+              <a:rPr lang="en-US"/>
+              <a:t>Jacky</a:t>
+            </a:r>
+          </a:p>
+        </p:txBody>
+      </p:sp>
     </p:spTree>
     <p:extLst>
       <p:ext uri="{BB962C8B-B14F-4D97-AF65-F5344CB8AC3E}">
@@ -42066,6 +43948,57 @@
           </a:p>
         </p:txBody>
       </p:sp>
+      <p:sp>
+        <p:nvSpPr>
+          <p:cNvPr id="10" name="Rectangle 9">
+            <a:extLst>
+              <a:ext uri="{FF2B5EF4-FFF2-40B4-BE49-F238E27FC236}">
+                <a16:creationId xmlns:a16="http://schemas.microsoft.com/office/drawing/2014/main" id="{B922F867-B1B0-4AB7-8E93-4C925139043B}"/>
+              </a:ext>
+            </a:extLst>
+          </p:cNvPr>
+          <p:cNvSpPr/>
+          <p:nvPr/>
+        </p:nvSpPr>
+        <p:spPr>
+          <a:xfrm>
+            <a:off x="10677525" y="152400"/>
+            <a:ext cx="1219200" cy="517419"/>
+          </a:xfrm>
+          <a:prstGeom prst="rect">
+            <a:avLst/>
+          </a:prstGeom>
+          <a:solidFill>
+            <a:schemeClr val="accent3"/>
+          </a:solidFill>
+          <a:effectLst/>
+        </p:spPr>
+        <p:style>
+          <a:lnRef idx="1">
+            <a:schemeClr val="accent1"/>
+          </a:lnRef>
+          <a:fillRef idx="3">
+            <a:schemeClr val="accent1"/>
+          </a:fillRef>
+          <a:effectRef idx="2">
+            <a:schemeClr val="accent1"/>
+          </a:effectRef>
+          <a:fontRef idx="minor">
+            <a:schemeClr val="lt1"/>
+          </a:fontRef>
+        </p:style>
+        <p:txBody>
+          <a:bodyPr rtlCol="0" anchor="ctr"/>
+          <a:lstStyle/>
+          <a:p>
+            <a:pPr algn="ctr"/>
+            <a:r>
+              <a:rPr lang="en-US"/>
+              <a:t>Jacky</a:t>
+            </a:r>
+          </a:p>
+        </p:txBody>
+      </p:sp>
     </p:spTree>
     <p:extLst>
       <p:ext uri="{BB962C8B-B14F-4D97-AF65-F5344CB8AC3E}">
@@ -42334,6 +44267,57 @@
           </a:prstGeom>
         </p:spPr>
       </p:pic>
+      <p:sp>
+        <p:nvSpPr>
+          <p:cNvPr id="9" name="Rectangle 8">
+            <a:extLst>
+              <a:ext uri="{FF2B5EF4-FFF2-40B4-BE49-F238E27FC236}">
+                <a16:creationId xmlns:a16="http://schemas.microsoft.com/office/drawing/2014/main" id="{AB7AB938-25E2-1F46-0F29-9A4FD0A8982D}"/>
+              </a:ext>
+            </a:extLst>
+          </p:cNvPr>
+          <p:cNvSpPr/>
+          <p:nvPr/>
+        </p:nvSpPr>
+        <p:spPr>
+          <a:xfrm>
+            <a:off x="10677525" y="152400"/>
+            <a:ext cx="1219200" cy="517419"/>
+          </a:xfrm>
+          <a:prstGeom prst="rect">
+            <a:avLst/>
+          </a:prstGeom>
+          <a:solidFill>
+            <a:schemeClr val="accent3"/>
+          </a:solidFill>
+          <a:effectLst/>
+        </p:spPr>
+        <p:style>
+          <a:lnRef idx="1">
+            <a:schemeClr val="accent1"/>
+          </a:lnRef>
+          <a:fillRef idx="3">
+            <a:schemeClr val="accent1"/>
+          </a:fillRef>
+          <a:effectRef idx="2">
+            <a:schemeClr val="accent1"/>
+          </a:effectRef>
+          <a:fontRef idx="minor">
+            <a:schemeClr val="lt1"/>
+          </a:fontRef>
+        </p:style>
+        <p:txBody>
+          <a:bodyPr rtlCol="0" anchor="ctr"/>
+          <a:lstStyle/>
+          <a:p>
+            <a:pPr algn="ctr"/>
+            <a:r>
+              <a:rPr lang="en-US"/>
+              <a:t>Jacky</a:t>
+            </a:r>
+          </a:p>
+        </p:txBody>
+      </p:sp>
     </p:spTree>
     <p:extLst>
       <p:ext uri="{BB962C8B-B14F-4D97-AF65-F5344CB8AC3E}">
@@ -42954,6 +44938,53 @@
                 <a:cs typeface="Arial" panose="020B0604020202020204" pitchFamily="34" charset="0"/>
               </a:rPr>
               <a:t>Correlation Matrix with highly correlated features with buying L&amp;H and claimed previously</a:t>
+            </a:r>
+          </a:p>
+        </p:txBody>
+      </p:sp>
+      <p:sp>
+        <p:nvSpPr>
+          <p:cNvPr id="9" name="Rectangle 8">
+            <a:extLst>
+              <a:ext uri="{FF2B5EF4-FFF2-40B4-BE49-F238E27FC236}">
+                <a16:creationId xmlns:a16="http://schemas.microsoft.com/office/drawing/2014/main" id="{31771517-F980-4B2D-8B20-DB029E22C139}"/>
+              </a:ext>
+            </a:extLst>
+          </p:cNvPr>
+          <p:cNvSpPr/>
+          <p:nvPr/>
+        </p:nvSpPr>
+        <p:spPr>
+          <a:xfrm>
+            <a:off x="9997675" y="192759"/>
+            <a:ext cx="1810987" cy="754084"/>
+          </a:xfrm>
+          <a:prstGeom prst="rect">
+            <a:avLst/>
+          </a:prstGeom>
+          <a:solidFill>
+            <a:schemeClr val="bg2"/>
+          </a:solidFill>
+          <a:ln>
+            <a:solidFill>
+              <a:srgbClr val="027180"/>
+            </a:solidFill>
+          </a:ln>
+        </p:spPr>
+        <p:txBody>
+          <a:bodyPr rtlCol="0" anchor="ctr"/>
+          <a:lstStyle/>
+          <a:p>
+            <a:pPr algn="ctr" eaLnBrk="1" hangingPunct="1"/>
+            <a:r>
+              <a:rPr lang="en-US" sz="1600">
+                <a:solidFill>
+                  <a:srgbClr val="027180"/>
+                </a:solidFill>
+                <a:latin typeface="+mj-lt"/>
+                <a:cs typeface="Arial" charset="0"/>
+              </a:rPr>
+              <a:t>Kelvin</a:t>
             </a:r>
           </a:p>
         </p:txBody>
@@ -43270,6 +45301,75 @@
           </a:prstGeom>
         </p:spPr>
       </p:pic>
+      <p:sp>
+        <p:nvSpPr>
+          <p:cNvPr id="10" name="Rectangle 9">
+            <a:extLst>
+              <a:ext uri="{FF2B5EF4-FFF2-40B4-BE49-F238E27FC236}">
+                <a16:creationId xmlns:a16="http://schemas.microsoft.com/office/drawing/2014/main" id="{C6E52774-DDAA-41EA-AFC0-061C480E2173}"/>
+              </a:ext>
+            </a:extLst>
+          </p:cNvPr>
+          <p:cNvSpPr/>
+          <p:nvPr/>
+        </p:nvSpPr>
+        <p:spPr>
+          <a:xfrm>
+            <a:off x="9997675" y="192759"/>
+            <a:ext cx="1810987" cy="754084"/>
+          </a:xfrm>
+          <a:prstGeom prst="rect">
+            <a:avLst/>
+          </a:prstGeom>
+          <a:solidFill>
+            <a:srgbClr val="FCD385"/>
+          </a:solidFill>
+          <a:ln>
+            <a:solidFill>
+              <a:srgbClr val="027180"/>
+            </a:solidFill>
+          </a:ln>
+        </p:spPr>
+        <p:txBody>
+          <a:bodyPr rtlCol="0" anchor="ctr"/>
+          <a:lstStyle/>
+          <a:p>
+            <a:pPr marL="0" marR="0" lvl="0" indent="0" algn="ctr" defTabSz="914400" eaLnBrk="1" fontAlgn="auto" latinLnBrk="0" hangingPunct="1">
+              <a:lnSpc>
+                <a:spcPct val="100000"/>
+              </a:lnSpc>
+              <a:spcBef>
+                <a:spcPts val="0"/>
+              </a:spcBef>
+              <a:spcAft>
+                <a:spcPts val="0"/>
+              </a:spcAft>
+              <a:buClrTx/>
+              <a:buSzTx/>
+              <a:buFontTx/>
+              <a:buNone/>
+              <a:tabLst/>
+              <a:defRPr/>
+            </a:pPr>
+            <a:r>
+              <a:rPr kumimoji="0" lang="en-US" sz="1600" b="0" i="0" u="none" strike="noStrike" kern="0" cap="none" spc="0" normalizeH="0" baseline="0" noProof="0">
+                <a:ln>
+                  <a:noFill/>
+                </a:ln>
+                <a:solidFill>
+                  <a:srgbClr val="027180"/>
+                </a:solidFill>
+                <a:effectLst/>
+                <a:uLnTx/>
+                <a:uFillTx/>
+                <a:latin typeface="Source Sans Pro"/>
+                <a:cs typeface="Arial" charset="0"/>
+              </a:rPr>
+              <a:t>Kelvin</a:t>
+            </a:r>
+          </a:p>
+        </p:txBody>
+      </p:sp>
     </p:spTree>
     <p:extLst>
       <p:ext uri="{BB962C8B-B14F-4D97-AF65-F5344CB8AC3E}">
@@ -43446,6 +45546,75 @@
           </a:prstGeom>
         </p:spPr>
       </p:pic>
+      <p:sp>
+        <p:nvSpPr>
+          <p:cNvPr id="7" name="Rectangle 6">
+            <a:extLst>
+              <a:ext uri="{FF2B5EF4-FFF2-40B4-BE49-F238E27FC236}">
+                <a16:creationId xmlns:a16="http://schemas.microsoft.com/office/drawing/2014/main" id="{E4FF92F3-99E0-4688-8D93-06887766D5C4}"/>
+              </a:ext>
+            </a:extLst>
+          </p:cNvPr>
+          <p:cNvSpPr/>
+          <p:nvPr/>
+        </p:nvSpPr>
+        <p:spPr>
+          <a:xfrm>
+            <a:off x="9997675" y="192759"/>
+            <a:ext cx="1810987" cy="754084"/>
+          </a:xfrm>
+          <a:prstGeom prst="rect">
+            <a:avLst/>
+          </a:prstGeom>
+          <a:solidFill>
+            <a:srgbClr val="FCD385"/>
+          </a:solidFill>
+          <a:ln>
+            <a:solidFill>
+              <a:srgbClr val="027180"/>
+            </a:solidFill>
+          </a:ln>
+        </p:spPr>
+        <p:txBody>
+          <a:bodyPr rtlCol="0" anchor="ctr"/>
+          <a:lstStyle/>
+          <a:p>
+            <a:pPr marL="0" marR="0" lvl="0" indent="0" algn="ctr" defTabSz="914400" eaLnBrk="1" fontAlgn="auto" latinLnBrk="0" hangingPunct="1">
+              <a:lnSpc>
+                <a:spcPct val="100000"/>
+              </a:lnSpc>
+              <a:spcBef>
+                <a:spcPts val="0"/>
+              </a:spcBef>
+              <a:spcAft>
+                <a:spcPts val="0"/>
+              </a:spcAft>
+              <a:buClrTx/>
+              <a:buSzTx/>
+              <a:buFontTx/>
+              <a:buNone/>
+              <a:tabLst/>
+              <a:defRPr/>
+            </a:pPr>
+            <a:r>
+              <a:rPr kumimoji="0" lang="en-US" sz="1600" b="0" i="0" u="none" strike="noStrike" kern="0" cap="none" spc="0" normalizeH="0" baseline="0" noProof="0">
+                <a:ln>
+                  <a:noFill/>
+                </a:ln>
+                <a:solidFill>
+                  <a:srgbClr val="027180"/>
+                </a:solidFill>
+                <a:effectLst/>
+                <a:uLnTx/>
+                <a:uFillTx/>
+                <a:latin typeface="Source Sans Pro"/>
+                <a:cs typeface="Arial" charset="0"/>
+              </a:rPr>
+              <a:t>Kelvin</a:t>
+            </a:r>
+          </a:p>
+        </p:txBody>
+      </p:sp>
     </p:spTree>
     <p:extLst>
       <p:ext uri="{BB962C8B-B14F-4D97-AF65-F5344CB8AC3E}">
